--- a/FYP/组会/2026.9.24/9.24-v4.pptx
+++ b/FYP/组会/2026.9.24/9.24-v4.pptx
@@ -1,23 +1,22 @@
 
 <file path=ppt/presentation.xml><?xml version="1.0" encoding="utf-8"?>
-<p:presentation xmlns:a="http://schemas.openxmlformats.org/drawingml/2006/main" xmlns:r="http://schemas.openxmlformats.org/officeDocument/2006/relationships" xmlns:p="http://schemas.openxmlformats.org/presentationml/2006/main" saveSubsetFonts="1" autoCompressPictures="0">
+<p:presentation xmlns:a="http://schemas.openxmlformats.org/drawingml/2006/main" xmlns:r="http://schemas.openxmlformats.org/officeDocument/2006/relationships" xmlns:p="http://schemas.openxmlformats.org/presentationml/2006/main" autoCompressPictures="0">
   <p:sldMasterIdLst>
     <p:sldMasterId id="2147483648" r:id="rId1"/>
   </p:sldMasterIdLst>
   <p:sldIdLst>
-    <p:sldId id="256" r:id="rId7"/>
-    <p:sldId id="257" r:id="rId8"/>
-    <p:sldId id="258" r:id="rId9"/>
-    <p:sldId id="259" r:id="rId10"/>
-    <p:sldId id="260" r:id="rId11"/>
-    <p:sldId id="261" r:id="rId12"/>
-    <p:sldId id="262" r:id="rId13"/>
-    <p:sldId id="263" r:id="rId14"/>
-    <p:sldId id="264" r:id="rId15"/>
-    <p:sldId id="265" r:id="rId16"/>
-    <p:sldId id="266" r:id="rId17"/>
+    <p:sldId id="256" r:id="rId3"/>
+    <p:sldId id="257" r:id="rId4"/>
+    <p:sldId id="258" r:id="rId5"/>
+    <p:sldId id="259" r:id="rId6"/>
+    <p:sldId id="260" r:id="rId7"/>
+    <p:sldId id="261" r:id="rId8"/>
+    <p:sldId id="262" r:id="rId9"/>
+    <p:sldId id="263" r:id="rId10"/>
+    <p:sldId id="265" r:id="rId11"/>
+    <p:sldId id="266" r:id="rId12"/>
   </p:sldIdLst>
-  <p:sldSz cx="12191969" cy="6858000" type="screen4x3"/>
+  <p:sldSz cx="12191365" cy="6858000" type="screen4x3"/>
   <p:notesSz cx="6858000" cy="9144000"/>
   <p:defaultTextStyle>
     <a:defPPr>
@@ -114,6 +113,22 @@
       </a:defRPr>
     </a:lvl9pPr>
   </p:defaultTextStyle>
+  <p:extLst>
+    <p:ext uri="{EFAFB233-063F-42B5-8137-9DF3F51BA10A}">
+      <p15:sldGuideLst xmlns:p15="http://schemas.microsoft.com/office/powerpoint/2012/main">
+        <p15:guide id="1" orient="horz" pos="2160" userDrawn="1">
+          <p15:clr>
+            <a:srgbClr val="A4A3A4"/>
+          </p15:clr>
+        </p15:guide>
+        <p15:guide id="2" pos="2880" userDrawn="1">
+          <p15:clr>
+            <a:srgbClr val="A4A3A4"/>
+          </p15:clr>
+        </p15:guide>
+      </p15:sldGuideLst>
+    </p:ext>
+  </p:extLst>
 </p:presentation>
 </file>
 
@@ -298,7 +313,6 @@
           <a:p>
             <a:fld id="{5BCAD085-E8A6-8845-BD4E-CB4CCA059FC4}" type="datetimeFigureOut">
               <a:rPr lang="en-US" smtClean="0"/>
-              <a:t>1/27/13</a:t>
             </a:fld>
             <a:endParaRPr lang="en-US"/>
           </a:p>
@@ -340,18 +354,12 @@
           <a:p>
             <a:fld id="{C1FF6DA9-008F-8B48-92A6-B652298478BF}" type="slidenum">
               <a:rPr lang="en-US" smtClean="0"/>
-              <a:t>‹#›</a:t>
             </a:fld>
             <a:endParaRPr lang="en-US"/>
           </a:p>
         </p:txBody>
       </p:sp>
     </p:spTree>
-    <p:extLst>
-      <p:ext uri="{BB962C8B-B14F-4D97-AF65-F5344CB8AC3E}">
-        <p14:creationId xmlns:p14="http://schemas.microsoft.com/office/powerpoint/2010/main" val="3168075583"/>
-      </p:ext>
-    </p:extLst>
   </p:cSld>
   <p:clrMapOvr>
     <a:masterClrMapping/>
@@ -419,6 +427,7 @@
               <a:rPr lang="en-US" smtClean="0"/>
               <a:t>Click to edit Master text styles</a:t>
             </a:r>
+            <a:endParaRPr lang="en-US" smtClean="0"/>
           </a:p>
           <a:p>
             <a:pPr lvl="1"/>
@@ -426,6 +435,7 @@
               <a:rPr lang="en-US" smtClean="0"/>
               <a:t>Second level</a:t>
             </a:r>
+            <a:endParaRPr lang="en-US" smtClean="0"/>
           </a:p>
           <a:p>
             <a:pPr lvl="2"/>
@@ -433,6 +443,7 @@
               <a:rPr lang="en-US" smtClean="0"/>
               <a:t>Third level</a:t>
             </a:r>
+            <a:endParaRPr lang="en-US" smtClean="0"/>
           </a:p>
           <a:p>
             <a:pPr lvl="3"/>
@@ -440,6 +451,7 @@
               <a:rPr lang="en-US" smtClean="0"/>
               <a:t>Fourth level</a:t>
             </a:r>
+            <a:endParaRPr lang="en-US" smtClean="0"/>
           </a:p>
           <a:p>
             <a:pPr lvl="4"/>
@@ -468,7 +480,6 @@
           <a:p>
             <a:fld id="{5BCAD085-E8A6-8845-BD4E-CB4CCA059FC4}" type="datetimeFigureOut">
               <a:rPr lang="en-US" smtClean="0"/>
-              <a:t>1/27/13</a:t>
             </a:fld>
             <a:endParaRPr lang="en-US"/>
           </a:p>
@@ -510,18 +521,12 @@
           <a:p>
             <a:fld id="{C1FF6DA9-008F-8B48-92A6-B652298478BF}" type="slidenum">
               <a:rPr lang="en-US" smtClean="0"/>
-              <a:t>‹#›</a:t>
             </a:fld>
             <a:endParaRPr lang="en-US"/>
           </a:p>
         </p:txBody>
       </p:sp>
     </p:spTree>
-    <p:extLst>
-      <p:ext uri="{BB962C8B-B14F-4D97-AF65-F5344CB8AC3E}">
-        <p14:creationId xmlns:p14="http://schemas.microsoft.com/office/powerpoint/2010/main" val="2910927964"/>
-      </p:ext>
-    </p:extLst>
   </p:cSld>
   <p:clrMapOvr>
     <a:masterClrMapping/>
@@ -599,6 +604,7 @@
               <a:rPr lang="en-US" smtClean="0"/>
               <a:t>Click to edit Master text styles</a:t>
             </a:r>
+            <a:endParaRPr lang="en-US" smtClean="0"/>
           </a:p>
           <a:p>
             <a:pPr lvl="1"/>
@@ -606,6 +612,7 @@
               <a:rPr lang="en-US" smtClean="0"/>
               <a:t>Second level</a:t>
             </a:r>
+            <a:endParaRPr lang="en-US" smtClean="0"/>
           </a:p>
           <a:p>
             <a:pPr lvl="2"/>
@@ -613,6 +620,7 @@
               <a:rPr lang="en-US" smtClean="0"/>
               <a:t>Third level</a:t>
             </a:r>
+            <a:endParaRPr lang="en-US" smtClean="0"/>
           </a:p>
           <a:p>
             <a:pPr lvl="3"/>
@@ -620,6 +628,7 @@
               <a:rPr lang="en-US" smtClean="0"/>
               <a:t>Fourth level</a:t>
             </a:r>
+            <a:endParaRPr lang="en-US" smtClean="0"/>
           </a:p>
           <a:p>
             <a:pPr lvl="4"/>
@@ -648,7 +657,6 @@
           <a:p>
             <a:fld id="{5BCAD085-E8A6-8845-BD4E-CB4CCA059FC4}" type="datetimeFigureOut">
               <a:rPr lang="en-US" smtClean="0"/>
-              <a:t>1/27/13</a:t>
             </a:fld>
             <a:endParaRPr lang="en-US"/>
           </a:p>
@@ -690,18 +698,12 @@
           <a:p>
             <a:fld id="{C1FF6DA9-008F-8B48-92A6-B652298478BF}" type="slidenum">
               <a:rPr lang="en-US" smtClean="0"/>
-              <a:t>‹#›</a:t>
             </a:fld>
             <a:endParaRPr lang="en-US"/>
           </a:p>
         </p:txBody>
       </p:sp>
     </p:spTree>
-    <p:extLst>
-      <p:ext uri="{BB962C8B-B14F-4D97-AF65-F5344CB8AC3E}">
-        <p14:creationId xmlns:p14="http://schemas.microsoft.com/office/powerpoint/2010/main" val="3612223792"/>
-      </p:ext>
-    </p:extLst>
   </p:cSld>
   <p:clrMapOvr>
     <a:masterClrMapping/>
@@ -769,6 +771,7 @@
               <a:rPr lang="en-US" smtClean="0"/>
               <a:t>Click to edit Master text styles</a:t>
             </a:r>
+            <a:endParaRPr lang="en-US" smtClean="0"/>
           </a:p>
           <a:p>
             <a:pPr lvl="1"/>
@@ -776,6 +779,7 @@
               <a:rPr lang="en-US" smtClean="0"/>
               <a:t>Second level</a:t>
             </a:r>
+            <a:endParaRPr lang="en-US" smtClean="0"/>
           </a:p>
           <a:p>
             <a:pPr lvl="2"/>
@@ -783,6 +787,7 @@
               <a:rPr lang="en-US" smtClean="0"/>
               <a:t>Third level</a:t>
             </a:r>
+            <a:endParaRPr lang="en-US" smtClean="0"/>
           </a:p>
           <a:p>
             <a:pPr lvl="3"/>
@@ -790,6 +795,7 @@
               <a:rPr lang="en-US" smtClean="0"/>
               <a:t>Fourth level</a:t>
             </a:r>
+            <a:endParaRPr lang="en-US" smtClean="0"/>
           </a:p>
           <a:p>
             <a:pPr lvl="4"/>
@@ -818,7 +824,6 @@
           <a:p>
             <a:fld id="{5BCAD085-E8A6-8845-BD4E-CB4CCA059FC4}" type="datetimeFigureOut">
               <a:rPr lang="en-US" smtClean="0"/>
-              <a:t>1/27/13</a:t>
             </a:fld>
             <a:endParaRPr lang="en-US"/>
           </a:p>
@@ -860,18 +865,12 @@
           <a:p>
             <a:fld id="{C1FF6DA9-008F-8B48-92A6-B652298478BF}" type="slidenum">
               <a:rPr lang="en-US" smtClean="0"/>
-              <a:t>‹#›</a:t>
             </a:fld>
             <a:endParaRPr lang="en-US"/>
           </a:p>
         </p:txBody>
       </p:sp>
     </p:spTree>
-    <p:extLst>
-      <p:ext uri="{BB962C8B-B14F-4D97-AF65-F5344CB8AC3E}">
-        <p14:creationId xmlns:p14="http://schemas.microsoft.com/office/powerpoint/2010/main" val="2614314258"/>
-      </p:ext>
-    </p:extLst>
   </p:cSld>
   <p:clrMapOvr>
     <a:masterClrMapping/>
@@ -1044,6 +1043,7 @@
               <a:rPr lang="en-US" smtClean="0"/>
               <a:t>Click to edit Master text styles</a:t>
             </a:r>
+            <a:endParaRPr lang="en-US" smtClean="0"/>
           </a:p>
         </p:txBody>
       </p:sp>
@@ -1064,7 +1064,6 @@
           <a:p>
             <a:fld id="{5BCAD085-E8A6-8845-BD4E-CB4CCA059FC4}" type="datetimeFigureOut">
               <a:rPr lang="en-US" smtClean="0"/>
-              <a:t>1/27/13</a:t>
             </a:fld>
             <a:endParaRPr lang="en-US"/>
           </a:p>
@@ -1106,18 +1105,12 @@
           <a:p>
             <a:fld id="{C1FF6DA9-008F-8B48-92A6-B652298478BF}" type="slidenum">
               <a:rPr lang="en-US" smtClean="0"/>
-              <a:t>‹#›</a:t>
             </a:fld>
             <a:endParaRPr lang="en-US"/>
           </a:p>
         </p:txBody>
       </p:sp>
     </p:spTree>
-    <p:extLst>
-      <p:ext uri="{BB962C8B-B14F-4D97-AF65-F5344CB8AC3E}">
-        <p14:creationId xmlns:p14="http://schemas.microsoft.com/office/powerpoint/2010/main" val="960648375"/>
-      </p:ext>
-    </p:extLst>
   </p:cSld>
   <p:clrMapOvr>
     <a:masterClrMapping/>
@@ -1218,6 +1211,7 @@
               <a:rPr lang="en-US" smtClean="0"/>
               <a:t>Click to edit Master text styles</a:t>
             </a:r>
+            <a:endParaRPr lang="en-US" smtClean="0"/>
           </a:p>
           <a:p>
             <a:pPr lvl="1"/>
@@ -1225,6 +1219,7 @@
               <a:rPr lang="en-US" smtClean="0"/>
               <a:t>Second level</a:t>
             </a:r>
+            <a:endParaRPr lang="en-US" smtClean="0"/>
           </a:p>
           <a:p>
             <a:pPr lvl="2"/>
@@ -1232,6 +1227,7 @@
               <a:rPr lang="en-US" smtClean="0"/>
               <a:t>Third level</a:t>
             </a:r>
+            <a:endParaRPr lang="en-US" smtClean="0"/>
           </a:p>
           <a:p>
             <a:pPr lvl="3"/>
@@ -1239,6 +1235,7 @@
               <a:rPr lang="en-US" smtClean="0"/>
               <a:t>Fourth level</a:t>
             </a:r>
+            <a:endParaRPr lang="en-US" smtClean="0"/>
           </a:p>
           <a:p>
             <a:pPr lvl="4"/>
@@ -1303,6 +1300,7 @@
               <a:rPr lang="en-US" smtClean="0"/>
               <a:t>Click to edit Master text styles</a:t>
             </a:r>
+            <a:endParaRPr lang="en-US" smtClean="0"/>
           </a:p>
           <a:p>
             <a:pPr lvl="1"/>
@@ -1310,6 +1308,7 @@
               <a:rPr lang="en-US" smtClean="0"/>
               <a:t>Second level</a:t>
             </a:r>
+            <a:endParaRPr lang="en-US" smtClean="0"/>
           </a:p>
           <a:p>
             <a:pPr lvl="2"/>
@@ -1317,6 +1316,7 @@
               <a:rPr lang="en-US" smtClean="0"/>
               <a:t>Third level</a:t>
             </a:r>
+            <a:endParaRPr lang="en-US" smtClean="0"/>
           </a:p>
           <a:p>
             <a:pPr lvl="3"/>
@@ -1324,6 +1324,7 @@
               <a:rPr lang="en-US" smtClean="0"/>
               <a:t>Fourth level</a:t>
             </a:r>
+            <a:endParaRPr lang="en-US" smtClean="0"/>
           </a:p>
           <a:p>
             <a:pPr lvl="4"/>
@@ -1352,7 +1353,6 @@
           <a:p>
             <a:fld id="{5BCAD085-E8A6-8845-BD4E-CB4CCA059FC4}" type="datetimeFigureOut">
               <a:rPr lang="en-US" smtClean="0"/>
-              <a:t>1/27/13</a:t>
             </a:fld>
             <a:endParaRPr lang="en-US"/>
           </a:p>
@@ -1394,18 +1394,12 @@
           <a:p>
             <a:fld id="{C1FF6DA9-008F-8B48-92A6-B652298478BF}" type="slidenum">
               <a:rPr lang="en-US" smtClean="0"/>
-              <a:t>‹#›</a:t>
             </a:fld>
             <a:endParaRPr lang="en-US"/>
           </a:p>
         </p:txBody>
       </p:sp>
     </p:spTree>
-    <p:extLst>
-      <p:ext uri="{BB962C8B-B14F-4D97-AF65-F5344CB8AC3E}">
-        <p14:creationId xmlns:p14="http://schemas.microsoft.com/office/powerpoint/2010/main" val="2782244947"/>
-      </p:ext>
-    </p:extLst>
   </p:cSld>
   <p:clrMapOvr>
     <a:masterClrMapping/>
@@ -1519,6 +1513,7 @@
               <a:rPr lang="en-US" smtClean="0"/>
               <a:t>Click to edit Master text styles</a:t>
             </a:r>
+            <a:endParaRPr lang="en-US" smtClean="0"/>
           </a:p>
         </p:txBody>
       </p:sp>
@@ -1575,6 +1570,7 @@
               <a:rPr lang="en-US" smtClean="0"/>
               <a:t>Click to edit Master text styles</a:t>
             </a:r>
+            <a:endParaRPr lang="en-US" smtClean="0"/>
           </a:p>
           <a:p>
             <a:pPr lvl="1"/>
@@ -1582,6 +1578,7 @@
               <a:rPr lang="en-US" smtClean="0"/>
               <a:t>Second level</a:t>
             </a:r>
+            <a:endParaRPr lang="en-US" smtClean="0"/>
           </a:p>
           <a:p>
             <a:pPr lvl="2"/>
@@ -1589,6 +1586,7 @@
               <a:rPr lang="en-US" smtClean="0"/>
               <a:t>Third level</a:t>
             </a:r>
+            <a:endParaRPr lang="en-US" smtClean="0"/>
           </a:p>
           <a:p>
             <a:pPr lvl="3"/>
@@ -1596,6 +1594,7 @@
               <a:rPr lang="en-US" smtClean="0"/>
               <a:t>Fourth level</a:t>
             </a:r>
+            <a:endParaRPr lang="en-US" smtClean="0"/>
           </a:p>
           <a:p>
             <a:pPr lvl="4"/>
@@ -1669,6 +1668,7 @@
               <a:rPr lang="en-US" smtClean="0"/>
               <a:t>Click to edit Master text styles</a:t>
             </a:r>
+            <a:endParaRPr lang="en-US" smtClean="0"/>
           </a:p>
         </p:txBody>
       </p:sp>
@@ -1725,6 +1725,7 @@
               <a:rPr lang="en-US" smtClean="0"/>
               <a:t>Click to edit Master text styles</a:t>
             </a:r>
+            <a:endParaRPr lang="en-US" smtClean="0"/>
           </a:p>
           <a:p>
             <a:pPr lvl="1"/>
@@ -1732,6 +1733,7 @@
               <a:rPr lang="en-US" smtClean="0"/>
               <a:t>Second level</a:t>
             </a:r>
+            <a:endParaRPr lang="en-US" smtClean="0"/>
           </a:p>
           <a:p>
             <a:pPr lvl="2"/>
@@ -1739,6 +1741,7 @@
               <a:rPr lang="en-US" smtClean="0"/>
               <a:t>Third level</a:t>
             </a:r>
+            <a:endParaRPr lang="en-US" smtClean="0"/>
           </a:p>
           <a:p>
             <a:pPr lvl="3"/>
@@ -1746,6 +1749,7 @@
               <a:rPr lang="en-US" smtClean="0"/>
               <a:t>Fourth level</a:t>
             </a:r>
+            <a:endParaRPr lang="en-US" smtClean="0"/>
           </a:p>
           <a:p>
             <a:pPr lvl="4"/>
@@ -1774,7 +1778,6 @@
           <a:p>
             <a:fld id="{5BCAD085-E8A6-8845-BD4E-CB4CCA059FC4}" type="datetimeFigureOut">
               <a:rPr lang="en-US" smtClean="0"/>
-              <a:t>1/27/13</a:t>
             </a:fld>
             <a:endParaRPr lang="en-US"/>
           </a:p>
@@ -1816,18 +1819,12 @@
           <a:p>
             <a:fld id="{C1FF6DA9-008F-8B48-92A6-B652298478BF}" type="slidenum">
               <a:rPr lang="en-US" smtClean="0"/>
-              <a:t>‹#›</a:t>
             </a:fld>
             <a:endParaRPr lang="en-US"/>
           </a:p>
         </p:txBody>
       </p:sp>
     </p:spTree>
-    <p:extLst>
-      <p:ext uri="{BB962C8B-B14F-4D97-AF65-F5344CB8AC3E}">
-        <p14:creationId xmlns:p14="http://schemas.microsoft.com/office/powerpoint/2010/main" val="990158736"/>
-      </p:ext>
-    </p:extLst>
   </p:cSld>
   <p:clrMapOvr>
     <a:masterClrMapping/>
@@ -1892,7 +1889,6 @@
           <a:p>
             <a:fld id="{5BCAD085-E8A6-8845-BD4E-CB4CCA059FC4}" type="datetimeFigureOut">
               <a:rPr lang="en-US" smtClean="0"/>
-              <a:t>1/27/13</a:t>
             </a:fld>
             <a:endParaRPr lang="en-US"/>
           </a:p>
@@ -1934,18 +1930,12 @@
           <a:p>
             <a:fld id="{C1FF6DA9-008F-8B48-92A6-B652298478BF}" type="slidenum">
               <a:rPr lang="en-US" smtClean="0"/>
-              <a:t>‹#›</a:t>
             </a:fld>
             <a:endParaRPr lang="en-US"/>
           </a:p>
         </p:txBody>
       </p:sp>
     </p:spTree>
-    <p:extLst>
-      <p:ext uri="{BB962C8B-B14F-4D97-AF65-F5344CB8AC3E}">
-        <p14:creationId xmlns:p14="http://schemas.microsoft.com/office/powerpoint/2010/main" val="727027711"/>
-      </p:ext>
-    </p:extLst>
   </p:cSld>
   <p:clrMapOvr>
     <a:masterClrMapping/>
@@ -1987,7 +1977,6 @@
           <a:p>
             <a:fld id="{5BCAD085-E8A6-8845-BD4E-CB4CCA059FC4}" type="datetimeFigureOut">
               <a:rPr lang="en-US" smtClean="0"/>
-              <a:t>1/27/13</a:t>
             </a:fld>
             <a:endParaRPr lang="en-US"/>
           </a:p>
@@ -2029,18 +2018,12 @@
           <a:p>
             <a:fld id="{C1FF6DA9-008F-8B48-92A6-B652298478BF}" type="slidenum">
               <a:rPr lang="en-US" smtClean="0"/>
-              <a:t>‹#›</a:t>
             </a:fld>
             <a:endParaRPr lang="en-US"/>
           </a:p>
         </p:txBody>
       </p:sp>
     </p:spTree>
-    <p:extLst>
-      <p:ext uri="{BB962C8B-B14F-4D97-AF65-F5344CB8AC3E}">
-        <p14:creationId xmlns:p14="http://schemas.microsoft.com/office/powerpoint/2010/main" val="1212999818"/>
-      </p:ext>
-    </p:extLst>
   </p:cSld>
   <p:clrMapOvr>
     <a:masterClrMapping/>
@@ -2150,6 +2133,7 @@
               <a:rPr lang="en-US" smtClean="0"/>
               <a:t>Click to edit Master text styles</a:t>
             </a:r>
+            <a:endParaRPr lang="en-US" smtClean="0"/>
           </a:p>
           <a:p>
             <a:pPr lvl="1"/>
@@ -2157,6 +2141,7 @@
               <a:rPr lang="en-US" smtClean="0"/>
               <a:t>Second level</a:t>
             </a:r>
+            <a:endParaRPr lang="en-US" smtClean="0"/>
           </a:p>
           <a:p>
             <a:pPr lvl="2"/>
@@ -2164,6 +2149,7 @@
               <a:rPr lang="en-US" smtClean="0"/>
               <a:t>Third level</a:t>
             </a:r>
+            <a:endParaRPr lang="en-US" smtClean="0"/>
           </a:p>
           <a:p>
             <a:pPr lvl="3"/>
@@ -2171,6 +2157,7 @@
               <a:rPr lang="en-US" smtClean="0"/>
               <a:t>Fourth level</a:t>
             </a:r>
+            <a:endParaRPr lang="en-US" smtClean="0"/>
           </a:p>
           <a:p>
             <a:pPr lvl="4"/>
@@ -2244,6 +2231,7 @@
               <a:rPr lang="en-US" smtClean="0"/>
               <a:t>Click to edit Master text styles</a:t>
             </a:r>
+            <a:endParaRPr lang="en-US" smtClean="0"/>
           </a:p>
         </p:txBody>
       </p:sp>
@@ -2264,7 +2252,6 @@
           <a:p>
             <a:fld id="{5BCAD085-E8A6-8845-BD4E-CB4CCA059FC4}" type="datetimeFigureOut">
               <a:rPr lang="en-US" smtClean="0"/>
-              <a:t>1/27/13</a:t>
             </a:fld>
             <a:endParaRPr lang="en-US"/>
           </a:p>
@@ -2306,18 +2293,12 @@
           <a:p>
             <a:fld id="{C1FF6DA9-008F-8B48-92A6-B652298478BF}" type="slidenum">
               <a:rPr lang="en-US" smtClean="0"/>
-              <a:t>‹#›</a:t>
             </a:fld>
             <a:endParaRPr lang="en-US"/>
           </a:p>
         </p:txBody>
       </p:sp>
     </p:spTree>
-    <p:extLst>
-      <p:ext uri="{BB962C8B-B14F-4D97-AF65-F5344CB8AC3E}">
-        <p14:creationId xmlns:p14="http://schemas.microsoft.com/office/powerpoint/2010/main" val="1840726560"/>
-      </p:ext>
-    </p:extLst>
   </p:cSld>
   <p:clrMapOvr>
     <a:masterClrMapping/>
@@ -2497,6 +2478,7 @@
               <a:rPr lang="en-US" smtClean="0"/>
               <a:t>Click to edit Master text styles</a:t>
             </a:r>
+            <a:endParaRPr lang="en-US" smtClean="0"/>
           </a:p>
         </p:txBody>
       </p:sp>
@@ -2517,7 +2499,6 @@
           <a:p>
             <a:fld id="{5BCAD085-E8A6-8845-BD4E-CB4CCA059FC4}" type="datetimeFigureOut">
               <a:rPr lang="en-US" smtClean="0"/>
-              <a:t>1/27/13</a:t>
             </a:fld>
             <a:endParaRPr lang="en-US"/>
           </a:p>
@@ -2559,18 +2540,12 @@
           <a:p>
             <a:fld id="{C1FF6DA9-008F-8B48-92A6-B652298478BF}" type="slidenum">
               <a:rPr lang="en-US" smtClean="0"/>
-              <a:t>‹#›</a:t>
             </a:fld>
             <a:endParaRPr lang="en-US"/>
           </a:p>
         </p:txBody>
       </p:sp>
     </p:spTree>
-    <p:extLst>
-      <p:ext uri="{BB962C8B-B14F-4D97-AF65-F5344CB8AC3E}">
-        <p14:creationId xmlns:p14="http://schemas.microsoft.com/office/powerpoint/2010/main" val="3889236939"/>
-      </p:ext>
-    </p:extLst>
   </p:cSld>
   <p:clrMapOvr>
     <a:masterClrMapping/>
@@ -2663,6 +2638,7 @@
               <a:rPr lang="en-US" smtClean="0"/>
               <a:t>Click to edit Master text styles</a:t>
             </a:r>
+            <a:endParaRPr lang="en-US" smtClean="0"/>
           </a:p>
           <a:p>
             <a:pPr lvl="1"/>
@@ -2670,6 +2646,7 @@
               <a:rPr lang="en-US" smtClean="0"/>
               <a:t>Second level</a:t>
             </a:r>
+            <a:endParaRPr lang="en-US" smtClean="0"/>
           </a:p>
           <a:p>
             <a:pPr lvl="2"/>
@@ -2677,6 +2654,7 @@
               <a:rPr lang="en-US" smtClean="0"/>
               <a:t>Third level</a:t>
             </a:r>
+            <a:endParaRPr lang="en-US" smtClean="0"/>
           </a:p>
           <a:p>
             <a:pPr lvl="3"/>
@@ -2684,6 +2662,7 @@
               <a:rPr lang="en-US" smtClean="0"/>
               <a:t>Fourth level</a:t>
             </a:r>
+            <a:endParaRPr lang="en-US" smtClean="0"/>
           </a:p>
           <a:p>
             <a:pPr lvl="4"/>
@@ -2730,7 +2709,6 @@
           <a:p>
             <a:fld id="{5BCAD085-E8A6-8845-BD4E-CB4CCA059FC4}" type="datetimeFigureOut">
               <a:rPr lang="en-US" smtClean="0"/>
-              <a:t>1/27/13</a:t>
             </a:fld>
             <a:endParaRPr lang="en-US"/>
           </a:p>
@@ -2808,18 +2786,12 @@
           <a:p>
             <a:fld id="{C1FF6DA9-008F-8B48-92A6-B652298478BF}" type="slidenum">
               <a:rPr lang="en-US" smtClean="0"/>
-              <a:t>‹#›</a:t>
             </a:fld>
             <a:endParaRPr lang="en-US"/>
           </a:p>
         </p:txBody>
       </p:sp>
     </p:spTree>
-    <p:extLst>
-      <p:ext uri="{BB962C8B-B14F-4D97-AF65-F5344CB8AC3E}">
-        <p14:creationId xmlns:p14="http://schemas.microsoft.com/office/powerpoint/2010/main" val="2209977519"/>
-      </p:ext>
-    </p:extLst>
   </p:cSld>
   <p:clrMap bg1="lt1" tx1="dk1" bg2="lt2" tx2="dk2" accent1="accent1" accent2="accent2" accent3="accent3" accent4="accent4" accent5="accent5" accent6="accent6" hlink="hlink" folHlink="folHlink"/>
   <p:sldLayoutIdLst>
@@ -2857,7 +2829,7 @@
         <a:spcBef>
           <a:spcPct val="20000"/>
         </a:spcBef>
-        <a:buFont typeface="Arial"/>
+        <a:buFont typeface="Arial" panose="020B0604020202020204"/>
         <a:buChar char="•"/>
         <a:defRPr sz="3200" kern="1200">
           <a:solidFill>
@@ -2872,7 +2844,7 @@
         <a:spcBef>
           <a:spcPct val="20000"/>
         </a:spcBef>
-        <a:buFont typeface="Arial"/>
+        <a:buFont typeface="Arial" panose="020B0604020202020204"/>
         <a:buChar char="–"/>
         <a:defRPr sz="2800" kern="1200">
           <a:solidFill>
@@ -2887,7 +2859,7 @@
         <a:spcBef>
           <a:spcPct val="20000"/>
         </a:spcBef>
-        <a:buFont typeface="Arial"/>
+        <a:buFont typeface="Arial" panose="020B0604020202020204"/>
         <a:buChar char="•"/>
         <a:defRPr sz="2400" kern="1200">
           <a:solidFill>
@@ -2902,7 +2874,7 @@
         <a:spcBef>
           <a:spcPct val="20000"/>
         </a:spcBef>
-        <a:buFont typeface="Arial"/>
+        <a:buFont typeface="Arial" panose="020B0604020202020204"/>
         <a:buChar char="–"/>
         <a:defRPr sz="2000" kern="1200">
           <a:solidFill>
@@ -2917,7 +2889,7 @@
         <a:spcBef>
           <a:spcPct val="20000"/>
         </a:spcBef>
-        <a:buFont typeface="Arial"/>
+        <a:buFont typeface="Arial" panose="020B0604020202020204"/>
         <a:buChar char="»"/>
         <a:defRPr sz="2000" kern="1200">
           <a:solidFill>
@@ -2932,7 +2904,7 @@
         <a:spcBef>
           <a:spcPct val="20000"/>
         </a:spcBef>
-        <a:buFont typeface="Arial"/>
+        <a:buFont typeface="Arial" panose="020B0604020202020204"/>
         <a:buChar char="•"/>
         <a:defRPr sz="2000" kern="1200">
           <a:solidFill>
@@ -2947,7 +2919,7 @@
         <a:spcBef>
           <a:spcPct val="20000"/>
         </a:spcBef>
-        <a:buFont typeface="Arial"/>
+        <a:buFont typeface="Arial" panose="020B0604020202020204"/>
         <a:buChar char="•"/>
         <a:defRPr sz="2000" kern="1200">
           <a:solidFill>
@@ -2962,7 +2934,7 @@
         <a:spcBef>
           <a:spcPct val="20000"/>
         </a:spcBef>
-        <a:buFont typeface="Arial"/>
+        <a:buFont typeface="Arial" panose="020B0604020202020204"/>
         <a:buChar char="•"/>
         <a:defRPr sz="2000" kern="1200">
           <a:solidFill>
@@ -2977,7 +2949,7 @@
         <a:spcBef>
           <a:spcPct val="20000"/>
         </a:spcBef>
-        <a:buFont typeface="Arial"/>
+        <a:buFont typeface="Arial" panose="020B0604020202020204"/>
         <a:buChar char="•"/>
         <a:defRPr sz="2000" kern="1200">
           <a:solidFill>
@@ -3089,7 +3061,7 @@
 </file>
 
 <file path=ppt/slides/slide1.xml><?xml version="1.0" encoding="utf-8"?>
-<p:sld xmlns:a="http://schemas.openxmlformats.org/drawingml/2006/main" xmlns:p="http://schemas.openxmlformats.org/presentationml/2006/main" xmlns:r="http://schemas.openxmlformats.org/officeDocument/2006/relationships">
+<p:sld xmlns:a="http://schemas.openxmlformats.org/drawingml/2006/main" xmlns:r="http://schemas.openxmlformats.org/officeDocument/2006/relationships" xmlns:p="http://schemas.openxmlformats.org/presentationml/2006/main">
   <p:cSld>
     <p:spTree>
       <p:nvGrpSpPr>
@@ -3151,7 +3123,7 @@
           <p:nvPr/>
         </p:nvPicPr>
         <p:blipFill>
-          <a:blip r:embed="rId2"/>
+          <a:blip r:embed="rId1"/>
           <a:stretch>
             <a:fillRect/>
           </a:stretch>
@@ -3193,10 +3165,16 @@
                 <a:solidFill>
                   <a:srgbClr val="003D7C"/>
                 </a:solidFill>
-                <a:latin typeface="Arial"/>
+                <a:latin typeface="Arial" panose="020B0604020202020204"/>
               </a:rPr>
               <a:t>Stabilizing Ruthenium through Ru–O–Mn Interfacial Coupling for Acidic Oxygen Evolution</a:t>
             </a:r>
+            <a:endParaRPr sz="3000" b="1">
+              <a:solidFill>
+                <a:srgbClr val="003D7C"/>
+              </a:solidFill>
+              <a:latin typeface="Arial" panose="020B0604020202020204"/>
+            </a:endParaRPr>
           </a:p>
           <a:p>
             <a:pPr>
@@ -3209,10 +3187,16 @@
                 <a:solidFill>
                   <a:srgbClr val="5B6572"/>
                 </a:solidFill>
-                <a:latin typeface="Arial"/>
+                <a:latin typeface="Arial" panose="020B0604020202020204"/>
               </a:rPr>
               <a:t>Final-year project · Progress review (first presentation)</a:t>
             </a:r>
+            <a:endParaRPr sz="1800">
+              <a:solidFill>
+                <a:srgbClr val="5B6572"/>
+              </a:solidFill>
+              <a:latin typeface="Arial" panose="020B0604020202020204"/>
+            </a:endParaRPr>
           </a:p>
         </p:txBody>
       </p:sp>
@@ -3287,10 +3271,16 @@
                 <a:solidFill>
                   <a:srgbClr val="5B6572"/>
                 </a:solidFill>
-                <a:latin typeface="Arial"/>
+                <a:latin typeface="Arial" panose="020B0604020202020204"/>
               </a:rPr>
               <a:t>Candidate</a:t>
             </a:r>
+            <a:endParaRPr sz="1600" b="1">
+              <a:solidFill>
+                <a:srgbClr val="5B6572"/>
+              </a:solidFill>
+              <a:latin typeface="Arial" panose="020B0604020202020204"/>
+            </a:endParaRPr>
           </a:p>
         </p:txBody>
       </p:sp>
@@ -3321,10 +3311,16 @@
                 <a:solidFill>
                   <a:srgbClr val="1F2937"/>
                 </a:solidFill>
-                <a:latin typeface="Arial"/>
+                <a:latin typeface="Arial" panose="020B0604020202020204"/>
               </a:rPr>
               <a:t>Zhao Shen</a:t>
             </a:r>
+            <a:endParaRPr sz="1800">
+              <a:solidFill>
+                <a:srgbClr val="1F2937"/>
+              </a:solidFill>
+              <a:latin typeface="Arial" panose="020B0604020202020204"/>
+            </a:endParaRPr>
           </a:p>
         </p:txBody>
       </p:sp>
@@ -3355,10 +3351,16 @@
                 <a:solidFill>
                   <a:srgbClr val="5B6572"/>
                 </a:solidFill>
-                <a:latin typeface="Arial"/>
+                <a:latin typeface="Arial" panose="020B0604020202020204"/>
               </a:rPr>
               <a:t>Programme</a:t>
             </a:r>
+            <a:endParaRPr sz="1600" b="1">
+              <a:solidFill>
+                <a:srgbClr val="5B6572"/>
+              </a:solidFill>
+              <a:latin typeface="Arial" panose="020B0604020202020204"/>
+            </a:endParaRPr>
           </a:p>
         </p:txBody>
       </p:sp>
@@ -3389,10 +3391,16 @@
                 <a:solidFill>
                   <a:srgbClr val="1F2937"/>
                 </a:solidFill>
-                <a:latin typeface="Arial"/>
+                <a:latin typeface="Arial" panose="020B0604020202020204"/>
               </a:rPr>
               <a:t>NUS–ECUST Joint Programme (MSE 311)</a:t>
             </a:r>
+            <a:endParaRPr sz="1800">
+              <a:solidFill>
+                <a:srgbClr val="1F2937"/>
+              </a:solidFill>
+              <a:latin typeface="Arial" panose="020B0604020202020204"/>
+            </a:endParaRPr>
           </a:p>
         </p:txBody>
       </p:sp>
@@ -3423,10 +3431,16 @@
                 <a:solidFill>
                   <a:srgbClr val="5B6572"/>
                 </a:solidFill>
-                <a:latin typeface="Arial"/>
+                <a:latin typeface="Arial" panose="020B0604020202020204"/>
               </a:rPr>
               <a:t>Supervisor</a:t>
             </a:r>
+            <a:endParaRPr sz="1600" b="1">
+              <a:solidFill>
+                <a:srgbClr val="5B6572"/>
+              </a:solidFill>
+              <a:latin typeface="Arial" panose="020B0604020202020204"/>
+            </a:endParaRPr>
           </a:p>
         </p:txBody>
       </p:sp>
@@ -3457,10 +3471,16 @@
                 <a:solidFill>
                   <a:srgbClr val="1F2937"/>
                 </a:solidFill>
-                <a:latin typeface="Arial"/>
+                <a:latin typeface="Arial" panose="020B0604020202020204"/>
               </a:rPr>
               <a:t>Prof. Xue Junmin, Materials Science and Engineering</a:t>
             </a:r>
+            <a:endParaRPr sz="1800">
+              <a:solidFill>
+                <a:srgbClr val="1F2937"/>
+              </a:solidFill>
+              <a:latin typeface="Arial" panose="020B0604020202020204"/>
+            </a:endParaRPr>
           </a:p>
         </p:txBody>
       </p:sp>
@@ -3491,10 +3511,16 @@
                 <a:solidFill>
                   <a:srgbClr val="5B6572"/>
                 </a:solidFill>
-                <a:latin typeface="Arial"/>
+                <a:latin typeface="Arial" panose="020B0604020202020204"/>
               </a:rPr>
               <a:t>Mentor</a:t>
             </a:r>
+            <a:endParaRPr sz="1600" b="1">
+              <a:solidFill>
+                <a:srgbClr val="5B6572"/>
+              </a:solidFill>
+              <a:latin typeface="Arial" panose="020B0604020202020204"/>
+            </a:endParaRPr>
           </a:p>
         </p:txBody>
       </p:sp>
@@ -3525,10 +3551,16 @@
                 <a:solidFill>
                   <a:srgbClr val="1F2937"/>
                 </a:solidFill>
-                <a:latin typeface="Arial"/>
+                <a:latin typeface="Arial" panose="020B0604020202020204"/>
               </a:rPr>
               <a:t>Yu Junchen, NUSRI-CQ</a:t>
             </a:r>
+            <a:endParaRPr sz="1800">
+              <a:solidFill>
+                <a:srgbClr val="1F2937"/>
+              </a:solidFill>
+              <a:latin typeface="Arial" panose="020B0604020202020204"/>
+            </a:endParaRPr>
           </a:p>
         </p:txBody>
       </p:sp>
@@ -3559,10 +3591,16 @@
                 <a:solidFill>
                   <a:srgbClr val="5B6572"/>
                 </a:solidFill>
-                <a:latin typeface="Arial"/>
+                <a:latin typeface="Arial" panose="020B0604020202020204"/>
               </a:rPr>
               <a:t>Date</a:t>
             </a:r>
+            <a:endParaRPr sz="1600" b="1">
+              <a:solidFill>
+                <a:srgbClr val="5B6572"/>
+              </a:solidFill>
+              <a:latin typeface="Arial" panose="020B0604020202020204"/>
+            </a:endParaRPr>
           </a:p>
         </p:txBody>
       </p:sp>
@@ -3593,10 +3631,16 @@
                 <a:solidFill>
                   <a:srgbClr val="1F2937"/>
                 </a:solidFill>
-                <a:latin typeface="Arial"/>
+                <a:latin typeface="Arial" panose="020B0604020202020204"/>
               </a:rPr>
               <a:t>24 September 2026</a:t>
             </a:r>
+            <a:endParaRPr sz="1800">
+              <a:solidFill>
+                <a:srgbClr val="1F2937"/>
+              </a:solidFill>
+              <a:latin typeface="Arial" panose="020B0604020202020204"/>
+            </a:endParaRPr>
           </a:p>
         </p:txBody>
       </p:sp>
@@ -3609,7 +3653,7 @@
 </file>
 
 <file path=ppt/slides/slide10.xml><?xml version="1.0" encoding="utf-8"?>
-<p:sld xmlns:a="http://schemas.openxmlformats.org/drawingml/2006/main" xmlns:p="http://schemas.openxmlformats.org/presentationml/2006/main" xmlns:r="http://schemas.openxmlformats.org/officeDocument/2006/relationships">
+<p:sld xmlns:a="http://schemas.openxmlformats.org/drawingml/2006/main" xmlns:r="http://schemas.openxmlformats.org/officeDocument/2006/relationships" xmlns:p="http://schemas.openxmlformats.org/presentationml/2006/main">
   <p:cSld>
     <p:spTree>
       <p:nvGrpSpPr>
@@ -3685,20 +3729,50 @@
           <a:lstStyle/>
           <a:p>
             <a:r>
-              <a:rPr sz="2700" b="1">
+              <a:rPr sz="2600" b="1">
                 <a:solidFill>
                   <a:srgbClr val="1F2937"/>
                 </a:solidFill>
-                <a:latin typeface="Arial"/>
-              </a:rPr>
-              <a:t>Solution: put Ru into a MnO₂ framework by electrodeposition</a:t>
-            </a:r>
+                <a:latin typeface="Arial" panose="020B0604020202020204"/>
+              </a:rPr>
+              <a:t>Experiment plan: deposit, window, exchange, prove, test</a:t>
+            </a:r>
+            <a:endParaRPr sz="2600" b="1">
+              <a:solidFill>
+                <a:srgbClr val="1F2937"/>
+              </a:solidFill>
+              <a:latin typeface="Arial" panose="020B0604020202020204"/>
+            </a:endParaRPr>
           </a:p>
         </p:txBody>
       </p:sp>
       <p:pic>
         <p:nvPicPr>
           <p:cNvPr id="4" name="Picture 3" descr="logo_nus_black.png"/>
+          <p:cNvPicPr>
+            <a:picLocks noChangeAspect="1"/>
+          </p:cNvPicPr>
+          <p:nvPr/>
+        </p:nvPicPr>
+        <p:blipFill>
+          <a:blip r:embed="rId1"/>
+          <a:stretch>
+            <a:fillRect/>
+          </a:stretch>
+        </p:blipFill>
+        <p:spPr>
+          <a:xfrm>
+            <a:off x="11018520" y="237744"/>
+            <a:ext cx="822960" cy="545812"/>
+          </a:xfrm>
+          <a:prstGeom prst="rect">
+            <a:avLst/>
+          </a:prstGeom>
+        </p:spPr>
+      </p:pic>
+      <p:pic>
+        <p:nvPicPr>
+          <p:cNvPr id="5" name="Picture 4" descr="fig_plan.png"/>
           <p:cNvPicPr>
             <a:picLocks noChangeAspect="1"/>
           </p:cNvPicPr>
@@ -3712,59 +3786,177 @@
         </p:blipFill>
         <p:spPr>
           <a:xfrm>
-            <a:off x="11018520" y="237744"/>
-            <a:ext cx="822960" cy="545812"/>
+            <a:off x="217805" y="859790"/>
+            <a:ext cx="11718290" cy="4396740"/>
           </a:xfrm>
           <a:prstGeom prst="rect">
             <a:avLst/>
           </a:prstGeom>
         </p:spPr>
       </p:pic>
-      <p:pic>
-        <p:nvPicPr>
-          <p:cNvPr id="5" name="Picture 4" descr="use_nc_fig2_full.png"/>
-          <p:cNvPicPr>
-            <a:picLocks noChangeAspect="1"/>
-          </p:cNvPicPr>
-          <p:nvPr/>
-        </p:nvPicPr>
-        <p:blipFill>
-          <a:blip r:embed="rId3"/>
-          <a:stretch>
-            <a:fillRect/>
-          </a:stretch>
-        </p:blipFill>
-        <p:spPr>
-          <a:xfrm>
-            <a:off x="689373" y="1133856"/>
-            <a:ext cx="4427692" cy="3529583"/>
-          </a:xfrm>
-          <a:prstGeom prst="rect">
-            <a:avLst/>
-          </a:prstGeom>
-        </p:spPr>
-      </p:pic>
-      <p:sp>
-        <p:nvSpPr>
-          <p:cNvPr id="6" name="Rounded Rectangle 5"/>
+      <p:sp>
+        <p:nvSpPr>
+          <p:cNvPr id="6" name="TextBox 5"/>
+          <p:cNvSpPr txBox="1"/>
+          <p:nvPr/>
+        </p:nvSpPr>
+        <p:spPr>
+          <a:xfrm>
+            <a:off x="640080" y="5349240"/>
+            <a:ext cx="10908792" cy="326898"/>
+          </a:xfrm>
+          <a:prstGeom prst="rect">
+            <a:avLst/>
+          </a:prstGeom>
+          <a:noFill/>
+        </p:spPr>
+        <p:txBody>
+          <a:bodyPr wrap="square">
+            <a:spAutoFit/>
+          </a:bodyPr>
+          <a:lstStyle/>
+          <a:p>
+            <a:pPr algn="l">
+              <a:spcAft>
+                <a:spcPts val="400"/>
+              </a:spcAft>
+            </a:pPr>
+            <a:r>
+              <a:rPr sz="1700" b="1">
+                <a:solidFill>
+                  <a:srgbClr val="C0392B"/>
+                </a:solidFill>
+                <a:latin typeface="Arial" panose="020B0604020202020204"/>
+              </a:rPr>
+              <a:t>First priority: step 2 — find the MnO₂ host window (Mn²⁺ below, MnO₄⁻ above) before loading Ru.</a:t>
+            </a:r>
+            <a:endParaRPr sz="1700" b="1">
+              <a:solidFill>
+                <a:srgbClr val="C0392B"/>
+              </a:solidFill>
+              <a:latin typeface="Arial" panose="020B0604020202020204"/>
+            </a:endParaRPr>
+          </a:p>
+        </p:txBody>
+      </p:sp>
+      <p:sp>
+        <p:nvSpPr>
+          <p:cNvPr id="7" name="TextBox 6"/>
+          <p:cNvSpPr txBox="1"/>
+          <p:nvPr/>
+        </p:nvSpPr>
+        <p:spPr>
+          <a:xfrm>
+            <a:off x="640080" y="6419088"/>
+            <a:ext cx="10241280" cy="274320"/>
+          </a:xfrm>
+          <a:prstGeom prst="rect">
+            <a:avLst/>
+          </a:prstGeom>
+          <a:noFill/>
+        </p:spPr>
+        <p:txBody>
+          <a:bodyPr wrap="none">
+            <a:spAutoFit/>
+          </a:bodyPr>
+          <a:lstStyle/>
+          <a:p>
+            <a:r>
+              <a:rPr sz="1000" i="1">
+                <a:solidFill>
+                  <a:srgbClr val="5B6572"/>
+                </a:solidFill>
+                <a:latin typeface="Arial" panose="020B0604020202020204"/>
+              </a:rPr>
+              <a:t>Schematic drawn for this project: parameters per the group protocol; characterisation and testing practice follow Adv. Energy Mater. 2023 §5.</a:t>
+            </a:r>
+            <a:endParaRPr sz="1000" i="1">
+              <a:solidFill>
+                <a:srgbClr val="5B6572"/>
+              </a:solidFill>
+              <a:latin typeface="Arial" panose="020B0604020202020204"/>
+            </a:endParaRPr>
+          </a:p>
+        </p:txBody>
+      </p:sp>
+      <p:sp>
+        <p:nvSpPr>
+          <p:cNvPr id="8" name="TextBox 7"/>
+          <p:cNvSpPr txBox="1"/>
+          <p:nvPr/>
+        </p:nvSpPr>
+        <p:spPr>
+          <a:xfrm>
+            <a:off x="11639677" y="6400800"/>
+            <a:ext cx="274955" cy="291465"/>
+          </a:xfrm>
+          <a:prstGeom prst="rect">
+            <a:avLst/>
+          </a:prstGeom>
+          <a:noFill/>
+        </p:spPr>
+        <p:txBody>
+          <a:bodyPr wrap="none">
+            <a:spAutoFit/>
+          </a:bodyPr>
+          <a:lstStyle/>
+          <a:p>
+            <a:pPr algn="r"/>
+            <a:r>
+              <a:rPr lang="en-US" sz="1300">
+                <a:solidFill>
+                  <a:srgbClr val="1F2937"/>
+                </a:solidFill>
+                <a:latin typeface="Arial" panose="020B0604020202020204"/>
+              </a:rPr>
+              <a:t>9</a:t>
+            </a:r>
+            <a:endParaRPr lang="en-US" sz="1300">
+              <a:solidFill>
+                <a:srgbClr val="1F2937"/>
+              </a:solidFill>
+              <a:latin typeface="Arial" panose="020B0604020202020204"/>
+            </a:endParaRPr>
+          </a:p>
+        </p:txBody>
+      </p:sp>
+    </p:spTree>
+  </p:cSld>
+  <p:clrMapOvr>
+    <a:masterClrMapping/>
+  </p:clrMapOvr>
+</p:sld>
+</file>
+
+<file path=ppt/slides/slide2.xml><?xml version="1.0" encoding="utf-8"?>
+<p:sld xmlns:a="http://schemas.openxmlformats.org/drawingml/2006/main" xmlns:r="http://schemas.openxmlformats.org/officeDocument/2006/relationships" xmlns:p="http://schemas.openxmlformats.org/presentationml/2006/main">
+  <p:cSld>
+    <p:spTree>
+      <p:nvGrpSpPr>
+        <p:cNvPr id="1" name=""/>
+        <p:cNvGrpSpPr/>
+        <p:nvPr/>
+      </p:nvGrpSpPr>
+      <p:grpSpPr/>
+      <p:sp>
+        <p:nvSpPr>
+          <p:cNvPr id="2" name="Rectangle 1"/>
           <p:cNvSpPr/>
           <p:nvPr/>
         </p:nvSpPr>
         <p:spPr>
           <a:xfrm>
-            <a:off x="5394960" y="1133856"/>
-            <a:ext cx="6153912" cy="1005840"/>
-          </a:xfrm>
-          <a:prstGeom prst="roundRect">
+            <a:off x="384048" y="274320"/>
+            <a:ext cx="68580" cy="512064"/>
+          </a:xfrm>
+          <a:prstGeom prst="rect">
             <a:avLst/>
           </a:prstGeom>
           <a:solidFill>
-            <a:srgbClr val="EFF5FB"/>
+            <a:srgbClr val="003D7C"/>
           </a:solidFill>
-          <a:ln w="12700">
-            <a:solidFill>
-              <a:srgbClr val="CFE0F2"/>
-            </a:solidFill>
+          <a:ln>
+            <a:noFill/>
           </a:ln>
           <a:effectLst/>
         </p:spPr>
@@ -3783,59 +3975,286 @@
           </a:fontRef>
         </p:style>
         <p:txBody>
-          <a:bodyPr rtlCol="0" anchor="t" wrap="square" lIns="146304" rIns="146304" tIns="82296" bIns="82296"/>
+          <a:bodyPr rtlCol="0" anchor="ctr"/>
           <a:lstStyle/>
           <a:p>
             <a:pPr algn="ctr"/>
+          </a:p>
+        </p:txBody>
+      </p:sp>
+      <p:sp>
+        <p:nvSpPr>
+          <p:cNvPr id="3" name="TextBox 2"/>
+          <p:cNvSpPr txBox="1"/>
+          <p:nvPr/>
+        </p:nvSpPr>
+        <p:spPr>
+          <a:xfrm>
+            <a:off x="548640" y="201168"/>
+            <a:ext cx="10332720" cy="658368"/>
+          </a:xfrm>
+          <a:prstGeom prst="rect">
+            <a:avLst/>
+          </a:prstGeom>
+          <a:noFill/>
+        </p:spPr>
+        <p:txBody>
+          <a:bodyPr wrap="square">
+            <a:spAutoFit/>
+          </a:bodyPr>
+          <a:lstStyle/>
+          <a:p>
+            <a:r>
+              <a:rPr sz="2700" b="1">
+                <a:solidFill>
+                  <a:srgbClr val="1F2937"/>
+                </a:solidFill>
+                <a:latin typeface="Arial" panose="020B0604020202020204"/>
+              </a:rPr>
+              <a:t>Hydrogen: why the world is moving to it</a:t>
+            </a:r>
+            <a:endParaRPr sz="2700" b="1">
+              <a:solidFill>
+                <a:srgbClr val="1F2937"/>
+              </a:solidFill>
+              <a:latin typeface="Arial" panose="020B0604020202020204"/>
+            </a:endParaRPr>
+          </a:p>
+        </p:txBody>
+      </p:sp>
+      <p:pic>
+        <p:nvPicPr>
+          <p:cNvPr id="4" name="Picture 3" descr="logo_nus_black.png"/>
+          <p:cNvPicPr>
+            <a:picLocks noChangeAspect="1"/>
+          </p:cNvPicPr>
+          <p:nvPr/>
+        </p:nvPicPr>
+        <p:blipFill>
+          <a:blip r:embed="rId1"/>
+          <a:stretch>
+            <a:fillRect/>
+          </a:stretch>
+        </p:blipFill>
+        <p:spPr>
+          <a:xfrm>
+            <a:off x="11018520" y="237744"/>
+            <a:ext cx="822960" cy="545812"/>
+          </a:xfrm>
+          <a:prstGeom prst="rect">
+            <a:avLst/>
+          </a:prstGeom>
+        </p:spPr>
+      </p:pic>
+      <p:pic>
+        <p:nvPicPr>
+          <p:cNvPr id="5" name="Picture 4" descr="fig_h2.png"/>
+          <p:cNvPicPr>
+            <a:picLocks noChangeAspect="1"/>
+          </p:cNvPicPr>
+          <p:nvPr/>
+        </p:nvPicPr>
+        <p:blipFill>
+          <a:blip r:embed="rId2"/>
+          <a:stretch>
+            <a:fillRect/>
+          </a:stretch>
+        </p:blipFill>
+        <p:spPr>
+          <a:xfrm>
+            <a:off x="755390" y="1051560"/>
+            <a:ext cx="10678171" cy="3931920"/>
+          </a:xfrm>
+          <a:prstGeom prst="rect">
+            <a:avLst/>
+          </a:prstGeom>
+        </p:spPr>
+      </p:pic>
+      <p:sp>
+        <p:nvSpPr>
+          <p:cNvPr id="6" name="TextBox 5"/>
+          <p:cNvSpPr txBox="1"/>
+          <p:nvPr/>
+        </p:nvSpPr>
+        <p:spPr>
+          <a:xfrm>
+            <a:off x="640080" y="5120640"/>
+            <a:ext cx="10908792" cy="854964"/>
+          </a:xfrm>
+          <a:prstGeom prst="rect">
+            <a:avLst/>
+          </a:prstGeom>
+          <a:noFill/>
+        </p:spPr>
+        <p:txBody>
+          <a:bodyPr wrap="square">
+            <a:spAutoFit/>
+          </a:bodyPr>
+          <a:lstStyle/>
+          <a:p>
+            <a:pPr algn="l">
+              <a:spcAft>
+                <a:spcPts val="400"/>
+              </a:spcAft>
+            </a:pPr>
+            <a:r>
+              <a:rPr sz="1600" b="0">
+                <a:solidFill>
+                  <a:srgbClr val="1F2937"/>
+                </a:solidFill>
+                <a:latin typeface="Arial" panose="020B0604020202020204"/>
+              </a:rPr>
+              <a:t>Hydrogen production is about 100 Mt per year and is still dominated by unabated fossil fuels. Low-emission hydrogen from electrolysis is about 1 Mt, i.e. below 1%.</a:t>
+            </a:r>
+            <a:endParaRPr sz="1600" b="0">
+              <a:solidFill>
+                <a:srgbClr val="1F2937"/>
+              </a:solidFill>
+              <a:latin typeface="Arial" panose="020B0604020202020204"/>
+            </a:endParaRPr>
+          </a:p>
+          <a:p>
+            <a:pPr algn="l">
+              <a:spcAft>
+                <a:spcPts val="400"/>
+              </a:spcAft>
+            </a:pPr>
             <a:r>
               <a:rPr sz="1700" b="1">
                 <a:solidFill>
-                  <a:srgbClr val="003D7C"/>
-                </a:solidFill>
-                <a:latin typeface="Arial"/>
-              </a:rPr>
-              <a:t>Mn³⁺/Mn⁴⁺ buffers the charge</a:t>
-            </a:r>
-          </a:p>
-          <a:p>
-            <a:pPr>
-              <a:spcBef>
-                <a:spcPts val="400"/>
-              </a:spcBef>
-            </a:pPr>
-            <a:r>
-              <a:rPr sz="1400">
+                  <a:srgbClr val="C0392B"/>
+                </a:solidFill>
+                <a:latin typeface="Arial" panose="020B0604020202020204"/>
+              </a:rPr>
+              <a:t>Demand is expected to grow under announced pledges, so the production route — not the molecule — is the bottleneck. Water electrolysis is the route that can be decarbonised, and its cost is set by the anode.</a:t>
+            </a:r>
+            <a:endParaRPr sz="1700" b="1">
+              <a:solidFill>
+                <a:srgbClr val="C0392B"/>
+              </a:solidFill>
+              <a:latin typeface="Arial" panose="020B0604020202020204"/>
+            </a:endParaRPr>
+          </a:p>
+        </p:txBody>
+      </p:sp>
+      <p:sp>
+        <p:nvSpPr>
+          <p:cNvPr id="7" name="TextBox 6"/>
+          <p:cNvSpPr txBox="1"/>
+          <p:nvPr/>
+        </p:nvSpPr>
+        <p:spPr>
+          <a:xfrm>
+            <a:off x="640080" y="6419088"/>
+            <a:ext cx="10241280" cy="274320"/>
+          </a:xfrm>
+          <a:prstGeom prst="rect">
+            <a:avLst/>
+          </a:prstGeom>
+          <a:noFill/>
+        </p:spPr>
+        <p:txBody>
+          <a:bodyPr wrap="none">
+            <a:spAutoFit/>
+          </a:bodyPr>
+          <a:lstStyle/>
+          <a:p>
+            <a:r>
+              <a:rPr sz="1000" i="1">
+                <a:solidFill>
+                  <a:srgbClr val="5B6572"/>
+                </a:solidFill>
+                <a:latin typeface="Arial" panose="020B0604020202020204"/>
+              </a:rPr>
+              <a:t>Data: IEA Global Hydrogen Review 2025 and 2026.</a:t>
+            </a:r>
+            <a:endParaRPr sz="1000" i="1">
+              <a:solidFill>
+                <a:srgbClr val="5B6572"/>
+              </a:solidFill>
+              <a:latin typeface="Arial" panose="020B0604020202020204"/>
+            </a:endParaRPr>
+          </a:p>
+        </p:txBody>
+      </p:sp>
+      <p:sp>
+        <p:nvSpPr>
+          <p:cNvPr id="8" name="TextBox 7"/>
+          <p:cNvSpPr txBox="1"/>
+          <p:nvPr/>
+        </p:nvSpPr>
+        <p:spPr>
+          <a:xfrm>
+            <a:off x="11292840" y="6400800"/>
+            <a:ext cx="621792" cy="274320"/>
+          </a:xfrm>
+          <a:prstGeom prst="rect">
+            <a:avLst/>
+          </a:prstGeom>
+          <a:noFill/>
+        </p:spPr>
+        <p:txBody>
+          <a:bodyPr wrap="none">
+            <a:spAutoFit/>
+          </a:bodyPr>
+          <a:lstStyle/>
+          <a:p>
+            <a:pPr algn="r"/>
+            <a:r>
+              <a:rPr sz="1300">
                 <a:solidFill>
                   <a:srgbClr val="1F2937"/>
                 </a:solidFill>
-                <a:latin typeface="Arial"/>
-              </a:rPr>
-              <a:t>The MnO₂ framework holds Ru near +4, outside the RuO₄ window.</a:t>
-            </a:r>
-          </a:p>
-        </p:txBody>
-      </p:sp>
-      <p:sp>
-        <p:nvSpPr>
-          <p:cNvPr id="7" name="Rounded Rectangle 6"/>
+                <a:latin typeface="Arial" panose="020B0604020202020204"/>
+              </a:rPr>
+              <a:t>1</a:t>
+            </a:r>
+            <a:endParaRPr sz="1300">
+              <a:solidFill>
+                <a:srgbClr val="1F2937"/>
+              </a:solidFill>
+              <a:latin typeface="Arial" panose="020B0604020202020204"/>
+            </a:endParaRPr>
+          </a:p>
+        </p:txBody>
+      </p:sp>
+    </p:spTree>
+  </p:cSld>
+  <p:clrMapOvr>
+    <a:masterClrMapping/>
+  </p:clrMapOvr>
+</p:sld>
+</file>
+
+<file path=ppt/slides/slide3.xml><?xml version="1.0" encoding="utf-8"?>
+<p:sld xmlns:a="http://schemas.openxmlformats.org/drawingml/2006/main" xmlns:r="http://schemas.openxmlformats.org/officeDocument/2006/relationships" xmlns:p="http://schemas.openxmlformats.org/presentationml/2006/main">
+  <p:cSld>
+    <p:spTree>
+      <p:nvGrpSpPr>
+        <p:cNvPr id="1" name=""/>
+        <p:cNvGrpSpPr/>
+        <p:nvPr/>
+      </p:nvGrpSpPr>
+      <p:grpSpPr/>
+      <p:sp>
+        <p:nvSpPr>
+          <p:cNvPr id="2" name="Rectangle 1"/>
           <p:cNvSpPr/>
           <p:nvPr/>
         </p:nvSpPr>
         <p:spPr>
           <a:xfrm>
-            <a:off x="5394960" y="2231136"/>
-            <a:ext cx="6153912" cy="1325880"/>
-          </a:xfrm>
-          <a:prstGeom prst="roundRect">
+            <a:off x="384048" y="274320"/>
+            <a:ext cx="68580" cy="512064"/>
+          </a:xfrm>
+          <a:prstGeom prst="rect">
             <a:avLst/>
           </a:prstGeom>
           <a:solidFill>
-            <a:srgbClr val="E8F5EE"/>
+            <a:srgbClr val="003D7C"/>
           </a:solidFill>
-          <a:ln w="12700">
-            <a:solidFill>
-              <a:srgbClr val="9AD3B8"/>
-            </a:solidFill>
+          <a:ln>
+            <a:noFill/>
           </a:ln>
           <a:effectLst/>
         </p:spPr>
@@ -3854,35 +4273,180 @@
           </a:fontRef>
         </p:style>
         <p:txBody>
-          <a:bodyPr rtlCol="0" anchor="t" wrap="square" lIns="146304" rIns="146304" tIns="82296" bIns="82296"/>
+          <a:bodyPr rtlCol="0" anchor="ctr"/>
           <a:lstStyle/>
           <a:p>
             <a:pPr algn="ctr"/>
-            <a:r>
-              <a:rPr sz="1700" b="1">
+          </a:p>
+        </p:txBody>
+      </p:sp>
+      <p:sp>
+        <p:nvSpPr>
+          <p:cNvPr id="3" name="TextBox 2"/>
+          <p:cNvSpPr txBox="1"/>
+          <p:nvPr/>
+        </p:nvSpPr>
+        <p:spPr>
+          <a:xfrm>
+            <a:off x="548640" y="201168"/>
+            <a:ext cx="10332720" cy="658368"/>
+          </a:xfrm>
+          <a:prstGeom prst="rect">
+            <a:avLst/>
+          </a:prstGeom>
+          <a:noFill/>
+        </p:spPr>
+        <p:txBody>
+          <a:bodyPr wrap="square">
+            <a:spAutoFit/>
+          </a:bodyPr>
+          <a:lstStyle/>
+          <a:p>
+            <a:r>
+              <a:rPr sz="2700" b="1">
+                <a:solidFill>
+                  <a:srgbClr val="1F2937"/>
+                </a:solidFill>
+                <a:latin typeface="Arial" panose="020B0604020202020204"/>
+              </a:rPr>
+              <a:t>Making hydrogen: water electrolysis and its two half-reactions</a:t>
+            </a:r>
+            <a:endParaRPr sz="2700" b="1">
+              <a:solidFill>
+                <a:srgbClr val="1F2937"/>
+              </a:solidFill>
+              <a:latin typeface="Arial" panose="020B0604020202020204"/>
+            </a:endParaRPr>
+          </a:p>
+        </p:txBody>
+      </p:sp>
+      <p:pic>
+        <p:nvPicPr>
+          <p:cNvPr id="4" name="Picture 3" descr="logo_nus_black.png"/>
+          <p:cNvPicPr>
+            <a:picLocks noChangeAspect="1"/>
+          </p:cNvPicPr>
+          <p:nvPr/>
+        </p:nvPicPr>
+        <p:blipFill>
+          <a:blip r:embed="rId1"/>
+          <a:stretch>
+            <a:fillRect/>
+          </a:stretch>
+        </p:blipFill>
+        <p:spPr>
+          <a:xfrm>
+            <a:off x="11018520" y="237744"/>
+            <a:ext cx="822960" cy="545812"/>
+          </a:xfrm>
+          <a:prstGeom prst="rect">
+            <a:avLst/>
+          </a:prstGeom>
+        </p:spPr>
+      </p:pic>
+      <p:pic>
+        <p:nvPicPr>
+          <p:cNvPr id="5" name="Picture 4" descr="fig_cell_clean.png"/>
+          <p:cNvPicPr>
+            <a:picLocks noChangeAspect="1"/>
+          </p:cNvPicPr>
+          <p:nvPr/>
+        </p:nvPicPr>
+        <p:blipFill>
+          <a:blip r:embed="rId2"/>
+          <a:stretch>
+            <a:fillRect/>
+          </a:stretch>
+        </p:blipFill>
+        <p:spPr>
+          <a:xfrm>
+            <a:off x="640080" y="1325880"/>
+            <a:ext cx="4937759" cy="3412446"/>
+          </a:xfrm>
+          <a:prstGeom prst="rect">
+            <a:avLst/>
+          </a:prstGeom>
+        </p:spPr>
+      </p:pic>
+      <p:sp>
+        <p:nvSpPr>
+          <p:cNvPr id="6" name="TextBox 5"/>
+          <p:cNvSpPr txBox="1"/>
+          <p:nvPr/>
+        </p:nvSpPr>
+        <p:spPr>
+          <a:xfrm>
+            <a:off x="5897880" y="1417320"/>
+            <a:ext cx="5623560" cy="420624"/>
+          </a:xfrm>
+          <a:prstGeom prst="rect">
+            <a:avLst/>
+          </a:prstGeom>
+          <a:noFill/>
+        </p:spPr>
+        <p:txBody>
+          <a:bodyPr wrap="none">
+            <a:spAutoFit/>
+          </a:bodyPr>
+          <a:lstStyle/>
+          <a:p>
+            <a:pPr algn="l"/>
+            <a:r>
+              <a:rPr sz="1800" b="1">
                 <a:solidFill>
                   <a:srgbClr val="003D7C"/>
                 </a:solidFill>
-                <a:latin typeface="Arial"/>
-              </a:rPr>
-              <a:t>The metal goes inside the lattice</a:t>
-            </a:r>
-          </a:p>
-          <a:p>
-            <a:pPr>
-              <a:spcBef>
-                <a:spcPts val="400"/>
-              </a:spcBef>
-            </a:pPr>
-            <a:r>
-              <a:rPr sz="1400">
-                <a:solidFill>
-                  <a:srgbClr val="1F2937"/>
-                </a:solidFill>
-                <a:latin typeface="Arial"/>
-              </a:rPr>
-              <a:t>Electrodeposited MnO₂ oxidises the metal and drives it in, forming M–O–Mn bridges; EXAFS shows the Ru–O–Mn shell.</a:t>
-            </a:r>
+                <a:latin typeface="Arial" panose="020B0604020202020204"/>
+              </a:rPr>
+              <a:t>Cathode (HER):  2 H₂O + 2 e⁻ → H₂ + 2 OH⁻</a:t>
+            </a:r>
+            <a:endParaRPr sz="1800" b="1">
+              <a:solidFill>
+                <a:srgbClr val="003D7C"/>
+              </a:solidFill>
+              <a:latin typeface="Arial" panose="020B0604020202020204"/>
+            </a:endParaRPr>
+          </a:p>
+        </p:txBody>
+      </p:sp>
+      <p:sp>
+        <p:nvSpPr>
+          <p:cNvPr id="7" name="TextBox 6"/>
+          <p:cNvSpPr txBox="1"/>
+          <p:nvPr/>
+        </p:nvSpPr>
+        <p:spPr>
+          <a:xfrm>
+            <a:off x="5897880" y="1965960"/>
+            <a:ext cx="5623560" cy="420624"/>
+          </a:xfrm>
+          <a:prstGeom prst="rect">
+            <a:avLst/>
+          </a:prstGeom>
+          <a:noFill/>
+        </p:spPr>
+        <p:txBody>
+          <a:bodyPr wrap="none">
+            <a:spAutoFit/>
+          </a:bodyPr>
+          <a:lstStyle/>
+          <a:p>
+            <a:pPr algn="l"/>
+            <a:r>
+              <a:rPr sz="1800" b="1">
+                <a:solidFill>
+                  <a:srgbClr val="003D7C"/>
+                </a:solidFill>
+                <a:latin typeface="Arial" panose="020B0604020202020204"/>
+              </a:rPr>
+              <a:t>Anode (OER):    2 H₂O → O₂ + 4 H⁺ + 4 e⁻</a:t>
+            </a:r>
+            <a:endParaRPr sz="1800" b="1">
+              <a:solidFill>
+                <a:srgbClr val="003D7C"/>
+              </a:solidFill>
+              <a:latin typeface="Arial" panose="020B0604020202020204"/>
+            </a:endParaRPr>
           </a:p>
         </p:txBody>
       </p:sp>
@@ -3894,18 +4458,18 @@
         </p:nvSpPr>
         <p:spPr>
           <a:xfrm>
-            <a:off x="5394960" y="3648456"/>
-            <a:ext cx="6153912" cy="1005840"/>
+            <a:off x="5897880" y="2606040"/>
+            <a:ext cx="5623560" cy="1325880"/>
           </a:xfrm>
           <a:prstGeom prst="roundRect">
             <a:avLst/>
           </a:prstGeom>
           <a:solidFill>
-            <a:srgbClr val="FFF7EC"/>
+            <a:srgbClr val="EFF5FB"/>
           </a:solidFill>
           <a:ln w="12700">
             <a:solidFill>
-              <a:srgbClr val="EF7C00"/>
+              <a:srgbClr val="CFE0F2"/>
             </a:solidFill>
           </a:ln>
           <a:effectLst/>
@@ -3925,19 +4489,25 @@
           </a:fontRef>
         </p:style>
         <p:txBody>
-          <a:bodyPr rtlCol="0" anchor="t" wrap="square" lIns="146304" rIns="146304" tIns="82296" bIns="82296"/>
+          <a:bodyPr wrap="square" lIns="146304" tIns="82296" rIns="146304" bIns="82296" rtlCol="0" anchor="t"/>
           <a:lstStyle/>
           <a:p>
             <a:pPr algn="ctr"/>
             <a:r>
-              <a:rPr sz="1700" b="1">
+              <a:rPr sz="1800" b="1">
                 <a:solidFill>
                   <a:srgbClr val="003D7C"/>
                 </a:solidFill>
-                <a:latin typeface="Arial"/>
-              </a:rPr>
-              <a:t>Electrodeposition makes it tunable</a:t>
-            </a:r>
+                <a:latin typeface="Arial" panose="020B0604020202020204"/>
+              </a:rPr>
+              <a:t>OER is the bottleneck</a:t>
+            </a:r>
+            <a:endParaRPr sz="1800" b="1">
+              <a:solidFill>
+                <a:srgbClr val="003D7C"/>
+              </a:solidFill>
+              <a:latin typeface="Arial" panose="020B0604020202020204"/>
+            </a:endParaRPr>
           </a:p>
           <a:p>
             <a:pPr>
@@ -3946,194 +4516,44 @@
               </a:spcBef>
             </a:pPr>
             <a:r>
-              <a:rPr sz="1400">
+              <a:rPr sz="1500">
                 <a:solidFill>
                   <a:srgbClr val="1F2937"/>
                 </a:solidFill>
-                <a:latin typeface="Arial"/>
-              </a:rPr>
-              <a:t>Deposition charge, current and bath pH set the phase and edge-site density.</a:t>
-            </a:r>
-          </a:p>
-        </p:txBody>
-      </p:sp>
-      <p:sp>
-        <p:nvSpPr>
-          <p:cNvPr id="9" name="TextBox 8"/>
-          <p:cNvSpPr txBox="1"/>
-          <p:nvPr/>
-        </p:nvSpPr>
-        <p:spPr>
-          <a:xfrm>
-            <a:off x="640080" y="4846320"/>
-            <a:ext cx="10908792" cy="838962"/>
-          </a:xfrm>
-          <a:prstGeom prst="rect">
-            <a:avLst/>
-          </a:prstGeom>
-          <a:noFill/>
-        </p:spPr>
-        <p:txBody>
-          <a:bodyPr wrap="square">
-            <a:spAutoFit/>
-          </a:bodyPr>
-          <a:lstStyle/>
-          <a:p>
-            <a:pPr algn="l">
-              <a:spcAft>
-                <a:spcPts val="400"/>
-              </a:spcAft>
-            </a:pPr>
-            <a:r>
-              <a:rPr sz="1600" b="0">
-                <a:solidFill>
-                  <a:srgbClr val="1F2937"/>
-                </a:solidFill>
-                <a:latin typeface="Arial"/>
-              </a:rPr>
-              <a:t>Figure: (a) synthesis route; (b) XRD of the Ru₀.₀₃Mn₀.₉₇O₂ series; (c) atomic-resolution STEM;</a:t>
-            </a:r>
-          </a:p>
-          <a:p>
-            <a:pPr algn="l">
-              <a:spcAft>
-                <a:spcPts val="400"/>
-              </a:spcAft>
-            </a:pPr>
-            <a:r>
-              <a:rPr sz="1600" b="0">
-                <a:solidFill>
-                  <a:srgbClr val="1F2937"/>
-                </a:solidFill>
-                <a:latin typeface="Arial"/>
-              </a:rPr>
-              <a:t>(d) EDS mapping; (e) intensity profiles; (f) Ru K-edge FT-EXAFS; (g) XANES; (h) Mn 3s XPS.</a:t>
-            </a:r>
-          </a:p>
-          <a:p>
-            <a:pPr algn="l">
-              <a:spcAft>
-                <a:spcPts val="400"/>
-              </a:spcAft>
-            </a:pPr>
-            <a:r>
-              <a:rPr sz="1700" b="1">
-                <a:solidFill>
-                  <a:srgbClr val="C0392B"/>
-                </a:solidFill>
-                <a:latin typeface="Arial"/>
-              </a:rPr>
-              <a:t>Our contribution: build it by electrodeposition and prove Ru sits inside the lattice, not on the surface.</a:t>
-            </a:r>
-          </a:p>
-        </p:txBody>
-      </p:sp>
-      <p:sp>
-        <p:nvSpPr>
-          <p:cNvPr id="10" name="TextBox 9"/>
-          <p:cNvSpPr txBox="1"/>
-          <p:nvPr/>
-        </p:nvSpPr>
-        <p:spPr>
-          <a:xfrm>
-            <a:off x="640080" y="6419088"/>
-            <a:ext cx="10241280" cy="274320"/>
-          </a:xfrm>
-          <a:prstGeom prst="rect">
-            <a:avLst/>
-          </a:prstGeom>
-          <a:noFill/>
-        </p:spPr>
-        <p:txBody>
-          <a:bodyPr wrap="none">
-            <a:spAutoFit/>
-          </a:bodyPr>
-          <a:lstStyle/>
-          <a:p>
-            <a:r>
-              <a:rPr sz="1000" i="1">
-                <a:solidFill>
-                  <a:srgbClr val="5B6572"/>
-                </a:solidFill>
-                <a:latin typeface="Arial"/>
-              </a:rPr>
-              <a:t>Nat. Commun. 2026, 17, 7657, Fig. 2  ·  Science 2024, 384, 666, Fig. 1A (precedent with Ir).</a:t>
-            </a:r>
-          </a:p>
-        </p:txBody>
-      </p:sp>
-      <p:sp>
-        <p:nvSpPr>
-          <p:cNvPr id="11" name="TextBox 10"/>
-          <p:cNvSpPr txBox="1"/>
-          <p:nvPr/>
-        </p:nvSpPr>
-        <p:spPr>
-          <a:xfrm>
-            <a:off x="11292840" y="6400800"/>
-            <a:ext cx="621792" cy="274320"/>
-          </a:xfrm>
-          <a:prstGeom prst="rect">
-            <a:avLst/>
-          </a:prstGeom>
-          <a:noFill/>
-        </p:spPr>
-        <p:txBody>
-          <a:bodyPr wrap="none">
-            <a:spAutoFit/>
-          </a:bodyPr>
-          <a:lstStyle/>
-          <a:p>
-            <a:pPr algn="r"/>
-            <a:r>
-              <a:rPr sz="1300">
-                <a:solidFill>
-                  <a:srgbClr val="1F2937"/>
-                </a:solidFill>
-                <a:latin typeface="Arial"/>
-              </a:rPr>
-              <a:t>9</a:t>
-            </a:r>
-          </a:p>
-        </p:txBody>
-      </p:sp>
-    </p:spTree>
-  </p:cSld>
-  <p:clrMapOvr>
-    <a:masterClrMapping/>
-  </p:clrMapOvr>
-</p:sld>
-</file>
-
-<file path=ppt/slides/slide11.xml><?xml version="1.0" encoding="utf-8"?>
-<p:sld xmlns:a="http://schemas.openxmlformats.org/drawingml/2006/main" xmlns:p="http://schemas.openxmlformats.org/presentationml/2006/main" xmlns:r="http://schemas.openxmlformats.org/officeDocument/2006/relationships">
-  <p:cSld>
-    <p:spTree>
-      <p:nvGrpSpPr>
-        <p:cNvPr id="1" name=""/>
-        <p:cNvGrpSpPr/>
-        <p:nvPr/>
-      </p:nvGrpSpPr>
-      <p:grpSpPr/>
-      <p:sp>
-        <p:nvSpPr>
-          <p:cNvPr id="2" name="Rectangle 1"/>
+                <a:latin typeface="Arial" panose="020B0604020202020204"/>
+              </a:rPr>
+              <a:t>Four electrons and four protons move through several intermediates, so the reaction is slow and carries most of the cell overpotential.</a:t>
+            </a:r>
+            <a:endParaRPr sz="1500">
+              <a:solidFill>
+                <a:srgbClr val="1F2937"/>
+              </a:solidFill>
+              <a:latin typeface="Arial" panose="020B0604020202020204"/>
+            </a:endParaRPr>
+          </a:p>
+        </p:txBody>
+      </p:sp>
+      <p:sp>
+        <p:nvSpPr>
+          <p:cNvPr id="9" name="Rounded Rectangle 8"/>
           <p:cNvSpPr/>
           <p:nvPr/>
         </p:nvSpPr>
         <p:spPr>
           <a:xfrm>
-            <a:off x="384048" y="274320"/>
-            <a:ext cx="68580" cy="512064"/>
-          </a:xfrm>
-          <a:prstGeom prst="rect">
+            <a:off x="5897880" y="4069080"/>
+            <a:ext cx="5623560" cy="1051560"/>
+          </a:xfrm>
+          <a:prstGeom prst="roundRect">
             <a:avLst/>
           </a:prstGeom>
           <a:solidFill>
-            <a:srgbClr val="003D7C"/>
+            <a:srgbClr val="FFF7EC"/>
           </a:solidFill>
-          <a:ln>
-            <a:noFill/>
+          <a:ln w="12700">
+            <a:solidFill>
+              <a:srgbClr val="EF7C00"/>
+            </a:solidFill>
           </a:ln>
           <a:effectLst/>
         </p:spPr>
@@ -4152,98 +4572,53 @@
           </a:fontRef>
         </p:style>
         <p:txBody>
-          <a:bodyPr rtlCol="0" anchor="ctr"/>
+          <a:bodyPr wrap="square" lIns="146304" tIns="82296" rIns="146304" bIns="82296" rtlCol="0" anchor="t"/>
           <a:lstStyle/>
           <a:p>
             <a:pPr algn="ctr"/>
-          </a:p>
-        </p:txBody>
-      </p:sp>
-      <p:sp>
-        <p:nvSpPr>
-          <p:cNvPr id="3" name="TextBox 2"/>
-          <p:cNvSpPr txBox="1"/>
-          <p:nvPr/>
-        </p:nvSpPr>
-        <p:spPr>
-          <a:xfrm>
-            <a:off x="548640" y="201168"/>
-            <a:ext cx="10332720" cy="658368"/>
-          </a:xfrm>
-          <a:prstGeom prst="rect">
-            <a:avLst/>
-          </a:prstGeom>
-          <a:noFill/>
-        </p:spPr>
-        <p:txBody>
-          <a:bodyPr wrap="square">
-            <a:spAutoFit/>
-          </a:bodyPr>
-          <a:lstStyle/>
-          <a:p>
-            <a:r>
-              <a:rPr sz="2600" b="1">
+            <a:r>
+              <a:rPr sz="1800" b="1">
+                <a:solidFill>
+                  <a:srgbClr val="003D7C"/>
+                </a:solidFill>
+                <a:latin typeface="Arial" panose="020B0604020202020204"/>
+              </a:rPr>
+              <a:t>Two environments, two material sets</a:t>
+            </a:r>
+            <a:endParaRPr sz="1800" b="1">
+              <a:solidFill>
+                <a:srgbClr val="003D7C"/>
+              </a:solidFill>
+              <a:latin typeface="Arial" panose="020B0604020202020204"/>
+            </a:endParaRPr>
+          </a:p>
+          <a:p>
+            <a:pPr>
+              <a:spcBef>
+                <a:spcPts val="400"/>
+              </a:spcBef>
+            </a:pPr>
+            <a:r>
+              <a:rPr sz="1500">
                 <a:solidFill>
                   <a:srgbClr val="1F2937"/>
                 </a:solidFill>
-                <a:latin typeface="Arial"/>
-              </a:rPr>
-              <a:t>Experiment plan: deposit, window, exchange, prove, test</a:t>
-            </a:r>
-          </a:p>
-        </p:txBody>
-      </p:sp>
-      <p:pic>
-        <p:nvPicPr>
-          <p:cNvPr id="4" name="Picture 3" descr="logo_nus_black.png"/>
-          <p:cNvPicPr>
-            <a:picLocks noChangeAspect="1"/>
-          </p:cNvPicPr>
-          <p:nvPr/>
-        </p:nvPicPr>
-        <p:blipFill>
-          <a:blip r:embed="rId2"/>
-          <a:stretch>
-            <a:fillRect/>
-          </a:stretch>
-        </p:blipFill>
-        <p:spPr>
-          <a:xfrm>
-            <a:off x="11018520" y="237744"/>
-            <a:ext cx="822960" cy="545812"/>
-          </a:xfrm>
-          <a:prstGeom prst="rect">
-            <a:avLst/>
-          </a:prstGeom>
-        </p:spPr>
-      </p:pic>
-      <p:pic>
-        <p:nvPicPr>
-          <p:cNvPr id="5" name="Picture 4" descr="fig_plan.png"/>
-          <p:cNvPicPr>
-            <a:picLocks noChangeAspect="1"/>
-          </p:cNvPicPr>
-          <p:nvPr/>
-        </p:nvPicPr>
-        <p:blipFill>
-          <a:blip r:embed="rId3"/>
-          <a:stretch>
-            <a:fillRect/>
-          </a:stretch>
-        </p:blipFill>
-        <p:spPr>
-          <a:xfrm>
-            <a:off x="766280" y="1024128"/>
-            <a:ext cx="10656391" cy="4114800"/>
-          </a:xfrm>
-          <a:prstGeom prst="rect">
-            <a:avLst/>
-          </a:prstGeom>
-        </p:spPr>
-      </p:pic>
-      <p:sp>
-        <p:nvSpPr>
-          <p:cNvPr id="6" name="TextBox 5"/>
+                <a:latin typeface="Arial" panose="020B0604020202020204"/>
+              </a:rPr>
+              <a:t>Alkaline media allow cheap Ni, Co or Fe oxides; acidic media (PEM) require Ir or Ru oxides.</a:t>
+            </a:r>
+            <a:endParaRPr sz="1500">
+              <a:solidFill>
+                <a:srgbClr val="1F2937"/>
+              </a:solidFill>
+              <a:latin typeface="Arial" panose="020B0604020202020204"/>
+            </a:endParaRPr>
+          </a:p>
+        </p:txBody>
+      </p:sp>
+      <p:sp>
+        <p:nvSpPr>
+          <p:cNvPr id="10" name="TextBox 9"/>
           <p:cNvSpPr txBox="1"/>
           <p:nvPr/>
         </p:nvSpPr>
@@ -4273,16 +4648,22 @@
                 <a:solidFill>
                   <a:srgbClr val="C0392B"/>
                 </a:solidFill>
-                <a:latin typeface="Arial"/>
-              </a:rPr>
-              <a:t>First priority: step 2 — find the MnO₂ host window (Mn²⁺ below, MnO₄⁻ above) before loading Ru.</a:t>
-            </a:r>
-          </a:p>
-        </p:txBody>
-      </p:sp>
-      <p:sp>
-        <p:nvSpPr>
-          <p:cNvPr id="7" name="TextBox 6"/>
+                <a:latin typeface="Arial" panose="020B0604020202020204"/>
+              </a:rPr>
+              <a:t>Water splitting is two half-reactions, and the oxygen evolution reaction at the anode limits the whole cell.</a:t>
+            </a:r>
+            <a:endParaRPr sz="1700" b="1">
+              <a:solidFill>
+                <a:srgbClr val="C0392B"/>
+              </a:solidFill>
+              <a:latin typeface="Arial" panose="020B0604020202020204"/>
+            </a:endParaRPr>
+          </a:p>
+        </p:txBody>
+      </p:sp>
+      <p:sp>
+        <p:nvSpPr>
+          <p:cNvPr id="11" name="TextBox 10"/>
           <p:cNvSpPr txBox="1"/>
           <p:nvPr/>
         </p:nvSpPr>
@@ -4307,16 +4688,22 @@
                 <a:solidFill>
                   <a:srgbClr val="5B6572"/>
                 </a:solidFill>
-                <a:latin typeface="Arial"/>
-              </a:rPr>
-              <a:t>Schematic drawn for this project: parameters per the group protocol; characterisation and testing practice follow Adv. Energy Mater. 2023 §5.</a:t>
-            </a:r>
-          </a:p>
-        </p:txBody>
-      </p:sp>
-      <p:sp>
-        <p:nvSpPr>
-          <p:cNvPr id="8" name="TextBox 7"/>
+                <a:latin typeface="Arial" panose="020B0604020202020204"/>
+              </a:rPr>
+              <a:t>Panel: Chem. Soc. Rev. 2020, 49, 2196, Fig. 1 (re-rendered at high resolution).</a:t>
+            </a:r>
+            <a:endParaRPr sz="1000" i="1">
+              <a:solidFill>
+                <a:srgbClr val="5B6572"/>
+              </a:solidFill>
+              <a:latin typeface="Arial" panose="020B0604020202020204"/>
+            </a:endParaRPr>
+          </a:p>
+        </p:txBody>
+      </p:sp>
+      <p:sp>
+        <p:nvSpPr>
+          <p:cNvPr id="12" name="TextBox 11"/>
           <p:cNvSpPr txBox="1"/>
           <p:nvPr/>
         </p:nvSpPr>
@@ -4342,10 +4729,16 @@
                 <a:solidFill>
                   <a:srgbClr val="1F2937"/>
                 </a:solidFill>
-                <a:latin typeface="Arial"/>
-              </a:rPr>
-              <a:t>10</a:t>
-            </a:r>
+                <a:latin typeface="Arial" panose="020B0604020202020204"/>
+              </a:rPr>
+              <a:t>2</a:t>
+            </a:r>
+            <a:endParaRPr sz="1300">
+              <a:solidFill>
+                <a:srgbClr val="1F2937"/>
+              </a:solidFill>
+              <a:latin typeface="Arial" panose="020B0604020202020204"/>
+            </a:endParaRPr>
           </a:p>
         </p:txBody>
       </p:sp>
@@ -4357,8 +4750,8 @@
 </p:sld>
 </file>
 
-<file path=ppt/slides/slide2.xml><?xml version="1.0" encoding="utf-8"?>
-<p:sld xmlns:a="http://schemas.openxmlformats.org/drawingml/2006/main" xmlns:p="http://schemas.openxmlformats.org/presentationml/2006/main" xmlns:r="http://schemas.openxmlformats.org/officeDocument/2006/relationships">
+<file path=ppt/slides/slide4.xml><?xml version="1.0" encoding="utf-8"?>
+<p:sld xmlns:a="http://schemas.openxmlformats.org/drawingml/2006/main" xmlns:r="http://schemas.openxmlformats.org/officeDocument/2006/relationships" xmlns:p="http://schemas.openxmlformats.org/presentationml/2006/main">
   <p:cSld>
     <p:spTree>
       <p:nvGrpSpPr>
@@ -4438,10 +4831,16 @@
                 <a:solidFill>
                   <a:srgbClr val="1F2937"/>
                 </a:solidFill>
-                <a:latin typeface="Arial"/>
-              </a:rPr>
-              <a:t>Hydrogen: why the world is moving to it</a:t>
-            </a:r>
+                <a:latin typeface="Arial" panose="020B0604020202020204"/>
+              </a:rPr>
+              <a:t>Three mechanisms side by side: what really differs</a:t>
+            </a:r>
+            <a:endParaRPr sz="2700" b="1">
+              <a:solidFill>
+                <a:srgbClr val="1F2937"/>
+              </a:solidFill>
+              <a:latin typeface="Arial" panose="020B0604020202020204"/>
+            </a:endParaRPr>
           </a:p>
         </p:txBody>
       </p:sp>
@@ -4454,7 +4853,7 @@
           <p:nvPr/>
         </p:nvPicPr>
         <p:blipFill>
-          <a:blip r:embed="rId2"/>
+          <a:blip r:embed="rId1"/>
           <a:stretch>
             <a:fillRect/>
           </a:stretch>
@@ -4469,30 +4868,6 @@
           </a:prstGeom>
         </p:spPr>
       </p:pic>
-      <p:pic>
-        <p:nvPicPr>
-          <p:cNvPr id="5" name="Picture 4" descr="fig_h2.png"/>
-          <p:cNvPicPr>
-            <a:picLocks noChangeAspect="1"/>
-          </p:cNvPicPr>
-          <p:nvPr/>
-        </p:nvPicPr>
-        <p:blipFill>
-          <a:blip r:embed="rId3"/>
-          <a:stretch>
-            <a:fillRect/>
-          </a:stretch>
-        </p:blipFill>
-        <p:spPr>
-          <a:xfrm>
-            <a:off x="755390" y="1051560"/>
-            <a:ext cx="10678171" cy="3931920"/>
-          </a:xfrm>
-          <a:prstGeom prst="rect">
-            <a:avLst/>
-          </a:prstGeom>
-        </p:spPr>
-      </p:pic>
       <p:sp>
         <p:nvSpPr>
           <p:cNvPr id="6" name="TextBox 5"/>
@@ -4501,8 +4876,8 @@
         </p:nvSpPr>
         <p:spPr>
           <a:xfrm>
-            <a:off x="640080" y="5120640"/>
-            <a:ext cx="10908792" cy="854964"/>
+            <a:off x="640080" y="4864608"/>
+            <a:ext cx="10908792" cy="1158240"/>
           </a:xfrm>
           <a:prstGeom prst="rect">
             <a:avLst/>
@@ -4525,10 +4900,16 @@
                 <a:solidFill>
                   <a:srgbClr val="1F2937"/>
                 </a:solidFill>
-                <a:latin typeface="Arial"/>
-              </a:rPr>
-              <a:t>Hydrogen production is about 100 Mt per year and is still dominated by unabated fossil fuels. Low-emission hydrogen from electrolysis is about 1 Mt, i.e. below 1%.</a:t>
-            </a:r>
+                <a:latin typeface="Arial" panose="020B0604020202020204"/>
+              </a:rPr>
+              <a:t>The three routes differ in two things: whether lattice oxygen is consumed, and whether one site or two adjacent sites perform the O–O coupling.</a:t>
+            </a:r>
+            <a:endParaRPr sz="1600" b="0">
+              <a:solidFill>
+                <a:srgbClr val="1F2937"/>
+              </a:solidFill>
+              <a:latin typeface="Arial" panose="020B0604020202020204"/>
+            </a:endParaRPr>
           </a:p>
           <a:p>
             <a:pPr algn="l">
@@ -4541,10 +4922,34 @@
                 <a:solidFill>
                   <a:srgbClr val="C0392B"/>
                 </a:solidFill>
-                <a:latin typeface="Arial"/>
-              </a:rPr>
-              <a:t>Demand is expected to grow under announced pledges, so the production route — not the molecule — is the bottleneck. Water electrolysis is the route that can be decarbonised, and its cost is set by the anode.</a:t>
-            </a:r>
+                <a:latin typeface="Arial" panose="020B0604020202020204"/>
+              </a:rPr>
+              <a:t>We target OPM: direct coupling needs no *OOH and leaves no vacancy, while LOM destroys the surface</a:t>
+            </a:r>
+            <a:r>
+              <a:rPr lang="en-US" sz="1700" b="1">
+                <a:solidFill>
+                  <a:srgbClr val="C0392B"/>
+                </a:solidFill>
+                <a:latin typeface="Arial" panose="020B0604020202020204"/>
+              </a:rPr>
+              <a:t> and AEM has an restriction</a:t>
+            </a:r>
+            <a:r>
+              <a:rPr sz="1700" b="1">
+                <a:solidFill>
+                  <a:srgbClr val="C0392B"/>
+                </a:solidFill>
+                <a:latin typeface="Arial" panose="020B0604020202020204"/>
+              </a:rPr>
+              <a:t>.</a:t>
+            </a:r>
+            <a:endParaRPr sz="1700" b="1">
+              <a:solidFill>
+                <a:srgbClr val="C0392B"/>
+              </a:solidFill>
+              <a:latin typeface="Arial" panose="020B0604020202020204"/>
+            </a:endParaRPr>
           </a:p>
         </p:txBody>
       </p:sp>
@@ -4575,10 +4980,16 @@
                 <a:solidFill>
                   <a:srgbClr val="5B6572"/>
                 </a:solidFill>
-                <a:latin typeface="Arial"/>
-              </a:rPr>
-              <a:t>Data: IEA Global Hydrogen Review 2025 and 2026.</a:t>
-            </a:r>
+                <a:latin typeface="Arial" panose="020B0604020202020204"/>
+              </a:rPr>
+              <a:t>Panels: Nat. Commun. 2023, 14, 354, Fig. 4d (AEM) and Supplementary Figs. 26 (LOM) and 35 (OPM), CC-BY.</a:t>
+            </a:r>
+            <a:endParaRPr sz="1000" i="1">
+              <a:solidFill>
+                <a:srgbClr val="5B6572"/>
+              </a:solidFill>
+              <a:latin typeface="Arial" panose="020B0604020202020204"/>
+            </a:endParaRPr>
           </a:p>
         </p:txBody>
       </p:sp>
@@ -4610,13 +5021,43 @@
                 <a:solidFill>
                   <a:srgbClr val="1F2937"/>
                 </a:solidFill>
-                <a:latin typeface="Arial"/>
-              </a:rPr>
-              <a:t>1</a:t>
-            </a:r>
-          </a:p>
-        </p:txBody>
-      </p:sp>
+                <a:latin typeface="Arial" panose="020B0604020202020204"/>
+              </a:rPr>
+              <a:t>3</a:t>
+            </a:r>
+            <a:endParaRPr sz="1300">
+              <a:solidFill>
+                <a:srgbClr val="1F2937"/>
+              </a:solidFill>
+              <a:latin typeface="Arial" panose="020B0604020202020204"/>
+            </a:endParaRPr>
+          </a:p>
+        </p:txBody>
+      </p:sp>
+      <p:pic>
+        <p:nvPicPr>
+          <p:cNvPr id="9" name="Picture 8" descr="fig_mech_compare.png"/>
+          <p:cNvPicPr>
+            <a:picLocks noChangeAspect="1"/>
+          </p:cNvPicPr>
+          <p:nvPr/>
+        </p:nvPicPr>
+        <p:blipFill>
+          <a:blip r:embed="rId4"/>
+          <a:stretch>
+            <a:fillRect/>
+          </a:stretch>
+        </p:blipFill>
+        <p:spPr>
+          <a:xfrm>
+            <a:off x="0" y="1119505"/>
+            <a:ext cx="12191365" cy="3693266"/>
+          </a:xfrm>
+          <a:prstGeom prst="rect">
+            <a:avLst/>
+          </a:prstGeom>
+        </p:spPr>
+      </p:pic>
     </p:spTree>
   </p:cSld>
   <p:clrMapOvr>
@@ -4625,8 +5066,8 @@
 </p:sld>
 </file>
 
-<file path=ppt/slides/slide3.xml><?xml version="1.0" encoding="utf-8"?>
-<p:sld xmlns:a="http://schemas.openxmlformats.org/drawingml/2006/main" xmlns:p="http://schemas.openxmlformats.org/presentationml/2006/main" xmlns:r="http://schemas.openxmlformats.org/officeDocument/2006/relationships">
+<file path=ppt/slides/slide5.xml><?xml version="1.0" encoding="utf-8"?>
+<p:sld xmlns:a="http://schemas.openxmlformats.org/drawingml/2006/main" xmlns:r="http://schemas.openxmlformats.org/officeDocument/2006/relationships" xmlns:p="http://schemas.openxmlformats.org/presentationml/2006/main">
   <p:cSld>
     <p:spTree>
       <p:nvGrpSpPr>
@@ -4706,16 +5147,46 @@
                 <a:solidFill>
                   <a:srgbClr val="1F2937"/>
                 </a:solidFill>
-                <a:latin typeface="Arial"/>
-              </a:rPr>
-              <a:t>Making hydrogen: water electrolysis and its two half-reactions</a:t>
-            </a:r>
+                <a:latin typeface="Arial" panose="020B0604020202020204"/>
+              </a:rPr>
+              <a:t>Mechanism I: AEM — four steps, and a ceiling you cannot remove</a:t>
+            </a:r>
+            <a:endParaRPr sz="2700" b="1">
+              <a:solidFill>
+                <a:srgbClr val="1F2937"/>
+              </a:solidFill>
+              <a:latin typeface="Arial" panose="020B0604020202020204"/>
+            </a:endParaRPr>
           </a:p>
         </p:txBody>
       </p:sp>
       <p:pic>
         <p:nvPicPr>
           <p:cNvPr id="4" name="Picture 3" descr="logo_nus_black.png"/>
+          <p:cNvPicPr>
+            <a:picLocks noChangeAspect="1"/>
+          </p:cNvPicPr>
+          <p:nvPr/>
+        </p:nvPicPr>
+        <p:blipFill>
+          <a:blip r:embed="rId1"/>
+          <a:stretch>
+            <a:fillRect/>
+          </a:stretch>
+        </p:blipFill>
+        <p:spPr>
+          <a:xfrm>
+            <a:off x="11018520" y="237744"/>
+            <a:ext cx="822960" cy="545812"/>
+          </a:xfrm>
+          <a:prstGeom prst="rect">
+            <a:avLst/>
+          </a:prstGeom>
+        </p:spPr>
+      </p:pic>
+      <p:pic>
+        <p:nvPicPr>
+          <p:cNvPr id="5" name="Picture 4" descr="use_energy_path.png"/>
           <p:cNvPicPr>
             <a:picLocks noChangeAspect="1"/>
           </p:cNvPicPr>
@@ -4729,118 +5200,24 @@
         </p:blipFill>
         <p:spPr>
           <a:xfrm>
-            <a:off x="11018520" y="237744"/>
-            <a:ext cx="822960" cy="545812"/>
+            <a:off x="1961896" y="1234440"/>
+            <a:ext cx="3665726" cy="3246120"/>
           </a:xfrm>
           <a:prstGeom prst="rect">
             <a:avLst/>
           </a:prstGeom>
         </p:spPr>
       </p:pic>
-      <p:pic>
-        <p:nvPicPr>
-          <p:cNvPr id="5" name="Picture 4" descr="fig_cell_clean.png"/>
-          <p:cNvPicPr>
-            <a:picLocks noChangeAspect="1"/>
-          </p:cNvPicPr>
-          <p:nvPr/>
-        </p:nvPicPr>
-        <p:blipFill>
-          <a:blip r:embed="rId3"/>
-          <a:stretch>
-            <a:fillRect/>
-          </a:stretch>
-        </p:blipFill>
-        <p:spPr>
-          <a:xfrm>
-            <a:off x="640080" y="1325880"/>
-            <a:ext cx="4937759" cy="3412446"/>
-          </a:xfrm>
-          <a:prstGeom prst="rect">
-            <a:avLst/>
-          </a:prstGeom>
-        </p:spPr>
-      </p:pic>
-      <p:sp>
-        <p:nvSpPr>
-          <p:cNvPr id="6" name="TextBox 5"/>
-          <p:cNvSpPr txBox="1"/>
-          <p:nvPr/>
-        </p:nvSpPr>
-        <p:spPr>
-          <a:xfrm>
-            <a:off x="5897880" y="1417320"/>
-            <a:ext cx="5623560" cy="420624"/>
-          </a:xfrm>
-          <a:prstGeom prst="rect">
-            <a:avLst/>
-          </a:prstGeom>
-          <a:noFill/>
-        </p:spPr>
-        <p:txBody>
-          <a:bodyPr wrap="none">
-            <a:spAutoFit/>
-          </a:bodyPr>
-          <a:lstStyle/>
-          <a:p>
-            <a:pPr algn="l"/>
-            <a:r>
-              <a:rPr sz="1800" b="1">
-                <a:solidFill>
-                  <a:srgbClr val="003D7C"/>
-                </a:solidFill>
-                <a:latin typeface="Arial"/>
-              </a:rPr>
-              <a:t>Cathode (HER):  2 H₂O + 2 e⁻ → H₂ + 2 OH⁻</a:t>
-            </a:r>
-          </a:p>
-        </p:txBody>
-      </p:sp>
-      <p:sp>
-        <p:nvSpPr>
-          <p:cNvPr id="7" name="TextBox 6"/>
-          <p:cNvSpPr txBox="1"/>
-          <p:nvPr/>
-        </p:nvSpPr>
-        <p:spPr>
-          <a:xfrm>
-            <a:off x="5897880" y="1965960"/>
-            <a:ext cx="5623560" cy="420624"/>
-          </a:xfrm>
-          <a:prstGeom prst="rect">
-            <a:avLst/>
-          </a:prstGeom>
-          <a:noFill/>
-        </p:spPr>
-        <p:txBody>
-          <a:bodyPr wrap="none">
-            <a:spAutoFit/>
-          </a:bodyPr>
-          <a:lstStyle/>
-          <a:p>
-            <a:pPr algn="l"/>
-            <a:r>
-              <a:rPr sz="1800" b="1">
-                <a:solidFill>
-                  <a:srgbClr val="003D7C"/>
-                </a:solidFill>
-                <a:latin typeface="Arial"/>
-              </a:rPr>
-              <a:t>Anode (OER):    2 H₂O → O₂ + 4 H⁺ + 4 e⁻</a:t>
-            </a:r>
-          </a:p>
-        </p:txBody>
-      </p:sp>
-      <p:sp>
-        <p:nvSpPr>
-          <p:cNvPr id="8" name="Rounded Rectangle 7"/>
+      <p:sp>
+        <p:nvSpPr>
+          <p:cNvPr id="6" name="Rounded Rectangle 5"/>
           <p:cNvSpPr/>
           <p:nvPr/>
         </p:nvSpPr>
         <p:spPr>
           <a:xfrm>
-            <a:off x="5897880" y="2606040"/>
-            <a:ext cx="5623560" cy="1325880"/>
+            <a:off x="7223760" y="1234440"/>
+            <a:ext cx="4325112" cy="1463040"/>
           </a:xfrm>
           <a:prstGeom prst="roundRect">
             <a:avLst/>
@@ -4870,19 +5247,25 @@
           </a:fontRef>
         </p:style>
         <p:txBody>
-          <a:bodyPr rtlCol="0" anchor="t" wrap="square" lIns="146304" rIns="146304" tIns="82296" bIns="82296"/>
+          <a:bodyPr wrap="square" lIns="146304" tIns="82296" rIns="146304" bIns="82296" rtlCol="0" anchor="t"/>
           <a:lstStyle/>
           <a:p>
             <a:pPr algn="ctr"/>
             <a:r>
-              <a:rPr sz="1800" b="1">
+              <a:rPr sz="1700" b="1">
                 <a:solidFill>
                   <a:srgbClr val="003D7C"/>
                 </a:solidFill>
-                <a:latin typeface="Arial"/>
-              </a:rPr>
-              <a:t>OER is the bottleneck</a:t>
-            </a:r>
+                <a:latin typeface="Arial" panose="020B0604020202020204"/>
+              </a:rPr>
+              <a:t>The four steps</a:t>
+            </a:r>
+            <a:endParaRPr sz="1700" b="1">
+              <a:solidFill>
+                <a:srgbClr val="003D7C"/>
+              </a:solidFill>
+              <a:latin typeface="Arial" panose="020B0604020202020204"/>
+            </a:endParaRPr>
           </a:p>
           <a:p>
             <a:pPr>
@@ -4891,27 +5274,33 @@
               </a:spcBef>
             </a:pPr>
             <a:r>
-              <a:rPr sz="1500">
+              <a:rPr sz="1400">
                 <a:solidFill>
                   <a:srgbClr val="1F2937"/>
                 </a:solidFill>
-                <a:latin typeface="Arial"/>
-              </a:rPr>
-              <a:t>Four electrons and four protons move through several intermediates, so the reaction is slow and carries most of the cell overpotential.</a:t>
-            </a:r>
-          </a:p>
-        </p:txBody>
-      </p:sp>
-      <p:sp>
-        <p:nvSpPr>
-          <p:cNvPr id="9" name="Rounded Rectangle 8"/>
+                <a:latin typeface="Arial" panose="020B0604020202020204"/>
+              </a:rPr>
+              <a:t>AEM uses adsorbed oxygen only — H₂O → *OH → *O → *OOH → O₂ — all on the same metal site.</a:t>
+            </a:r>
+            <a:endParaRPr sz="1400">
+              <a:solidFill>
+                <a:srgbClr val="1F2937"/>
+              </a:solidFill>
+              <a:latin typeface="Arial" panose="020B0604020202020204"/>
+            </a:endParaRPr>
+          </a:p>
+        </p:txBody>
+      </p:sp>
+      <p:sp>
+        <p:nvSpPr>
+          <p:cNvPr id="7" name="Rounded Rectangle 6"/>
           <p:cNvSpPr/>
           <p:nvPr/>
         </p:nvSpPr>
         <p:spPr>
           <a:xfrm>
-            <a:off x="5897880" y="4069080"/>
-            <a:ext cx="5623560" cy="1051560"/>
+            <a:off x="7223760" y="2834640"/>
+            <a:ext cx="4325112" cy="1645920"/>
           </a:xfrm>
           <a:prstGeom prst="roundRect">
             <a:avLst/>
@@ -4941,19 +5330,25 @@
           </a:fontRef>
         </p:style>
         <p:txBody>
-          <a:bodyPr rtlCol="0" anchor="t" wrap="square" lIns="146304" rIns="146304" tIns="82296" bIns="82296"/>
+          <a:bodyPr wrap="square" lIns="146304" tIns="82296" rIns="146304" bIns="82296" rtlCol="0" anchor="t"/>
           <a:lstStyle/>
           <a:p>
             <a:pPr algn="ctr"/>
             <a:r>
-              <a:rPr sz="1800" b="1">
+              <a:rPr sz="1700" b="1">
                 <a:solidFill>
                   <a:srgbClr val="003D7C"/>
                 </a:solidFill>
-                <a:latin typeface="Arial"/>
-              </a:rPr>
-              <a:t>Two environments, two material sets</a:t>
-            </a:r>
+                <a:latin typeface="Arial" panose="020B0604020202020204"/>
+              </a:rPr>
+              <a:t>Why it is capped</a:t>
+            </a:r>
+            <a:endParaRPr sz="1700" b="1">
+              <a:solidFill>
+                <a:srgbClr val="003D7C"/>
+              </a:solidFill>
+              <a:latin typeface="Arial" panose="020B0604020202020204"/>
+            </a:endParaRPr>
           </a:p>
           <a:p>
             <a:pPr>
@@ -4962,27 +5357,33 @@
               </a:spcBef>
             </a:pPr>
             <a:r>
-              <a:rPr sz="1500">
+              <a:rPr sz="1400">
                 <a:solidFill>
                   <a:srgbClr val="1F2937"/>
                 </a:solidFill>
-                <a:latin typeface="Arial"/>
-              </a:rPr>
-              <a:t>Alkaline media allow cheap Ni, Co or Fe oxides; acidic media (PEM) require Ir or Ru oxides.</a:t>
-            </a:r>
-          </a:p>
-        </p:txBody>
-      </p:sp>
-      <p:sp>
-        <p:nvSpPr>
-          <p:cNvPr id="10" name="TextBox 9"/>
+                <a:latin typeface="Arial" panose="020B0604020202020204"/>
+              </a:rPr>
+              <a:t>Because *OH and *OOH both bind through a single oxygen, their energies move together: the scaling gap is about 3.2 eV, so one step is always larger than 1.23 eV.</a:t>
+            </a:r>
+            <a:endParaRPr sz="1400">
+              <a:solidFill>
+                <a:srgbClr val="1F2937"/>
+              </a:solidFill>
+              <a:latin typeface="Arial" panose="020B0604020202020204"/>
+            </a:endParaRPr>
+          </a:p>
+        </p:txBody>
+      </p:sp>
+      <p:sp>
+        <p:nvSpPr>
+          <p:cNvPr id="8" name="TextBox 7"/>
           <p:cNvSpPr txBox="1"/>
           <p:nvPr/>
         </p:nvSpPr>
         <p:spPr>
           <a:xfrm>
-            <a:off x="640080" y="5349240"/>
-            <a:ext cx="10908792" cy="326898"/>
+            <a:off x="640080" y="4864608"/>
+            <a:ext cx="10908792" cy="582930"/>
           </a:xfrm>
           <a:prstGeom prst="rect">
             <a:avLst/>
@@ -5001,20 +5402,48 @@
               </a:spcAft>
             </a:pPr>
             <a:r>
+              <a:rPr sz="1600" b="0">
+                <a:solidFill>
+                  <a:srgbClr val="1F2937"/>
+                </a:solidFill>
+                <a:latin typeface="Arial" panose="020B0604020202020204"/>
+              </a:rPr>
+              <a:t>Left: ideal versus real free-energy steps at U = 0 — no catalyst can make all four equal.</a:t>
+            </a:r>
+            <a:endParaRPr sz="1600" b="0">
+              <a:solidFill>
+                <a:srgbClr val="1F2937"/>
+              </a:solidFill>
+              <a:latin typeface="Arial" panose="020B0604020202020204"/>
+            </a:endParaRPr>
+          </a:p>
+          <a:p>
+            <a:pPr algn="l">
+              <a:spcAft>
+                <a:spcPts val="400"/>
+              </a:spcAft>
+            </a:pPr>
+            <a:r>
               <a:rPr sz="1700" b="1">
                 <a:solidFill>
                   <a:srgbClr val="C0392B"/>
                 </a:solidFill>
-                <a:latin typeface="Arial"/>
-              </a:rPr>
-              <a:t>Water splitting is two half-reactions, and the oxygen evolution reaction at the anode limits the whole cell.</a:t>
-            </a:r>
-          </a:p>
-        </p:txBody>
-      </p:sp>
-      <p:sp>
-        <p:nvSpPr>
-          <p:cNvPr id="11" name="TextBox 10"/>
+                <a:latin typeface="Arial" panose="020B0604020202020204"/>
+              </a:rPr>
+              <a:t>Result: an intrinsic floor of about 0.37 V. AEM can be improved, but never below that floor.</a:t>
+            </a:r>
+            <a:endParaRPr sz="1700" b="1">
+              <a:solidFill>
+                <a:srgbClr val="C0392B"/>
+              </a:solidFill>
+              <a:latin typeface="Arial" panose="020B0604020202020204"/>
+            </a:endParaRPr>
+          </a:p>
+        </p:txBody>
+      </p:sp>
+      <p:sp>
+        <p:nvSpPr>
+          <p:cNvPr id="9" name="TextBox 8"/>
           <p:cNvSpPr txBox="1"/>
           <p:nvPr/>
         </p:nvSpPr>
@@ -5039,16 +5468,22 @@
                 <a:solidFill>
                   <a:srgbClr val="5B6572"/>
                 </a:solidFill>
-                <a:latin typeface="Arial"/>
-              </a:rPr>
-              <a:t>Panel: Chem. Soc. Rev. 2020, 49, 2196, Fig. 1 (re-rendered at high resolution).</a:t>
-            </a:r>
-          </a:p>
-        </p:txBody>
-      </p:sp>
-      <p:sp>
-        <p:nvSpPr>
-          <p:cNvPr id="12" name="TextBox 11"/>
+                <a:latin typeface="Arial" panose="020B0604020202020204"/>
+              </a:rPr>
+              <a:t>Chem. Soc. Rev. 2020, 49, 2196, Fig. 2a (adapted)  ·  floor from Adv. Energy Mater. 2023, 13, 2301391, §3.2.</a:t>
+            </a:r>
+            <a:endParaRPr sz="1000" i="1">
+              <a:solidFill>
+                <a:srgbClr val="5B6572"/>
+              </a:solidFill>
+              <a:latin typeface="Arial" panose="020B0604020202020204"/>
+            </a:endParaRPr>
+          </a:p>
+        </p:txBody>
+      </p:sp>
+      <p:sp>
+        <p:nvSpPr>
+          <p:cNvPr id="10" name="TextBox 9"/>
           <p:cNvSpPr txBox="1"/>
           <p:nvPr/>
         </p:nvSpPr>
@@ -5074,10 +5509,16 @@
                 <a:solidFill>
                   <a:srgbClr val="1F2937"/>
                 </a:solidFill>
-                <a:latin typeface="Arial"/>
-              </a:rPr>
-              <a:t>2</a:t>
-            </a:r>
+                <a:latin typeface="Arial" panose="020B0604020202020204"/>
+              </a:rPr>
+              <a:t>4</a:t>
+            </a:r>
+            <a:endParaRPr sz="1300">
+              <a:solidFill>
+                <a:srgbClr val="1F2937"/>
+              </a:solidFill>
+              <a:latin typeface="Arial" panose="020B0604020202020204"/>
+            </a:endParaRPr>
           </a:p>
         </p:txBody>
       </p:sp>
@@ -5089,8 +5530,8 @@
 </p:sld>
 </file>
 
-<file path=ppt/slides/slide4.xml><?xml version="1.0" encoding="utf-8"?>
-<p:sld xmlns:a="http://schemas.openxmlformats.org/drawingml/2006/main" xmlns:p="http://schemas.openxmlformats.org/presentationml/2006/main" xmlns:r="http://schemas.openxmlformats.org/officeDocument/2006/relationships">
+<file path=ppt/slides/slide6.xml><?xml version="1.0" encoding="utf-8"?>
+<p:sld xmlns:a="http://schemas.openxmlformats.org/drawingml/2006/main" xmlns:r="http://schemas.openxmlformats.org/officeDocument/2006/relationships" xmlns:p="http://schemas.openxmlformats.org/presentationml/2006/main">
   <p:cSld>
     <p:spTree>
       <p:nvGrpSpPr>
@@ -5170,16 +5611,46 @@
                 <a:solidFill>
                   <a:srgbClr val="1F2937"/>
                 </a:solidFill>
-                <a:latin typeface="Arial"/>
-              </a:rPr>
-              <a:t>Three mechanisms side by side: what really differs</a:t>
-            </a:r>
+                <a:latin typeface="Arial" panose="020B0604020202020204"/>
+              </a:rPr>
+              <a:t>Mechanism II: LOM — faster, but the surface pays for it</a:t>
+            </a:r>
+            <a:endParaRPr sz="2700" b="1">
+              <a:solidFill>
+                <a:srgbClr val="1F2937"/>
+              </a:solidFill>
+              <a:latin typeface="Arial" panose="020B0604020202020204"/>
+            </a:endParaRPr>
           </a:p>
         </p:txBody>
       </p:sp>
       <p:pic>
         <p:nvPicPr>
           <p:cNvPr id="4" name="Picture 3" descr="logo_nus_black.png"/>
+          <p:cNvPicPr>
+            <a:picLocks noChangeAspect="1"/>
+          </p:cNvPicPr>
+          <p:nvPr/>
+        </p:nvPicPr>
+        <p:blipFill>
+          <a:blip r:embed="rId1"/>
+          <a:stretch>
+            <a:fillRect/>
+          </a:stretch>
+        </p:blipFill>
+        <p:spPr>
+          <a:xfrm>
+            <a:off x="11018520" y="237744"/>
+            <a:ext cx="822960" cy="545812"/>
+          </a:xfrm>
+          <a:prstGeom prst="rect">
+            <a:avLst/>
+          </a:prstGeom>
+        </p:spPr>
+      </p:pic>
+      <p:pic>
+        <p:nvPicPr>
+          <p:cNvPr id="5" name="Picture 4" descr="fig_e_dos.png"/>
           <p:cNvPicPr>
             <a:picLocks noChangeAspect="1"/>
           </p:cNvPicPr>
@@ -5193,199 +5664,35 @@
         </p:blipFill>
         <p:spPr>
           <a:xfrm>
-            <a:off x="11018520" y="237744"/>
-            <a:ext cx="822960" cy="545812"/>
+            <a:off x="640080" y="1188720"/>
+            <a:ext cx="6766559" cy="2284156"/>
           </a:xfrm>
           <a:prstGeom prst="rect">
             <a:avLst/>
           </a:prstGeom>
         </p:spPr>
       </p:pic>
-      <p:pic>
-        <p:nvPicPr>
-          <p:cNvPr id="5" name="Picture 4" descr="fig_mech_compare.png"/>
-          <p:cNvPicPr>
-            <a:picLocks noChangeAspect="1"/>
-          </p:cNvPicPr>
-          <p:nvPr/>
-        </p:nvPicPr>
-        <p:blipFill>
-          <a:blip r:embed="rId3"/>
-          <a:stretch>
-            <a:fillRect/>
-          </a:stretch>
-        </p:blipFill>
-        <p:spPr>
-          <a:xfrm>
-            <a:off x="640080" y="1078992"/>
-            <a:ext cx="10908792" cy="3575150"/>
-          </a:xfrm>
-          <a:prstGeom prst="rect">
-            <a:avLst/>
-          </a:prstGeom>
-        </p:spPr>
-      </p:pic>
-      <p:sp>
-        <p:nvSpPr>
-          <p:cNvPr id="6" name="TextBox 5"/>
-          <p:cNvSpPr txBox="1"/>
-          <p:nvPr/>
-        </p:nvSpPr>
-        <p:spPr>
-          <a:xfrm>
-            <a:off x="640080" y="4864608"/>
-            <a:ext cx="10908792" cy="582930"/>
-          </a:xfrm>
-          <a:prstGeom prst="rect">
-            <a:avLst/>
-          </a:prstGeom>
-          <a:noFill/>
-        </p:spPr>
-        <p:txBody>
-          <a:bodyPr wrap="square">
-            <a:spAutoFit/>
-          </a:bodyPr>
-          <a:lstStyle/>
-          <a:p>
-            <a:pPr algn="l">
-              <a:spcAft>
-                <a:spcPts val="400"/>
-              </a:spcAft>
-            </a:pPr>
-            <a:r>
-              <a:rPr sz="1600" b="0">
-                <a:solidFill>
-                  <a:srgbClr val="1F2937"/>
-                </a:solidFill>
-                <a:latin typeface="Arial"/>
-              </a:rPr>
-              <a:t>The three routes differ in two things: whether lattice oxygen is consumed, and whether one site or two adjacent sites perform the O–O coupling.</a:t>
-            </a:r>
-          </a:p>
-          <a:p>
-            <a:pPr algn="l">
-              <a:spcAft>
-                <a:spcPts val="400"/>
-              </a:spcAft>
-            </a:pPr>
-            <a:r>
-              <a:rPr sz="1700" b="1">
-                <a:solidFill>
-                  <a:srgbClr val="C0392B"/>
-                </a:solidFill>
-                <a:latin typeface="Arial"/>
-              </a:rPr>
-              <a:t>We target OPM: direct coupling needs no *OOH and leaves no vacancy, while LOM destroys the surface.</a:t>
-            </a:r>
-          </a:p>
-        </p:txBody>
-      </p:sp>
-      <p:sp>
-        <p:nvSpPr>
-          <p:cNvPr id="7" name="TextBox 6"/>
-          <p:cNvSpPr txBox="1"/>
-          <p:nvPr/>
-        </p:nvSpPr>
-        <p:spPr>
-          <a:xfrm>
-            <a:off x="640080" y="6419088"/>
-            <a:ext cx="10241280" cy="274320"/>
-          </a:xfrm>
-          <a:prstGeom prst="rect">
-            <a:avLst/>
-          </a:prstGeom>
-          <a:noFill/>
-        </p:spPr>
-        <p:txBody>
-          <a:bodyPr wrap="none">
-            <a:spAutoFit/>
-          </a:bodyPr>
-          <a:lstStyle/>
-          <a:p>
-            <a:r>
-              <a:rPr sz="1000" i="1">
-                <a:solidFill>
-                  <a:srgbClr val="5B6572"/>
-                </a:solidFill>
-                <a:latin typeface="Arial"/>
-              </a:rPr>
-              <a:t>Panels: Nat. Commun. 2023, 14, 354, Fig. 4d (AEM) and Supplementary Figs. 26 (LOM) and 35 (OPM), CC-BY.</a:t>
-            </a:r>
-          </a:p>
-        </p:txBody>
-      </p:sp>
-      <p:sp>
-        <p:nvSpPr>
-          <p:cNvPr id="8" name="TextBox 7"/>
-          <p:cNvSpPr txBox="1"/>
-          <p:nvPr/>
-        </p:nvSpPr>
-        <p:spPr>
-          <a:xfrm>
-            <a:off x="11292840" y="6400800"/>
-            <a:ext cx="621792" cy="274320"/>
-          </a:xfrm>
-          <a:prstGeom prst="rect">
-            <a:avLst/>
-          </a:prstGeom>
-          <a:noFill/>
-        </p:spPr>
-        <p:txBody>
-          <a:bodyPr wrap="none">
-            <a:spAutoFit/>
-          </a:bodyPr>
-          <a:lstStyle/>
-          <a:p>
-            <a:pPr algn="r"/>
-            <a:r>
-              <a:rPr sz="1300">
-                <a:solidFill>
-                  <a:srgbClr val="1F2937"/>
-                </a:solidFill>
-                <a:latin typeface="Arial"/>
-              </a:rPr>
-              <a:t>3</a:t>
-            </a:r>
-          </a:p>
-        </p:txBody>
-      </p:sp>
-    </p:spTree>
-  </p:cSld>
-  <p:clrMapOvr>
-    <a:masterClrMapping/>
-  </p:clrMapOvr>
-</p:sld>
-</file>
-
-<file path=ppt/slides/slide5.xml><?xml version="1.0" encoding="utf-8"?>
-<p:sld xmlns:a="http://schemas.openxmlformats.org/drawingml/2006/main" xmlns:p="http://schemas.openxmlformats.org/presentationml/2006/main" xmlns:r="http://schemas.openxmlformats.org/officeDocument/2006/relationships">
-  <p:cSld>
-    <p:spTree>
-      <p:nvGrpSpPr>
-        <p:cNvPr id="1" name=""/>
-        <p:cNvGrpSpPr/>
-        <p:nvPr/>
-      </p:nvGrpSpPr>
-      <p:grpSpPr/>
-      <p:sp>
-        <p:nvSpPr>
-          <p:cNvPr id="2" name="Rectangle 1"/>
+      <p:sp>
+        <p:nvSpPr>
+          <p:cNvPr id="6" name="Rounded Rectangle 5"/>
           <p:cNvSpPr/>
           <p:nvPr/>
         </p:nvSpPr>
         <p:spPr>
           <a:xfrm>
-            <a:off x="384048" y="274320"/>
-            <a:ext cx="68580" cy="512064"/>
-          </a:xfrm>
-          <a:prstGeom prst="rect">
+            <a:off x="7680960" y="1188720"/>
+            <a:ext cx="3867912" cy="1417320"/>
+          </a:xfrm>
+          <a:prstGeom prst="roundRect">
             <a:avLst/>
           </a:prstGeom>
           <a:solidFill>
-            <a:srgbClr val="003D7C"/>
+            <a:srgbClr val="E8F5EE"/>
           </a:solidFill>
-          <a:ln>
-            <a:noFill/>
+          <a:ln w="12700">
+            <a:solidFill>
+              <a:srgbClr val="9AD3B8"/>
+            </a:solidFill>
           </a:ln>
           <a:effectLst/>
         </p:spPr>
@@ -5404,115 +5711,70 @@
           </a:fontRef>
         </p:style>
         <p:txBody>
-          <a:bodyPr rtlCol="0" anchor="ctr"/>
+          <a:bodyPr wrap="square" lIns="146304" tIns="82296" rIns="146304" bIns="82296" rtlCol="0" anchor="t"/>
           <a:lstStyle/>
           <a:p>
             <a:pPr algn="ctr"/>
-          </a:p>
-        </p:txBody>
-      </p:sp>
-      <p:sp>
-        <p:nvSpPr>
-          <p:cNvPr id="3" name="TextBox 2"/>
-          <p:cNvSpPr txBox="1"/>
-          <p:nvPr/>
-        </p:nvSpPr>
-        <p:spPr>
-          <a:xfrm>
-            <a:off x="548640" y="201168"/>
-            <a:ext cx="10332720" cy="658368"/>
-          </a:xfrm>
-          <a:prstGeom prst="rect">
-            <a:avLst/>
-          </a:prstGeom>
-          <a:noFill/>
-        </p:spPr>
-        <p:txBody>
-          <a:bodyPr wrap="square">
-            <a:spAutoFit/>
-          </a:bodyPr>
-          <a:lstStyle/>
-          <a:p>
-            <a:r>
-              <a:rPr sz="2700" b="1">
+            <a:r>
+              <a:rPr sz="1700" b="1">
+                <a:solidFill>
+                  <a:srgbClr val="003D7C"/>
+                </a:solidFill>
+                <a:latin typeface="Arial" panose="020B0604020202020204"/>
+              </a:rPr>
+              <a:t>When it switches on</a:t>
+            </a:r>
+            <a:endParaRPr sz="1700" b="1">
+              <a:solidFill>
+                <a:srgbClr val="003D7C"/>
+              </a:solidFill>
+              <a:latin typeface="Arial" panose="020B0604020202020204"/>
+            </a:endParaRPr>
+          </a:p>
+          <a:p>
+            <a:pPr>
+              <a:spcBef>
+                <a:spcPts val="400"/>
+              </a:spcBef>
+            </a:pPr>
+            <a:r>
+              <a:rPr sz="1400">
                 <a:solidFill>
                   <a:srgbClr val="1F2937"/>
                 </a:solidFill>
-                <a:latin typeface="Arial"/>
-              </a:rPr>
-              <a:t>Mechanism I: AEM — four steps, and a ceiling you cannot remove</a:t>
-            </a:r>
-          </a:p>
-        </p:txBody>
-      </p:sp>
-      <p:pic>
-        <p:nvPicPr>
-          <p:cNvPr id="4" name="Picture 3" descr="logo_nus_black.png"/>
-          <p:cNvPicPr>
-            <a:picLocks noChangeAspect="1"/>
-          </p:cNvPicPr>
-          <p:nvPr/>
-        </p:nvPicPr>
-        <p:blipFill>
-          <a:blip r:embed="rId2"/>
-          <a:stretch>
-            <a:fillRect/>
-          </a:stretch>
-        </p:blipFill>
-        <p:spPr>
-          <a:xfrm>
-            <a:off x="11018520" y="237744"/>
-            <a:ext cx="822960" cy="545812"/>
-          </a:xfrm>
-          <a:prstGeom prst="rect">
-            <a:avLst/>
-          </a:prstGeom>
-        </p:spPr>
-      </p:pic>
-      <p:pic>
-        <p:nvPicPr>
-          <p:cNvPr id="5" name="Picture 4" descr="use_energy_path.png"/>
-          <p:cNvPicPr>
-            <a:picLocks noChangeAspect="1"/>
-          </p:cNvPicPr>
-          <p:nvPr/>
-        </p:nvPicPr>
-        <p:blipFill>
-          <a:blip r:embed="rId3"/>
-          <a:stretch>
-            <a:fillRect/>
-          </a:stretch>
-        </p:blipFill>
-        <p:spPr>
-          <a:xfrm>
-            <a:off x="1961896" y="1234440"/>
-            <a:ext cx="3665726" cy="3246120"/>
-          </a:xfrm>
-          <a:prstGeom prst="rect">
-            <a:avLst/>
-          </a:prstGeom>
-        </p:spPr>
-      </p:pic>
-      <p:sp>
-        <p:nvSpPr>
-          <p:cNvPr id="6" name="Rounded Rectangle 5"/>
+                <a:latin typeface="Arial" panose="020B0604020202020204"/>
+              </a:rPr>
+              <a:t>Once the oxygen 2p states rise above the metal–oxygen band, lattice oxygen is oxidised and leaves as O₂.</a:t>
+            </a:r>
+            <a:endParaRPr sz="1400">
+              <a:solidFill>
+                <a:srgbClr val="1F2937"/>
+              </a:solidFill>
+              <a:latin typeface="Arial" panose="020B0604020202020204"/>
+            </a:endParaRPr>
+          </a:p>
+        </p:txBody>
+      </p:sp>
+      <p:sp>
+        <p:nvSpPr>
+          <p:cNvPr id="7" name="Rounded Rectangle 6"/>
           <p:cNvSpPr/>
           <p:nvPr/>
         </p:nvSpPr>
         <p:spPr>
           <a:xfrm>
-            <a:off x="7223760" y="1234440"/>
-            <a:ext cx="4325112" cy="1463040"/>
+            <a:off x="7680960" y="2743200"/>
+            <a:ext cx="3867912" cy="1737360"/>
           </a:xfrm>
           <a:prstGeom prst="roundRect">
             <a:avLst/>
           </a:prstGeom>
           <a:solidFill>
-            <a:srgbClr val="EFF5FB"/>
+            <a:srgbClr val="FDF2F2"/>
           </a:solidFill>
           <a:ln w="12700">
             <a:solidFill>
-              <a:srgbClr val="CFE0F2"/>
+              <a:srgbClr val="E8A0A0"/>
             </a:solidFill>
           </a:ln>
           <a:effectLst/>
@@ -5532,7 +5794,7 @@
           </a:fontRef>
         </p:style>
         <p:txBody>
-          <a:bodyPr rtlCol="0" anchor="t" wrap="square" lIns="146304" rIns="146304" tIns="82296" bIns="82296"/>
+          <a:bodyPr wrap="square" lIns="146304" tIns="82296" rIns="146304" bIns="82296" rtlCol="0" anchor="t"/>
           <a:lstStyle/>
           <a:p>
             <a:pPr algn="ctr"/>
@@ -5541,10 +5803,16 @@
                 <a:solidFill>
                   <a:srgbClr val="003D7C"/>
                 </a:solidFill>
-                <a:latin typeface="Arial"/>
-              </a:rPr>
-              <a:t>The four steps</a:t>
-            </a:r>
+                <a:latin typeface="Arial" panose="020B0604020202020204"/>
+              </a:rPr>
+              <a:t>What is left behind</a:t>
+            </a:r>
+            <a:endParaRPr sz="1700" b="1">
+              <a:solidFill>
+                <a:srgbClr val="003D7C"/>
+              </a:solidFill>
+              <a:latin typeface="Arial" panose="020B0604020202020204"/>
+            </a:endParaRPr>
           </a:p>
           <a:p>
             <a:pPr>
@@ -5557,34 +5825,204 @@
                 <a:solidFill>
                   <a:srgbClr val="1F2937"/>
                 </a:solidFill>
-                <a:latin typeface="Arial"/>
-              </a:rPr>
-              <a:t>AEM uses adsorbed oxygen only — H₂O → *OH → *O → *OOH → O₂ — all on the same metal site.</a:t>
-            </a:r>
-          </a:p>
-        </p:txBody>
-      </p:sp>
-      <p:sp>
-        <p:nvSpPr>
-          <p:cNvPr id="7" name="Rounded Rectangle 6"/>
+                <a:latin typeface="Arial" panose="020B0604020202020204"/>
+              </a:rPr>
+              <a:t>An oxygen vacancy — and the metal is released together with the oxygen. This is the dissolution channel we must avoid in acid.</a:t>
+            </a:r>
+            <a:endParaRPr sz="1400">
+              <a:solidFill>
+                <a:srgbClr val="1F2937"/>
+              </a:solidFill>
+              <a:latin typeface="Arial" panose="020B0604020202020204"/>
+            </a:endParaRPr>
+          </a:p>
+        </p:txBody>
+      </p:sp>
+      <p:sp>
+        <p:nvSpPr>
+          <p:cNvPr id="8" name="TextBox 7"/>
+          <p:cNvSpPr txBox="1"/>
+          <p:nvPr/>
+        </p:nvSpPr>
+        <p:spPr>
+          <a:xfrm>
+            <a:off x="640080" y="4864608"/>
+            <a:ext cx="10908792" cy="582930"/>
+          </a:xfrm>
+          <a:prstGeom prst="rect">
+            <a:avLst/>
+          </a:prstGeom>
+          <a:noFill/>
+        </p:spPr>
+        <p:txBody>
+          <a:bodyPr wrap="square">
+            <a:spAutoFit/>
+          </a:bodyPr>
+          <a:lstStyle/>
+          <a:p>
+            <a:pPr algn="l">
+              <a:spcAft>
+                <a:spcPts val="400"/>
+              </a:spcAft>
+            </a:pPr>
+            <a:r>
+              <a:rPr sz="1600" b="0">
+                <a:solidFill>
+                  <a:srgbClr val="1F2937"/>
+                </a:solidFill>
+                <a:latin typeface="Arial" panose="020B0604020202020204"/>
+              </a:rPr>
+              <a:t>Left: Mott–Hubbard picture — the O 2p band is pushed towards the Fermi level, so lattice oxygen becomes redox-active.</a:t>
+            </a:r>
+            <a:endParaRPr sz="1600" b="0">
+              <a:solidFill>
+                <a:srgbClr val="1F2937"/>
+              </a:solidFill>
+              <a:latin typeface="Arial" panose="020B0604020202020204"/>
+            </a:endParaRPr>
+          </a:p>
+          <a:p>
+            <a:pPr algn="l">
+              <a:spcAft>
+                <a:spcPts val="400"/>
+              </a:spcAft>
+            </a:pPr>
+            <a:r>
+              <a:rPr sz="1700" b="1">
+                <a:solidFill>
+                  <a:srgbClr val="C0392B"/>
+                </a:solidFill>
+                <a:latin typeface="Arial" panose="020B0604020202020204"/>
+              </a:rPr>
+              <a:t>LOM buys activity with the surface: the vacancy stays, and the metal follows the oxygen into solution.</a:t>
+            </a:r>
+            <a:endParaRPr sz="1700" b="1">
+              <a:solidFill>
+                <a:srgbClr val="C0392B"/>
+              </a:solidFill>
+              <a:latin typeface="Arial" panose="020B0604020202020204"/>
+            </a:endParaRPr>
+          </a:p>
+        </p:txBody>
+      </p:sp>
+      <p:sp>
+        <p:nvSpPr>
+          <p:cNvPr id="9" name="TextBox 8"/>
+          <p:cNvSpPr txBox="1"/>
+          <p:nvPr/>
+        </p:nvSpPr>
+        <p:spPr>
+          <a:xfrm>
+            <a:off x="640080" y="6419088"/>
+            <a:ext cx="10241280" cy="274320"/>
+          </a:xfrm>
+          <a:prstGeom prst="rect">
+            <a:avLst/>
+          </a:prstGeom>
+          <a:noFill/>
+        </p:spPr>
+        <p:txBody>
+          <a:bodyPr wrap="none">
+            <a:spAutoFit/>
+          </a:bodyPr>
+          <a:lstStyle/>
+          <a:p>
+            <a:r>
+              <a:rPr sz="1000" i="1">
+                <a:solidFill>
+                  <a:srgbClr val="5B6572"/>
+                </a:solidFill>
+                <a:latin typeface="Arial" panose="020B0604020202020204"/>
+              </a:rPr>
+              <a:t>Adv. Energy Mater. 2023, 13, 2301391, Fig. 1e (Mott–Hubbard picture) and §4; vacancy-to-dissolution link as reviewed there, §6.</a:t>
+            </a:r>
+            <a:endParaRPr sz="1000" i="1">
+              <a:solidFill>
+                <a:srgbClr val="5B6572"/>
+              </a:solidFill>
+              <a:latin typeface="Arial" panose="020B0604020202020204"/>
+            </a:endParaRPr>
+          </a:p>
+        </p:txBody>
+      </p:sp>
+      <p:sp>
+        <p:nvSpPr>
+          <p:cNvPr id="10" name="TextBox 9"/>
+          <p:cNvSpPr txBox="1"/>
+          <p:nvPr/>
+        </p:nvSpPr>
+        <p:spPr>
+          <a:xfrm>
+            <a:off x="11292840" y="6400800"/>
+            <a:ext cx="621792" cy="274320"/>
+          </a:xfrm>
+          <a:prstGeom prst="rect">
+            <a:avLst/>
+          </a:prstGeom>
+          <a:noFill/>
+        </p:spPr>
+        <p:txBody>
+          <a:bodyPr wrap="none">
+            <a:spAutoFit/>
+          </a:bodyPr>
+          <a:lstStyle/>
+          <a:p>
+            <a:pPr algn="r"/>
+            <a:r>
+              <a:rPr sz="1300">
+                <a:solidFill>
+                  <a:srgbClr val="1F2937"/>
+                </a:solidFill>
+                <a:latin typeface="Arial" panose="020B0604020202020204"/>
+              </a:rPr>
+              <a:t>5</a:t>
+            </a:r>
+            <a:endParaRPr sz="1300">
+              <a:solidFill>
+                <a:srgbClr val="1F2937"/>
+              </a:solidFill>
+              <a:latin typeface="Arial" panose="020B0604020202020204"/>
+            </a:endParaRPr>
+          </a:p>
+        </p:txBody>
+      </p:sp>
+    </p:spTree>
+  </p:cSld>
+  <p:clrMapOvr>
+    <a:masterClrMapping/>
+  </p:clrMapOvr>
+</p:sld>
+</file>
+
+<file path=ppt/slides/slide7.xml><?xml version="1.0" encoding="utf-8"?>
+<p:sld xmlns:a="http://schemas.openxmlformats.org/drawingml/2006/main" xmlns:r="http://schemas.openxmlformats.org/officeDocument/2006/relationships" xmlns:p="http://schemas.openxmlformats.org/presentationml/2006/main">
+  <p:cSld>
+    <p:spTree>
+      <p:nvGrpSpPr>
+        <p:cNvPr id="1" name=""/>
+        <p:cNvGrpSpPr/>
+        <p:nvPr/>
+      </p:nvGrpSpPr>
+      <p:grpSpPr/>
+      <p:sp>
+        <p:nvSpPr>
+          <p:cNvPr id="2" name="Rectangle 1"/>
           <p:cNvSpPr/>
           <p:nvPr/>
         </p:nvSpPr>
         <p:spPr>
           <a:xfrm>
-            <a:off x="7223760" y="2834640"/>
-            <a:ext cx="4325112" cy="1645920"/>
-          </a:xfrm>
-          <a:prstGeom prst="roundRect">
+            <a:off x="384048" y="274320"/>
+            <a:ext cx="68580" cy="512064"/>
+          </a:xfrm>
+          <a:prstGeom prst="rect">
             <a:avLst/>
           </a:prstGeom>
           <a:solidFill>
-            <a:srgbClr val="FFF7EC"/>
+            <a:srgbClr val="003D7C"/>
           </a:solidFill>
-          <a:ln w="12700">
-            <a:solidFill>
-              <a:srgbClr val="EF7C00"/>
-            </a:solidFill>
+          <a:ln>
+            <a:noFill/>
           </a:ln>
           <a:effectLst/>
         </p:spPr>
@@ -5603,48 +6041,23 @@
           </a:fontRef>
         </p:style>
         <p:txBody>
-          <a:bodyPr rtlCol="0" anchor="t" wrap="square" lIns="146304" rIns="146304" tIns="82296" bIns="82296"/>
+          <a:bodyPr rtlCol="0" anchor="ctr"/>
           <a:lstStyle/>
           <a:p>
             <a:pPr algn="ctr"/>
-            <a:r>
-              <a:rPr sz="1700" b="1">
-                <a:solidFill>
-                  <a:srgbClr val="003D7C"/>
-                </a:solidFill>
-                <a:latin typeface="Arial"/>
-              </a:rPr>
-              <a:t>Why it is capped</a:t>
-            </a:r>
-          </a:p>
-          <a:p>
-            <a:pPr>
-              <a:spcBef>
-                <a:spcPts val="400"/>
-              </a:spcBef>
-            </a:pPr>
-            <a:r>
-              <a:rPr sz="1400">
-                <a:solidFill>
-                  <a:srgbClr val="1F2937"/>
-                </a:solidFill>
-                <a:latin typeface="Arial"/>
-              </a:rPr>
-              <a:t>Because *OH and *OOH both bind through a single oxygen, their energies move together: the scaling gap is about 3.2 eV, so one step is always larger than 1.23 eV.</a:t>
-            </a:r>
-          </a:p>
-        </p:txBody>
-      </p:sp>
-      <p:sp>
-        <p:nvSpPr>
-          <p:cNvPr id="8" name="TextBox 7"/>
+          </a:p>
+        </p:txBody>
+      </p:sp>
+      <p:sp>
+        <p:nvSpPr>
+          <p:cNvPr id="3" name="TextBox 2"/>
           <p:cNvSpPr txBox="1"/>
           <p:nvPr/>
         </p:nvSpPr>
         <p:spPr>
           <a:xfrm>
-            <a:off x="640080" y="4864608"/>
-            <a:ext cx="10908792" cy="582930"/>
+            <a:off x="548640" y="201168"/>
+            <a:ext cx="10332720" cy="658368"/>
           </a:xfrm>
           <a:prstGeom prst="rect">
             <a:avLst/>
@@ -5657,145 +6070,93 @@
           </a:bodyPr>
           <a:lstStyle/>
           <a:p>
-            <a:pPr algn="l">
-              <a:spcAft>
-                <a:spcPts val="400"/>
-              </a:spcAft>
-            </a:pPr>
-            <a:r>
-              <a:rPr sz="1600" b="0">
+            <a:r>
+              <a:rPr sz="2700" b="1">
                 <a:solidFill>
                   <a:srgbClr val="1F2937"/>
                 </a:solidFill>
-                <a:latin typeface="Arial"/>
-              </a:rPr>
-              <a:t>Left: ideal versus real free-energy steps at U = 0 — no catalyst can make all four equal.</a:t>
-            </a:r>
-          </a:p>
-          <a:p>
-            <a:pPr algn="l">
-              <a:spcAft>
-                <a:spcPts val="400"/>
-              </a:spcAft>
-            </a:pPr>
-            <a:r>
-              <a:rPr sz="1700" b="1">
-                <a:solidFill>
-                  <a:srgbClr val="C0392B"/>
-                </a:solidFill>
-                <a:latin typeface="Arial"/>
-              </a:rPr>
-              <a:t>Result: an intrinsic floor of about 0.37 V. AEM can be improved, but never below that floor.</a:t>
-            </a:r>
-          </a:p>
-        </p:txBody>
-      </p:sp>
-      <p:sp>
-        <p:nvSpPr>
-          <p:cNvPr id="9" name="TextBox 8"/>
-          <p:cNvSpPr txBox="1"/>
-          <p:nvPr/>
-        </p:nvSpPr>
-        <p:spPr>
-          <a:xfrm>
-            <a:off x="640080" y="6419088"/>
-            <a:ext cx="10241280" cy="274320"/>
-          </a:xfrm>
-          <a:prstGeom prst="rect">
-            <a:avLst/>
-          </a:prstGeom>
-          <a:noFill/>
-        </p:spPr>
-        <p:txBody>
-          <a:bodyPr wrap="none">
-            <a:spAutoFit/>
-          </a:bodyPr>
-          <a:lstStyle/>
-          <a:p>
-            <a:r>
-              <a:rPr sz="1000" i="1">
-                <a:solidFill>
-                  <a:srgbClr val="5B6572"/>
-                </a:solidFill>
-                <a:latin typeface="Arial"/>
-              </a:rPr>
-              <a:t>Chem. Soc. Rev. 2020, 49, 2196, Fig. 2a (adapted)  ·  floor from Adv. Energy Mater. 2023, 13, 2301391, §3.2.</a:t>
-            </a:r>
-          </a:p>
-        </p:txBody>
-      </p:sp>
-      <p:sp>
-        <p:nvSpPr>
-          <p:cNvPr id="10" name="TextBox 9"/>
-          <p:cNvSpPr txBox="1"/>
-          <p:nvPr/>
-        </p:nvSpPr>
-        <p:spPr>
-          <a:xfrm>
-            <a:off x="11292840" y="6400800"/>
-            <a:ext cx="621792" cy="274320"/>
-          </a:xfrm>
-          <a:prstGeom prst="rect">
-            <a:avLst/>
-          </a:prstGeom>
-          <a:noFill/>
-        </p:spPr>
-        <p:txBody>
-          <a:bodyPr wrap="none">
-            <a:spAutoFit/>
-          </a:bodyPr>
-          <a:lstStyle/>
-          <a:p>
-            <a:pPr algn="r"/>
-            <a:r>
-              <a:rPr sz="1300">
-                <a:solidFill>
-                  <a:srgbClr val="1F2937"/>
-                </a:solidFill>
-                <a:latin typeface="Arial"/>
-              </a:rPr>
-              <a:t>4</a:t>
-            </a:r>
-          </a:p>
-        </p:txBody>
-      </p:sp>
-    </p:spTree>
-  </p:cSld>
-  <p:clrMapOvr>
-    <a:masterClrMapping/>
-  </p:clrMapOvr>
-</p:sld>
-</file>
-
-<file path=ppt/slides/slide6.xml><?xml version="1.0" encoding="utf-8"?>
-<p:sld xmlns:a="http://schemas.openxmlformats.org/drawingml/2006/main" xmlns:p="http://schemas.openxmlformats.org/presentationml/2006/main" xmlns:r="http://schemas.openxmlformats.org/officeDocument/2006/relationships">
-  <p:cSld>
-    <p:spTree>
-      <p:nvGrpSpPr>
-        <p:cNvPr id="1" name=""/>
-        <p:cNvGrpSpPr/>
-        <p:nvPr/>
-      </p:nvGrpSpPr>
-      <p:grpSpPr/>
-      <p:sp>
-        <p:nvSpPr>
-          <p:cNvPr id="2" name="Rectangle 1"/>
+                <a:latin typeface="Arial" panose="020B0604020202020204"/>
+              </a:rPr>
+              <a:t>Platform: acidic PEM, because that is where the durability problem is</a:t>
+            </a:r>
+            <a:endParaRPr sz="2700" b="1">
+              <a:solidFill>
+                <a:srgbClr val="1F2937"/>
+              </a:solidFill>
+              <a:latin typeface="Arial" panose="020B0604020202020204"/>
+            </a:endParaRPr>
+          </a:p>
+        </p:txBody>
+      </p:sp>
+      <p:pic>
+        <p:nvPicPr>
+          <p:cNvPr id="4" name="Picture 3" descr="logo_nus_black.png"/>
+          <p:cNvPicPr>
+            <a:picLocks noChangeAspect="1"/>
+          </p:cNvPicPr>
+          <p:nvPr/>
+        </p:nvPicPr>
+        <p:blipFill>
+          <a:blip r:embed="rId1"/>
+          <a:stretch>
+            <a:fillRect/>
+          </a:stretch>
+        </p:blipFill>
+        <p:spPr>
+          <a:xfrm>
+            <a:off x="11018520" y="237744"/>
+            <a:ext cx="822960" cy="545812"/>
+          </a:xfrm>
+          <a:prstGeom prst="rect">
+            <a:avLst/>
+          </a:prstGeom>
+        </p:spPr>
+      </p:pic>
+      <p:pic>
+        <p:nvPicPr>
+          <p:cNvPr id="5" name="Picture 4" descr="cand_pemrev_p2.png"/>
+          <p:cNvPicPr>
+            <a:picLocks noChangeAspect="1"/>
+          </p:cNvPicPr>
+          <p:nvPr/>
+        </p:nvPicPr>
+        <p:blipFill>
+          <a:blip r:embed="rId2"/>
+          <a:stretch>
+            <a:fillRect/>
+          </a:stretch>
+        </p:blipFill>
+        <p:spPr>
+          <a:xfrm>
+            <a:off x="707922" y="1371600"/>
+            <a:ext cx="5899354" cy="3657599"/>
+          </a:xfrm>
+          <a:prstGeom prst="rect">
+            <a:avLst/>
+          </a:prstGeom>
+        </p:spPr>
+      </p:pic>
+      <p:sp>
+        <p:nvSpPr>
+          <p:cNvPr id="6" name="Rounded Rectangle 5"/>
           <p:cNvSpPr/>
           <p:nvPr/>
         </p:nvSpPr>
         <p:spPr>
           <a:xfrm>
-            <a:off x="384048" y="274320"/>
-            <a:ext cx="68580" cy="512064"/>
-          </a:xfrm>
-          <a:prstGeom prst="rect">
+            <a:off x="6949440" y="1371600"/>
+            <a:ext cx="4599432" cy="1645920"/>
+          </a:xfrm>
+          <a:prstGeom prst="roundRect">
             <a:avLst/>
           </a:prstGeom>
           <a:solidFill>
-            <a:srgbClr val="003D7C"/>
+            <a:srgbClr val="EFF5FB"/>
           </a:solidFill>
-          <a:ln>
-            <a:noFill/>
+          <a:ln w="12700">
+            <a:solidFill>
+              <a:srgbClr val="CFE0F2"/>
+            </a:solidFill>
           </a:ln>
           <a:effectLst/>
         </p:spPr>
@@ -5814,115 +6175,70 @@
           </a:fontRef>
         </p:style>
         <p:txBody>
-          <a:bodyPr rtlCol="0" anchor="ctr"/>
+          <a:bodyPr wrap="square" lIns="146304" tIns="82296" rIns="146304" bIns="82296" rtlCol="0" anchor="t"/>
           <a:lstStyle/>
           <a:p>
             <a:pPr algn="ctr"/>
-          </a:p>
-        </p:txBody>
-      </p:sp>
-      <p:sp>
-        <p:nvSpPr>
-          <p:cNvPr id="3" name="TextBox 2"/>
-          <p:cNvSpPr txBox="1"/>
-          <p:nvPr/>
-        </p:nvSpPr>
-        <p:spPr>
-          <a:xfrm>
-            <a:off x="548640" y="201168"/>
-            <a:ext cx="10332720" cy="658368"/>
-          </a:xfrm>
-          <a:prstGeom prst="rect">
-            <a:avLst/>
-          </a:prstGeom>
-          <a:noFill/>
-        </p:spPr>
-        <p:txBody>
-          <a:bodyPr wrap="square">
-            <a:spAutoFit/>
-          </a:bodyPr>
-          <a:lstStyle/>
-          <a:p>
-            <a:r>
-              <a:rPr sz="2700" b="1">
+            <a:r>
+              <a:rPr sz="1800" b="1">
+                <a:solidFill>
+                  <a:srgbClr val="003D7C"/>
+                </a:solidFill>
+                <a:latin typeface="Arial" panose="020B0604020202020204"/>
+              </a:rPr>
+              <a:t>PEM matches renewable electricity</a:t>
+            </a:r>
+            <a:endParaRPr sz="1800" b="1">
+              <a:solidFill>
+                <a:srgbClr val="003D7C"/>
+              </a:solidFill>
+              <a:latin typeface="Arial" panose="020B0604020202020204"/>
+            </a:endParaRPr>
+          </a:p>
+          <a:p>
+            <a:pPr>
+              <a:spcBef>
+                <a:spcPts val="400"/>
+              </a:spcBef>
+            </a:pPr>
+            <a:r>
+              <a:rPr sz="1500">
                 <a:solidFill>
                   <a:srgbClr val="1F2937"/>
                 </a:solidFill>
-                <a:latin typeface="Arial"/>
-              </a:rPr>
-              <a:t>Mechanism II: LOM — faster, but the surface pays for it</a:t>
-            </a:r>
-          </a:p>
-        </p:txBody>
-      </p:sp>
-      <p:pic>
-        <p:nvPicPr>
-          <p:cNvPr id="4" name="Picture 3" descr="logo_nus_black.png"/>
-          <p:cNvPicPr>
-            <a:picLocks noChangeAspect="1"/>
-          </p:cNvPicPr>
-          <p:nvPr/>
-        </p:nvPicPr>
-        <p:blipFill>
-          <a:blip r:embed="rId2"/>
-          <a:stretch>
-            <a:fillRect/>
-          </a:stretch>
-        </p:blipFill>
-        <p:spPr>
-          <a:xfrm>
-            <a:off x="11018520" y="237744"/>
-            <a:ext cx="822960" cy="545812"/>
-          </a:xfrm>
-          <a:prstGeom prst="rect">
-            <a:avLst/>
-          </a:prstGeom>
-        </p:spPr>
-      </p:pic>
-      <p:pic>
-        <p:nvPicPr>
-          <p:cNvPr id="5" name="Picture 4" descr="fig_e_dos.png"/>
-          <p:cNvPicPr>
-            <a:picLocks noChangeAspect="1"/>
-          </p:cNvPicPr>
-          <p:nvPr/>
-        </p:nvPicPr>
-        <p:blipFill>
-          <a:blip r:embed="rId3"/>
-          <a:stretch>
-            <a:fillRect/>
-          </a:stretch>
-        </p:blipFill>
-        <p:spPr>
-          <a:xfrm>
-            <a:off x="640080" y="1188720"/>
-            <a:ext cx="6766559" cy="2284156"/>
-          </a:xfrm>
-          <a:prstGeom prst="rect">
-            <a:avLst/>
-          </a:prstGeom>
-        </p:spPr>
-      </p:pic>
-      <p:sp>
-        <p:nvSpPr>
-          <p:cNvPr id="6" name="Rounded Rectangle 5"/>
+                <a:latin typeface="Arial" panose="020B0604020202020204"/>
+              </a:rPr>
+              <a:t>High current density, fast response and high-purity hydrogen; the membrane is acidic, so the anode sees about 1 M proton activity (pH 0).</a:t>
+            </a:r>
+            <a:endParaRPr sz="1500">
+              <a:solidFill>
+                <a:srgbClr val="1F2937"/>
+              </a:solidFill>
+              <a:latin typeface="Arial" panose="020B0604020202020204"/>
+            </a:endParaRPr>
+          </a:p>
+        </p:txBody>
+      </p:sp>
+      <p:sp>
+        <p:nvSpPr>
+          <p:cNvPr id="7" name="Rounded Rectangle 6"/>
           <p:cNvSpPr/>
           <p:nvPr/>
         </p:nvSpPr>
         <p:spPr>
           <a:xfrm>
-            <a:off x="7680960" y="1188720"/>
-            <a:ext cx="3867912" cy="1417320"/>
+            <a:off x="6949440" y="3200400"/>
+            <a:ext cx="4599432" cy="1783080"/>
           </a:xfrm>
           <a:prstGeom prst="roundRect">
             <a:avLst/>
           </a:prstGeom>
           <a:solidFill>
-            <a:srgbClr val="E8F5EE"/>
+            <a:srgbClr val="FFF7EC"/>
           </a:solidFill>
           <a:ln w="12700">
             <a:solidFill>
-              <a:srgbClr val="9AD3B8"/>
+              <a:srgbClr val="EF7C00"/>
             </a:solidFill>
           </a:ln>
           <a:effectLst/>
@@ -5942,19 +6258,25 @@
           </a:fontRef>
         </p:style>
         <p:txBody>
-          <a:bodyPr rtlCol="0" anchor="t" wrap="square" lIns="146304" rIns="146304" tIns="82296" bIns="82296"/>
+          <a:bodyPr wrap="square" lIns="146304" tIns="82296" rIns="146304" bIns="82296" rtlCol="0" anchor="t"/>
           <a:lstStyle/>
           <a:p>
             <a:pPr algn="ctr"/>
             <a:r>
-              <a:rPr sz="1700" b="1">
+              <a:rPr sz="1800" b="1">
                 <a:solidFill>
                   <a:srgbClr val="003D7C"/>
                 </a:solidFill>
-                <a:latin typeface="Arial"/>
-              </a:rPr>
-              <a:t>When it switches on</a:t>
-            </a:r>
+                <a:latin typeface="Arial" panose="020B0604020202020204"/>
+              </a:rPr>
+              <a:t>Only Ir and Ru oxides survive there</a:t>
+            </a:r>
+            <a:endParaRPr sz="1800" b="1">
+              <a:solidFill>
+                <a:srgbClr val="003D7C"/>
+              </a:solidFill>
+              <a:latin typeface="Arial" panose="020B0604020202020204"/>
+            </a:endParaRPr>
           </a:p>
           <a:p>
             <a:pPr>
@@ -5963,38 +6285,186 @@
               </a:spcBef>
             </a:pPr>
             <a:r>
-              <a:rPr sz="1400">
+              <a:rPr sz="1500">
                 <a:solidFill>
                   <a:srgbClr val="1F2937"/>
                 </a:solidFill>
-                <a:latin typeface="Arial"/>
-              </a:rPr>
-              <a:t>Once the oxygen 2p states rise above the metal–oxygen band, lattice oxygen is oxidised and leaves as O₂.</a:t>
-            </a:r>
-          </a:p>
-        </p:txBody>
-      </p:sp>
-      <p:sp>
-        <p:nvSpPr>
-          <p:cNvPr id="7" name="Rounded Rectangle 6"/>
+                <a:latin typeface="Arial" panose="020B0604020202020204"/>
+              </a:rPr>
+              <a:t>Alkaline systems can use Ni, Co or Fe oxides. In acid the choice collapses to iridium and ruthenium, and iridium is the scarcest option.</a:t>
+            </a:r>
+            <a:endParaRPr sz="1500">
+              <a:solidFill>
+                <a:srgbClr val="1F2937"/>
+              </a:solidFill>
+              <a:latin typeface="Arial" panose="020B0604020202020204"/>
+            </a:endParaRPr>
+          </a:p>
+        </p:txBody>
+      </p:sp>
+      <p:sp>
+        <p:nvSpPr>
+          <p:cNvPr id="8" name="TextBox 7"/>
+          <p:cNvSpPr txBox="1"/>
+          <p:nvPr/>
+        </p:nvSpPr>
+        <p:spPr>
+          <a:xfrm>
+            <a:off x="640080" y="5257800"/>
+            <a:ext cx="10908792" cy="326898"/>
+          </a:xfrm>
+          <a:prstGeom prst="rect">
+            <a:avLst/>
+          </a:prstGeom>
+          <a:noFill/>
+        </p:spPr>
+        <p:txBody>
+          <a:bodyPr wrap="square">
+            <a:spAutoFit/>
+          </a:bodyPr>
+          <a:lstStyle/>
+          <a:p>
+            <a:pPr algn="l">
+              <a:spcAft>
+                <a:spcPts val="400"/>
+              </a:spcAft>
+            </a:pPr>
+            <a:r>
+              <a:rPr sz="1700" b="1">
+                <a:solidFill>
+                  <a:srgbClr val="C0392B"/>
+                </a:solidFill>
+                <a:latin typeface="Arial" panose="020B0604020202020204"/>
+              </a:rPr>
+              <a:t>The anode environment decides which elements are allowed, so the project is defined by durability at low noble-metal loading rather than by activity.</a:t>
+            </a:r>
+            <a:endParaRPr sz="1700" b="1">
+              <a:solidFill>
+                <a:srgbClr val="C0392B"/>
+              </a:solidFill>
+              <a:latin typeface="Arial" panose="020B0604020202020204"/>
+            </a:endParaRPr>
+          </a:p>
+        </p:txBody>
+      </p:sp>
+      <p:sp>
+        <p:nvSpPr>
+          <p:cNvPr id="9" name="TextBox 8"/>
+          <p:cNvSpPr txBox="1"/>
+          <p:nvPr/>
+        </p:nvSpPr>
+        <p:spPr>
+          <a:xfrm>
+            <a:off x="640080" y="6419088"/>
+            <a:ext cx="10241280" cy="274320"/>
+          </a:xfrm>
+          <a:prstGeom prst="rect">
+            <a:avLst/>
+          </a:prstGeom>
+          <a:noFill/>
+        </p:spPr>
+        <p:txBody>
+          <a:bodyPr wrap="none">
+            <a:spAutoFit/>
+          </a:bodyPr>
+          <a:lstStyle/>
+          <a:p>
+            <a:r>
+              <a:rPr sz="1000" i="1">
+                <a:solidFill>
+                  <a:srgbClr val="5B6572"/>
+                </a:solidFill>
+                <a:latin typeface="Arial" panose="020B0604020202020204"/>
+              </a:rPr>
+              <a:t>Panel: PEM electrolysis system review (cell schematic)  ·  Chem. Soc. Rev. 2020, 49, 2196, §4.4.</a:t>
+            </a:r>
+            <a:endParaRPr sz="1000" i="1">
+              <a:solidFill>
+                <a:srgbClr val="5B6572"/>
+              </a:solidFill>
+              <a:latin typeface="Arial" panose="020B0604020202020204"/>
+            </a:endParaRPr>
+          </a:p>
+        </p:txBody>
+      </p:sp>
+      <p:sp>
+        <p:nvSpPr>
+          <p:cNvPr id="10" name="TextBox 9"/>
+          <p:cNvSpPr txBox="1"/>
+          <p:nvPr/>
+        </p:nvSpPr>
+        <p:spPr>
+          <a:xfrm>
+            <a:off x="11292840" y="6400800"/>
+            <a:ext cx="621792" cy="274320"/>
+          </a:xfrm>
+          <a:prstGeom prst="rect">
+            <a:avLst/>
+          </a:prstGeom>
+          <a:noFill/>
+        </p:spPr>
+        <p:txBody>
+          <a:bodyPr wrap="none">
+            <a:spAutoFit/>
+          </a:bodyPr>
+          <a:lstStyle/>
+          <a:p>
+            <a:pPr algn="r"/>
+            <a:r>
+              <a:rPr sz="1300">
+                <a:solidFill>
+                  <a:srgbClr val="1F2937"/>
+                </a:solidFill>
+                <a:latin typeface="Arial" panose="020B0604020202020204"/>
+              </a:rPr>
+              <a:t>6</a:t>
+            </a:r>
+            <a:endParaRPr sz="1300">
+              <a:solidFill>
+                <a:srgbClr val="1F2937"/>
+              </a:solidFill>
+              <a:latin typeface="Arial" panose="020B0604020202020204"/>
+            </a:endParaRPr>
+          </a:p>
+        </p:txBody>
+      </p:sp>
+    </p:spTree>
+  </p:cSld>
+  <p:clrMapOvr>
+    <a:masterClrMapping/>
+  </p:clrMapOvr>
+</p:sld>
+</file>
+
+<file path=ppt/slides/slide8.xml><?xml version="1.0" encoding="utf-8"?>
+<p:sld xmlns:a="http://schemas.openxmlformats.org/drawingml/2006/main" xmlns:r="http://schemas.openxmlformats.org/officeDocument/2006/relationships" xmlns:p="http://schemas.openxmlformats.org/presentationml/2006/main">
+  <p:cSld>
+    <p:spTree>
+      <p:nvGrpSpPr>
+        <p:cNvPr id="1" name=""/>
+        <p:cNvGrpSpPr/>
+        <p:nvPr/>
+      </p:nvGrpSpPr>
+      <p:grpSpPr/>
+      <p:sp>
+        <p:nvSpPr>
+          <p:cNvPr id="2" name="Rectangle 1"/>
           <p:cNvSpPr/>
           <p:nvPr/>
         </p:nvSpPr>
         <p:spPr>
           <a:xfrm>
-            <a:off x="7680960" y="2743200"/>
-            <a:ext cx="3867912" cy="1737360"/>
-          </a:xfrm>
-          <a:prstGeom prst="roundRect">
+            <a:off x="384048" y="274320"/>
+            <a:ext cx="68580" cy="512064"/>
+          </a:xfrm>
+          <a:prstGeom prst="rect">
             <a:avLst/>
           </a:prstGeom>
           <a:solidFill>
-            <a:srgbClr val="FDF2F2"/>
+            <a:srgbClr val="003D7C"/>
           </a:solidFill>
-          <a:ln w="12700">
-            <a:solidFill>
-              <a:srgbClr val="E8A0A0"/>
-            </a:solidFill>
+          <a:ln>
+            <a:noFill/>
           </a:ln>
           <a:effectLst/>
         </p:spPr>
@@ -6013,48 +6483,23 @@
           </a:fontRef>
         </p:style>
         <p:txBody>
-          <a:bodyPr rtlCol="0" anchor="t" wrap="square" lIns="146304" rIns="146304" tIns="82296" bIns="82296"/>
+          <a:bodyPr rtlCol="0" anchor="ctr"/>
           <a:lstStyle/>
           <a:p>
             <a:pPr algn="ctr"/>
-            <a:r>
-              <a:rPr sz="1700" b="1">
-                <a:solidFill>
-                  <a:srgbClr val="003D7C"/>
-                </a:solidFill>
-                <a:latin typeface="Arial"/>
-              </a:rPr>
-              <a:t>What is left behind</a:t>
-            </a:r>
-          </a:p>
-          <a:p>
-            <a:pPr>
-              <a:spcBef>
-                <a:spcPts val="400"/>
-              </a:spcBef>
-            </a:pPr>
-            <a:r>
-              <a:rPr sz="1400">
-                <a:solidFill>
-                  <a:srgbClr val="1F2937"/>
-                </a:solidFill>
-                <a:latin typeface="Arial"/>
-              </a:rPr>
-              <a:t>An oxygen vacancy — and the metal is released together with the oxygen. This is the dissolution channel we must avoid in acid.</a:t>
-            </a:r>
-          </a:p>
-        </p:txBody>
-      </p:sp>
-      <p:sp>
-        <p:nvSpPr>
-          <p:cNvPr id="8" name="TextBox 7"/>
+          </a:p>
+        </p:txBody>
+      </p:sp>
+      <p:sp>
+        <p:nvSpPr>
+          <p:cNvPr id="3" name="TextBox 2"/>
           <p:cNvSpPr txBox="1"/>
           <p:nvPr/>
         </p:nvSpPr>
         <p:spPr>
           <a:xfrm>
-            <a:off x="640080" y="4864608"/>
-            <a:ext cx="10908792" cy="582930"/>
+            <a:off x="548640" y="201168"/>
+            <a:ext cx="10332720" cy="658368"/>
           </a:xfrm>
           <a:prstGeom prst="rect">
             <a:avLst/>
@@ -6067,145 +6512,93 @@
           </a:bodyPr>
           <a:lstStyle/>
           <a:p>
-            <a:pPr algn="l">
-              <a:spcAft>
-                <a:spcPts val="400"/>
-              </a:spcAft>
-            </a:pPr>
-            <a:r>
-              <a:rPr sz="1600" b="0">
+            <a:r>
+              <a:rPr sz="2700" b="1">
                 <a:solidFill>
                   <a:srgbClr val="1F2937"/>
                 </a:solidFill>
-                <a:latin typeface="Arial"/>
-              </a:rPr>
-              <a:t>Left: Mott–Hubbard picture — the O 2p band is pushed towards the Fermi level, so lattice oxygen becomes redox-active.</a:t>
-            </a:r>
-          </a:p>
-          <a:p>
-            <a:pPr algn="l">
-              <a:spcAft>
-                <a:spcPts val="400"/>
-              </a:spcAft>
-            </a:pPr>
-            <a:r>
-              <a:rPr sz="1700" b="1">
-                <a:solidFill>
-                  <a:srgbClr val="C0392B"/>
-                </a:solidFill>
-                <a:latin typeface="Arial"/>
-              </a:rPr>
-              <a:t>LOM buys activity with the surface: the vacancy stays, and the metal follows the oxygen into solution.</a:t>
-            </a:r>
-          </a:p>
-        </p:txBody>
-      </p:sp>
-      <p:sp>
-        <p:nvSpPr>
-          <p:cNvPr id="9" name="TextBox 8"/>
-          <p:cNvSpPr txBox="1"/>
-          <p:nvPr/>
-        </p:nvSpPr>
-        <p:spPr>
-          <a:xfrm>
-            <a:off x="640080" y="6419088"/>
-            <a:ext cx="10241280" cy="274320"/>
-          </a:xfrm>
-          <a:prstGeom prst="rect">
-            <a:avLst/>
-          </a:prstGeom>
-          <a:noFill/>
-        </p:spPr>
-        <p:txBody>
-          <a:bodyPr wrap="none">
-            <a:spAutoFit/>
-          </a:bodyPr>
-          <a:lstStyle/>
-          <a:p>
-            <a:r>
-              <a:rPr sz="1000" i="1">
-                <a:solidFill>
-                  <a:srgbClr val="5B6572"/>
-                </a:solidFill>
-                <a:latin typeface="Arial"/>
-              </a:rPr>
-              <a:t>Adv. Energy Mater. 2023, 13, 2301391, Fig. 1e (Mott–Hubbard picture) and §4; vacancy-to-dissolution link as reviewed there, §6.</a:t>
-            </a:r>
-          </a:p>
-        </p:txBody>
-      </p:sp>
-      <p:sp>
-        <p:nvSpPr>
-          <p:cNvPr id="10" name="TextBox 9"/>
-          <p:cNvSpPr txBox="1"/>
-          <p:nvPr/>
-        </p:nvSpPr>
-        <p:spPr>
-          <a:xfrm>
-            <a:off x="11292840" y="6400800"/>
-            <a:ext cx="621792" cy="274320"/>
-          </a:xfrm>
-          <a:prstGeom prst="rect">
-            <a:avLst/>
-          </a:prstGeom>
-          <a:noFill/>
-        </p:spPr>
-        <p:txBody>
-          <a:bodyPr wrap="none">
-            <a:spAutoFit/>
-          </a:bodyPr>
-          <a:lstStyle/>
-          <a:p>
-            <a:pPr algn="r"/>
-            <a:r>
-              <a:rPr sz="1300">
-                <a:solidFill>
-                  <a:srgbClr val="1F2937"/>
-                </a:solidFill>
-                <a:latin typeface="Arial"/>
-              </a:rPr>
-              <a:t>5</a:t>
-            </a:r>
-          </a:p>
-        </p:txBody>
-      </p:sp>
-    </p:spTree>
-  </p:cSld>
-  <p:clrMapOvr>
-    <a:masterClrMapping/>
-  </p:clrMapOvr>
-</p:sld>
-</file>
-
-<file path=ppt/slides/slide7.xml><?xml version="1.0" encoding="utf-8"?>
-<p:sld xmlns:a="http://schemas.openxmlformats.org/drawingml/2006/main" xmlns:p="http://schemas.openxmlformats.org/presentationml/2006/main" xmlns:r="http://schemas.openxmlformats.org/officeDocument/2006/relationships">
-  <p:cSld>
-    <p:spTree>
-      <p:nvGrpSpPr>
-        <p:cNvPr id="1" name=""/>
-        <p:cNvGrpSpPr/>
-        <p:nvPr/>
-      </p:nvGrpSpPr>
-      <p:grpSpPr/>
-      <p:sp>
-        <p:nvSpPr>
-          <p:cNvPr id="2" name="Rectangle 1"/>
+                <a:latin typeface="Arial" panose="020B0604020202020204"/>
+              </a:rPr>
+              <a:t>Element: ruthenium is cheap and active — but it dissolves</a:t>
+            </a:r>
+            <a:endParaRPr sz="2700" b="1">
+              <a:solidFill>
+                <a:srgbClr val="1F2937"/>
+              </a:solidFill>
+              <a:latin typeface="Arial" panose="020B0604020202020204"/>
+            </a:endParaRPr>
+          </a:p>
+        </p:txBody>
+      </p:sp>
+      <p:pic>
+        <p:nvPicPr>
+          <p:cNvPr id="4" name="Picture 3" descr="logo_nus_black.png"/>
+          <p:cNvPicPr>
+            <a:picLocks noChangeAspect="1"/>
+          </p:cNvPicPr>
+          <p:nvPr/>
+        </p:nvPicPr>
+        <p:blipFill>
+          <a:blip r:embed="rId1"/>
+          <a:stretch>
+            <a:fillRect/>
+          </a:stretch>
+        </p:blipFill>
+        <p:spPr>
+          <a:xfrm>
+            <a:off x="11018520" y="237744"/>
+            <a:ext cx="822960" cy="545812"/>
+          </a:xfrm>
+          <a:prstGeom prst="rect">
+            <a:avLst/>
+          </a:prstGeom>
+        </p:spPr>
+      </p:pic>
+      <p:pic>
+        <p:nvPicPr>
+          <p:cNvPr id="5" name="Picture 4" descr="fig3_g.png"/>
+          <p:cNvPicPr>
+            <a:picLocks noChangeAspect="1"/>
+          </p:cNvPicPr>
+          <p:nvPr/>
+        </p:nvPicPr>
+        <p:blipFill>
+          <a:blip r:embed="rId2"/>
+          <a:stretch>
+            <a:fillRect/>
+          </a:stretch>
+        </p:blipFill>
+        <p:spPr>
+          <a:xfrm>
+            <a:off x="1039845" y="1325880"/>
+            <a:ext cx="3498149" cy="3703319"/>
+          </a:xfrm>
+          <a:prstGeom prst="rect">
+            <a:avLst/>
+          </a:prstGeom>
+        </p:spPr>
+      </p:pic>
+      <p:sp>
+        <p:nvSpPr>
+          <p:cNvPr id="6" name="Rounded Rectangle 5"/>
           <p:cNvSpPr/>
           <p:nvPr/>
         </p:nvSpPr>
         <p:spPr>
           <a:xfrm>
-            <a:off x="384048" y="274320"/>
-            <a:ext cx="68580" cy="512064"/>
-          </a:xfrm>
-          <a:prstGeom prst="rect">
+            <a:off x="5257800" y="1325880"/>
+            <a:ext cx="6291072" cy="1280160"/>
+          </a:xfrm>
+          <a:prstGeom prst="roundRect">
             <a:avLst/>
           </a:prstGeom>
           <a:solidFill>
-            <a:srgbClr val="003D7C"/>
+            <a:srgbClr val="EFF5FB"/>
           </a:solidFill>
-          <a:ln>
-            <a:noFill/>
+          <a:ln w="12700">
+            <a:solidFill>
+              <a:srgbClr val="CFE0F2"/>
+            </a:solidFill>
           </a:ln>
           <a:effectLst/>
         </p:spPr>
@@ -6224,115 +6617,70 @@
           </a:fontRef>
         </p:style>
         <p:txBody>
-          <a:bodyPr rtlCol="0" anchor="ctr"/>
+          <a:bodyPr wrap="square" lIns="146304" tIns="82296" rIns="146304" bIns="82296" rtlCol="0" anchor="t"/>
           <a:lstStyle/>
           <a:p>
             <a:pPr algn="ctr"/>
-          </a:p>
-        </p:txBody>
-      </p:sp>
-      <p:sp>
-        <p:nvSpPr>
-          <p:cNvPr id="3" name="TextBox 2"/>
-          <p:cNvSpPr txBox="1"/>
-          <p:nvPr/>
-        </p:nvSpPr>
-        <p:spPr>
-          <a:xfrm>
-            <a:off x="548640" y="201168"/>
-            <a:ext cx="10332720" cy="658368"/>
-          </a:xfrm>
-          <a:prstGeom prst="rect">
-            <a:avLst/>
-          </a:prstGeom>
-          <a:noFill/>
-        </p:spPr>
-        <p:txBody>
-          <a:bodyPr wrap="square">
-            <a:spAutoFit/>
-          </a:bodyPr>
-          <a:lstStyle/>
-          <a:p>
-            <a:r>
-              <a:rPr sz="2700" b="1">
+            <a:r>
+              <a:rPr sz="1800" b="1">
+                <a:solidFill>
+                  <a:srgbClr val="003D7C"/>
+                </a:solidFill>
+                <a:latin typeface="Arial" panose="020B0604020202020204"/>
+              </a:rPr>
+              <a:t>Why Ru and not Ir</a:t>
+            </a:r>
+            <a:endParaRPr sz="1800" b="1">
+              <a:solidFill>
+                <a:srgbClr val="003D7C"/>
+              </a:solidFill>
+              <a:latin typeface="Arial" panose="020B0604020202020204"/>
+            </a:endParaRPr>
+          </a:p>
+          <a:p>
+            <a:pPr>
+              <a:spcBef>
+                <a:spcPts val="400"/>
+              </a:spcBef>
+            </a:pPr>
+            <a:r>
+              <a:rPr sz="1500">
                 <a:solidFill>
                   <a:srgbClr val="1F2937"/>
                 </a:solidFill>
-                <a:latin typeface="Arial"/>
-              </a:rPr>
-              <a:t>Platform: acidic PEM, because that is where the durability problem is</a:t>
-            </a:r>
-          </a:p>
-        </p:txBody>
-      </p:sp>
-      <p:pic>
-        <p:nvPicPr>
-          <p:cNvPr id="4" name="Picture 3" descr="logo_nus_black.png"/>
-          <p:cNvPicPr>
-            <a:picLocks noChangeAspect="1"/>
-          </p:cNvPicPr>
-          <p:nvPr/>
-        </p:nvPicPr>
-        <p:blipFill>
-          <a:blip r:embed="rId2"/>
-          <a:stretch>
-            <a:fillRect/>
-          </a:stretch>
-        </p:blipFill>
-        <p:spPr>
-          <a:xfrm>
-            <a:off x="11018520" y="237744"/>
-            <a:ext cx="822960" cy="545812"/>
-          </a:xfrm>
-          <a:prstGeom prst="rect">
-            <a:avLst/>
-          </a:prstGeom>
-        </p:spPr>
-      </p:pic>
-      <p:pic>
-        <p:nvPicPr>
-          <p:cNvPr id="5" name="Picture 4" descr="cand_pemrev_p2.png"/>
-          <p:cNvPicPr>
-            <a:picLocks noChangeAspect="1"/>
-          </p:cNvPicPr>
-          <p:nvPr/>
-        </p:nvPicPr>
-        <p:blipFill>
-          <a:blip r:embed="rId3"/>
-          <a:stretch>
-            <a:fillRect/>
-          </a:stretch>
-        </p:blipFill>
-        <p:spPr>
-          <a:xfrm>
-            <a:off x="707922" y="1371600"/>
-            <a:ext cx="5899354" cy="3657599"/>
-          </a:xfrm>
-          <a:prstGeom prst="rect">
-            <a:avLst/>
-          </a:prstGeom>
-        </p:spPr>
-      </p:pic>
-      <p:sp>
-        <p:nvSpPr>
-          <p:cNvPr id="6" name="Rounded Rectangle 5"/>
+                <a:latin typeface="Arial" panose="020B0604020202020204"/>
+              </a:rPr>
+              <a:t>RuO₂ is more active than IrO₂ for OER, and ruthenium is far cheaper and more abundant; iridium supply is the ceiling for PEM deployment.</a:t>
+            </a:r>
+            <a:endParaRPr sz="1500">
+              <a:solidFill>
+                <a:srgbClr val="1F2937"/>
+              </a:solidFill>
+              <a:latin typeface="Arial" panose="020B0604020202020204"/>
+            </a:endParaRPr>
+          </a:p>
+        </p:txBody>
+      </p:sp>
+      <p:sp>
+        <p:nvSpPr>
+          <p:cNvPr id="7" name="Rounded Rectangle 6"/>
           <p:cNvSpPr/>
           <p:nvPr/>
         </p:nvSpPr>
         <p:spPr>
           <a:xfrm>
-            <a:off x="6949440" y="1371600"/>
-            <a:ext cx="4599432" cy="1645920"/>
+            <a:off x="5257800" y="2743200"/>
+            <a:ext cx="6291072" cy="1051560"/>
           </a:xfrm>
           <a:prstGeom prst="roundRect">
             <a:avLst/>
           </a:prstGeom>
           <a:solidFill>
-            <a:srgbClr val="EFF5FB"/>
+            <a:srgbClr val="FDF2F2"/>
           </a:solidFill>
           <a:ln w="12700">
             <a:solidFill>
-              <a:srgbClr val="CFE0F2"/>
+              <a:srgbClr val="E8A0A0"/>
             </a:solidFill>
           </a:ln>
           <a:effectLst/>
@@ -6352,7 +6700,7 @@
           </a:fontRef>
         </p:style>
         <p:txBody>
-          <a:bodyPr rtlCol="0" anchor="t" wrap="square" lIns="146304" rIns="146304" tIns="82296" bIns="82296"/>
+          <a:bodyPr wrap="square" lIns="146304" tIns="82296" rIns="146304" bIns="82296" rtlCol="0" anchor="t"/>
           <a:lstStyle/>
           <a:p>
             <a:pPr algn="ctr"/>
@@ -6361,10 +6709,16 @@
                 <a:solidFill>
                   <a:srgbClr val="003D7C"/>
                 </a:solidFill>
-                <a:latin typeface="Arial"/>
-              </a:rPr>
-              <a:t>PEM matches renewable electricity</a:t>
-            </a:r>
+                <a:latin typeface="Arial" panose="020B0604020202020204"/>
+              </a:rPr>
+              <a:t>Failure channel 1 — over-oxidation</a:t>
+            </a:r>
+            <a:endParaRPr sz="1800" b="1">
+              <a:solidFill>
+                <a:srgbClr val="003D7C"/>
+              </a:solidFill>
+              <a:latin typeface="Arial" panose="020B0604020202020204"/>
+            </a:endParaRPr>
           </a:p>
           <a:p>
             <a:pPr>
@@ -6377,33 +6731,39 @@
                 <a:solidFill>
                   <a:srgbClr val="1F2937"/>
                 </a:solidFill>
-                <a:latin typeface="Arial"/>
-              </a:rPr>
-              <a:t>High current density, fast response and high-purity hydrogen; the membrane is acidic, so the anode sees about 1 M proton activity (pH 0).</a:t>
-            </a:r>
-          </a:p>
-        </p:txBody>
-      </p:sp>
-      <p:sp>
-        <p:nvSpPr>
-          <p:cNvPr id="7" name="Rounded Rectangle 6"/>
+                <a:latin typeface="Arial" panose="020B0604020202020204"/>
+              </a:rPr>
+              <a:t>Ruthenium is oxidised beyond +4 to soluble RuO₄ and leaves the electrode.</a:t>
+            </a:r>
+            <a:endParaRPr sz="1500">
+              <a:solidFill>
+                <a:srgbClr val="1F2937"/>
+              </a:solidFill>
+              <a:latin typeface="Arial" panose="020B0604020202020204"/>
+            </a:endParaRPr>
+          </a:p>
+        </p:txBody>
+      </p:sp>
+      <p:sp>
+        <p:nvSpPr>
+          <p:cNvPr id="8" name="Rounded Rectangle 7"/>
           <p:cNvSpPr/>
           <p:nvPr/>
         </p:nvSpPr>
         <p:spPr>
           <a:xfrm>
-            <a:off x="6949440" y="3200400"/>
-            <a:ext cx="4599432" cy="1783080"/>
+            <a:off x="5257800" y="3931920"/>
+            <a:ext cx="6291072" cy="1051560"/>
           </a:xfrm>
           <a:prstGeom prst="roundRect">
             <a:avLst/>
           </a:prstGeom>
           <a:solidFill>
-            <a:srgbClr val="FFF7EC"/>
+            <a:srgbClr val="FDF2F2"/>
           </a:solidFill>
           <a:ln w="12700">
             <a:solidFill>
-              <a:srgbClr val="EF7C00"/>
+              <a:srgbClr val="E8A0A0"/>
             </a:solidFill>
           </a:ln>
           <a:effectLst/>
@@ -6423,7 +6783,7 @@
           </a:fontRef>
         </p:style>
         <p:txBody>
-          <a:bodyPr rtlCol="0" anchor="t" wrap="square" lIns="146304" rIns="146304" tIns="82296" bIns="82296"/>
+          <a:bodyPr wrap="square" lIns="146304" tIns="82296" rIns="146304" bIns="82296" rtlCol="0" anchor="t"/>
           <a:lstStyle/>
           <a:p>
             <a:pPr algn="ctr"/>
@@ -6432,10 +6792,16 @@
                 <a:solidFill>
                   <a:srgbClr val="003D7C"/>
                 </a:solidFill>
-                <a:latin typeface="Arial"/>
-              </a:rPr>
-              <a:t>Only Ir and Ru oxides survive there</a:t>
-            </a:r>
+                <a:latin typeface="Arial" panose="020B0604020202020204"/>
+              </a:rPr>
+              <a:t>Failure channel 2 — lattice oxygen</a:t>
+            </a:r>
+            <a:endParaRPr sz="1800" b="1">
+              <a:solidFill>
+                <a:srgbClr val="003D7C"/>
+              </a:solidFill>
+              <a:latin typeface="Arial" panose="020B0604020202020204"/>
+            </a:endParaRPr>
           </a:p>
           <a:p>
             <a:pPr>
@@ -6448,22 +6814,28 @@
                 <a:solidFill>
                   <a:srgbClr val="1F2937"/>
                 </a:solidFill>
-                <a:latin typeface="Arial"/>
-              </a:rPr>
-              <a:t>Alkaline systems can use Ni, Co or Fe oxides. In acid the choice collapses to iridium and ruthenium, and iridium is the scarcest option.</a:t>
-            </a:r>
-          </a:p>
-        </p:txBody>
-      </p:sp>
-      <p:sp>
-        <p:nvSpPr>
-          <p:cNvPr id="8" name="TextBox 7"/>
+                <a:latin typeface="Arial" panose="020B0604020202020204"/>
+              </a:rPr>
+              <a:t>Lattice oxygen participates, a vacancy is left behind, and the metal follows the oxygen out.</a:t>
+            </a:r>
+            <a:endParaRPr sz="1500">
+              <a:solidFill>
+                <a:srgbClr val="1F2937"/>
+              </a:solidFill>
+              <a:latin typeface="Arial" panose="020B0604020202020204"/>
+            </a:endParaRPr>
+          </a:p>
+        </p:txBody>
+      </p:sp>
+      <p:sp>
+        <p:nvSpPr>
+          <p:cNvPr id="9" name="TextBox 8"/>
           <p:cNvSpPr txBox="1"/>
           <p:nvPr/>
         </p:nvSpPr>
         <p:spPr>
           <a:xfrm>
-            <a:off x="640080" y="5257800"/>
+            <a:off x="640080" y="5303520"/>
             <a:ext cx="10908792" cy="326898"/>
           </a:xfrm>
           <a:prstGeom prst="rect">
@@ -6487,16 +6859,22 @@
                 <a:solidFill>
                   <a:srgbClr val="C0392B"/>
                 </a:solidFill>
-                <a:latin typeface="Arial"/>
-              </a:rPr>
-              <a:t>The anode environment decides which elements are allowed, so the project is defined by durability at low noble-metal loading rather than by activity.</a:t>
-            </a:r>
-          </a:p>
-        </p:txBody>
-      </p:sp>
-      <p:sp>
-        <p:nvSpPr>
-          <p:cNvPr id="9" name="TextBox 8"/>
+                <a:latin typeface="Arial" panose="020B0604020202020204"/>
+              </a:rPr>
+              <a:t>Both descriptions refer to the same surface: the metal redox and the oxygen redox must be controlled together. The proof of stabilisation has to be a dissolution measurement.</a:t>
+            </a:r>
+            <a:endParaRPr sz="1700" b="1">
+              <a:solidFill>
+                <a:srgbClr val="C0392B"/>
+              </a:solidFill>
+              <a:latin typeface="Arial" panose="020B0604020202020204"/>
+            </a:endParaRPr>
+          </a:p>
+        </p:txBody>
+      </p:sp>
+      <p:sp>
+        <p:nvSpPr>
+          <p:cNvPr id="10" name="TextBox 9"/>
           <p:cNvSpPr txBox="1"/>
           <p:nvPr/>
         </p:nvSpPr>
@@ -6521,16 +6899,22 @@
                 <a:solidFill>
                   <a:srgbClr val="5B6572"/>
                 </a:solidFill>
-                <a:latin typeface="Arial"/>
-              </a:rPr>
-              <a:t>Panel: PEM electrolysis system review (cell schematic)  ·  Chem. Soc. Rev. 2020, 49, 2196, §4.4.</a:t>
-            </a:r>
-          </a:p>
-        </p:txBody>
-      </p:sp>
-      <p:sp>
-        <p:nvSpPr>
-          <p:cNvPr id="10" name="TextBox 9"/>
+                <a:latin typeface="Arial" panose="020B0604020202020204"/>
+              </a:rPr>
+              <a:t>Adv. Energy Mater. 2023, 13, 2301391, Fig. 1g and §6  ·  Re-doped RuO₂: Nat. Commun. 2023, 14, 354.</a:t>
+            </a:r>
+            <a:endParaRPr sz="1000" i="1">
+              <a:solidFill>
+                <a:srgbClr val="5B6572"/>
+              </a:solidFill>
+              <a:latin typeface="Arial" panose="020B0604020202020204"/>
+            </a:endParaRPr>
+          </a:p>
+        </p:txBody>
+      </p:sp>
+      <p:sp>
+        <p:nvSpPr>
+          <p:cNvPr id="11" name="TextBox 10"/>
           <p:cNvSpPr txBox="1"/>
           <p:nvPr/>
         </p:nvSpPr>
@@ -6556,10 +6940,16 @@
                 <a:solidFill>
                   <a:srgbClr val="1F2937"/>
                 </a:solidFill>
-                <a:latin typeface="Arial"/>
-              </a:rPr>
-              <a:t>6</a:t>
-            </a:r>
+                <a:latin typeface="Arial" panose="020B0604020202020204"/>
+              </a:rPr>
+              <a:t>7</a:t>
+            </a:r>
+            <a:endParaRPr sz="1300">
+              <a:solidFill>
+                <a:srgbClr val="1F2937"/>
+              </a:solidFill>
+              <a:latin typeface="Arial" panose="020B0604020202020204"/>
+            </a:endParaRPr>
           </a:p>
         </p:txBody>
       </p:sp>
@@ -6571,8 +6961,8 @@
 </p:sld>
 </file>
 
-<file path=ppt/slides/slide8.xml><?xml version="1.0" encoding="utf-8"?>
-<p:sld xmlns:a="http://schemas.openxmlformats.org/drawingml/2006/main" xmlns:p="http://schemas.openxmlformats.org/presentationml/2006/main" xmlns:r="http://schemas.openxmlformats.org/officeDocument/2006/relationships">
+<file path=ppt/slides/slide9.xml><?xml version="1.0" encoding="utf-8"?>
+<p:sld xmlns:a="http://schemas.openxmlformats.org/drawingml/2006/main" xmlns:r="http://schemas.openxmlformats.org/officeDocument/2006/relationships" xmlns:p="http://schemas.openxmlformats.org/presentationml/2006/main">
   <p:cSld>
     <p:spTree>
       <p:nvGrpSpPr>
@@ -6652,16 +7042,46 @@
                 <a:solidFill>
                   <a:srgbClr val="1F2937"/>
                 </a:solidFill>
-                <a:latin typeface="Arial"/>
-              </a:rPr>
-              <a:t>Element: ruthenium is cheap and active — but it dissolves</a:t>
-            </a:r>
+                <a:latin typeface="Arial" panose="020B0604020202020204"/>
+              </a:rPr>
+              <a:t>Solution: put Ru into a MnO₂ framework by electrodeposition</a:t>
+            </a:r>
+            <a:endParaRPr sz="2700" b="1">
+              <a:solidFill>
+                <a:srgbClr val="1F2937"/>
+              </a:solidFill>
+              <a:latin typeface="Arial" panose="020B0604020202020204"/>
+            </a:endParaRPr>
           </a:p>
         </p:txBody>
       </p:sp>
       <p:pic>
         <p:nvPicPr>
           <p:cNvPr id="4" name="Picture 3" descr="logo_nus_black.png"/>
+          <p:cNvPicPr>
+            <a:picLocks noChangeAspect="1"/>
+          </p:cNvPicPr>
+          <p:nvPr/>
+        </p:nvPicPr>
+        <p:blipFill>
+          <a:blip r:embed="rId1"/>
+          <a:stretch>
+            <a:fillRect/>
+          </a:stretch>
+        </p:blipFill>
+        <p:spPr>
+          <a:xfrm>
+            <a:off x="11018520" y="237744"/>
+            <a:ext cx="822960" cy="545812"/>
+          </a:xfrm>
+          <a:prstGeom prst="rect">
+            <a:avLst/>
+          </a:prstGeom>
+        </p:spPr>
+      </p:pic>
+      <p:pic>
+        <p:nvPicPr>
+          <p:cNvPr id="5" name="Picture 4" descr="use_nc_fig2_full.png"/>
           <p:cNvPicPr>
             <a:picLocks noChangeAspect="1"/>
           </p:cNvPicPr>
@@ -6675,32 +7095,8 @@
         </p:blipFill>
         <p:spPr>
           <a:xfrm>
-            <a:off x="11018520" y="237744"/>
-            <a:ext cx="822960" cy="545812"/>
-          </a:xfrm>
-          <a:prstGeom prst="rect">
-            <a:avLst/>
-          </a:prstGeom>
-        </p:spPr>
-      </p:pic>
-      <p:pic>
-        <p:nvPicPr>
-          <p:cNvPr id="5" name="Picture 4" descr="fig3_g.png"/>
-          <p:cNvPicPr>
-            <a:picLocks noChangeAspect="1"/>
-          </p:cNvPicPr>
-          <p:nvPr/>
-        </p:nvPicPr>
-        <p:blipFill>
-          <a:blip r:embed="rId3"/>
-          <a:stretch>
-            <a:fillRect/>
-          </a:stretch>
-        </p:blipFill>
-        <p:spPr>
-          <a:xfrm>
-            <a:off x="1039845" y="1325880"/>
-            <a:ext cx="3498149" cy="3703319"/>
+            <a:off x="356870" y="1134110"/>
+            <a:ext cx="4772025" cy="3804285"/>
           </a:xfrm>
           <a:prstGeom prst="rect">
             <a:avLst/>
@@ -6715,8 +7111,8 @@
         </p:nvSpPr>
         <p:spPr>
           <a:xfrm>
-            <a:off x="5257800" y="1325880"/>
-            <a:ext cx="6291072" cy="1280160"/>
+            <a:off x="5394960" y="1133856"/>
+            <a:ext cx="6153912" cy="1005840"/>
           </a:xfrm>
           <a:prstGeom prst="roundRect">
             <a:avLst/>
@@ -6746,19 +7142,25 @@
           </a:fontRef>
         </p:style>
         <p:txBody>
-          <a:bodyPr rtlCol="0" anchor="t" wrap="square" lIns="146304" rIns="146304" tIns="82296" bIns="82296"/>
+          <a:bodyPr wrap="square" lIns="146304" tIns="82296" rIns="146304" bIns="82296" rtlCol="0" anchor="t"/>
           <a:lstStyle/>
           <a:p>
             <a:pPr algn="ctr"/>
             <a:r>
-              <a:rPr sz="1800" b="1">
+              <a:rPr sz="1700" b="1">
                 <a:solidFill>
                   <a:srgbClr val="003D7C"/>
                 </a:solidFill>
-                <a:latin typeface="Arial"/>
-              </a:rPr>
-              <a:t>Why Ru and not Ir</a:t>
-            </a:r>
+                <a:latin typeface="Arial" panose="020B0604020202020204"/>
+              </a:rPr>
+              <a:t>Mn³⁺/Mn⁴⁺ buffers the charge</a:t>
+            </a:r>
+            <a:endParaRPr sz="1700" b="1">
+              <a:solidFill>
+                <a:srgbClr val="003D7C"/>
+              </a:solidFill>
+              <a:latin typeface="Arial" panose="020B0604020202020204"/>
+            </a:endParaRPr>
           </a:p>
           <a:p>
             <a:pPr>
@@ -6767,14 +7169,20 @@
               </a:spcBef>
             </a:pPr>
             <a:r>
-              <a:rPr sz="1500">
+              <a:rPr sz="1400">
                 <a:solidFill>
                   <a:srgbClr val="1F2937"/>
                 </a:solidFill>
-                <a:latin typeface="Arial"/>
-              </a:rPr>
-              <a:t>RuO₂ is more active than IrO₂ for OER, and ruthenium is far cheaper and more abundant; iridium supply is the ceiling for PEM deployment.</a:t>
-            </a:r>
+                <a:latin typeface="Arial" panose="020B0604020202020204"/>
+              </a:rPr>
+              <a:t>The MnO₂ framework holds Ru near +4, outside the RuO₄ window.</a:t>
+            </a:r>
+            <a:endParaRPr sz="1400">
+              <a:solidFill>
+                <a:srgbClr val="1F2937"/>
+              </a:solidFill>
+              <a:latin typeface="Arial" panose="020B0604020202020204"/>
+            </a:endParaRPr>
           </a:p>
         </p:txBody>
       </p:sp>
@@ -6786,18 +7194,18 @@
         </p:nvSpPr>
         <p:spPr>
           <a:xfrm>
-            <a:off x="5257800" y="2743200"/>
-            <a:ext cx="6291072" cy="1051560"/>
+            <a:off x="5394960" y="2231136"/>
+            <a:ext cx="6153912" cy="1325880"/>
           </a:xfrm>
           <a:prstGeom prst="roundRect">
             <a:avLst/>
           </a:prstGeom>
           <a:solidFill>
-            <a:srgbClr val="FDF2F2"/>
+            <a:srgbClr val="E8F5EE"/>
           </a:solidFill>
           <a:ln w="12700">
             <a:solidFill>
-              <a:srgbClr val="E8A0A0"/>
+              <a:srgbClr val="9AD3B8"/>
             </a:solidFill>
           </a:ln>
           <a:effectLst/>
@@ -6817,19 +7225,25 @@
           </a:fontRef>
         </p:style>
         <p:txBody>
-          <a:bodyPr rtlCol="0" anchor="t" wrap="square" lIns="146304" rIns="146304" tIns="82296" bIns="82296"/>
+          <a:bodyPr wrap="square" lIns="146304" tIns="82296" rIns="146304" bIns="82296" rtlCol="0" anchor="t"/>
           <a:lstStyle/>
           <a:p>
             <a:pPr algn="ctr"/>
             <a:r>
-              <a:rPr sz="1800" b="1">
+              <a:rPr sz="1700" b="1">
                 <a:solidFill>
                   <a:srgbClr val="003D7C"/>
                 </a:solidFill>
-                <a:latin typeface="Arial"/>
-              </a:rPr>
-              <a:t>Failure channel 1 — over-oxidation</a:t>
-            </a:r>
+                <a:latin typeface="Arial" panose="020B0604020202020204"/>
+              </a:rPr>
+              <a:t>The metal goes inside the lattice</a:t>
+            </a:r>
+            <a:endParaRPr sz="1700" b="1">
+              <a:solidFill>
+                <a:srgbClr val="003D7C"/>
+              </a:solidFill>
+              <a:latin typeface="Arial" panose="020B0604020202020204"/>
+            </a:endParaRPr>
           </a:p>
           <a:p>
             <a:pPr>
@@ -6838,14 +7252,20 @@
               </a:spcBef>
             </a:pPr>
             <a:r>
-              <a:rPr sz="1500">
+              <a:rPr sz="1400">
                 <a:solidFill>
                   <a:srgbClr val="1F2937"/>
                 </a:solidFill>
-                <a:latin typeface="Arial"/>
-              </a:rPr>
-              <a:t>Ruthenium is oxidised beyond +4 to soluble RuO₄ and leaves the electrode.</a:t>
-            </a:r>
+                <a:latin typeface="Arial" panose="020B0604020202020204"/>
+              </a:rPr>
+              <a:t>Electrodeposited MnO₂ oxidises the metal and drives it in, forming M–O–Mn bridges; EXAFS shows the Ru–O–Mn shell.</a:t>
+            </a:r>
+            <a:endParaRPr sz="1400">
+              <a:solidFill>
+                <a:srgbClr val="1F2937"/>
+              </a:solidFill>
+              <a:latin typeface="Arial" panose="020B0604020202020204"/>
+            </a:endParaRPr>
           </a:p>
         </p:txBody>
       </p:sp>
@@ -6857,18 +7277,18 @@
         </p:nvSpPr>
         <p:spPr>
           <a:xfrm>
-            <a:off x="5257800" y="3931920"/>
-            <a:ext cx="6291072" cy="1051560"/>
+            <a:off x="5394960" y="3648456"/>
+            <a:ext cx="6153912" cy="1005840"/>
           </a:xfrm>
           <a:prstGeom prst="roundRect">
             <a:avLst/>
           </a:prstGeom>
           <a:solidFill>
-            <a:srgbClr val="FDF2F2"/>
+            <a:srgbClr val="FFF7EC"/>
           </a:solidFill>
           <a:ln w="12700">
             <a:solidFill>
-              <a:srgbClr val="E8A0A0"/>
+              <a:srgbClr val="EF7C00"/>
             </a:solidFill>
           </a:ln>
           <a:effectLst/>
@@ -6888,19 +7308,25 @@
           </a:fontRef>
         </p:style>
         <p:txBody>
-          <a:bodyPr rtlCol="0" anchor="t" wrap="square" lIns="146304" rIns="146304" tIns="82296" bIns="82296"/>
+          <a:bodyPr wrap="square" lIns="146304" tIns="82296" rIns="146304" bIns="82296" rtlCol="0" anchor="t"/>
           <a:lstStyle/>
           <a:p>
             <a:pPr algn="ctr"/>
             <a:r>
-              <a:rPr sz="1800" b="1">
+              <a:rPr sz="1700" b="1">
                 <a:solidFill>
                   <a:srgbClr val="003D7C"/>
                 </a:solidFill>
-                <a:latin typeface="Arial"/>
-              </a:rPr>
-              <a:t>Failure channel 2 — lattice oxygen</a:t>
-            </a:r>
+                <a:latin typeface="Arial" panose="020B0604020202020204"/>
+              </a:rPr>
+              <a:t>Electrodeposition makes it tunable</a:t>
+            </a:r>
+            <a:endParaRPr sz="1700" b="1">
+              <a:solidFill>
+                <a:srgbClr val="003D7C"/>
+              </a:solidFill>
+              <a:latin typeface="Arial" panose="020B0604020202020204"/>
+            </a:endParaRPr>
           </a:p>
           <a:p>
             <a:pPr>
@@ -6909,14 +7335,20 @@
               </a:spcBef>
             </a:pPr>
             <a:r>
-              <a:rPr sz="1500">
+              <a:rPr sz="1400">
                 <a:solidFill>
                   <a:srgbClr val="1F2937"/>
                 </a:solidFill>
-                <a:latin typeface="Arial"/>
-              </a:rPr>
-              <a:t>Lattice oxygen participates, a vacancy is left behind, and the metal follows the oxygen out.</a:t>
-            </a:r>
+                <a:latin typeface="Arial" panose="020B0604020202020204"/>
+              </a:rPr>
+              <a:t>Deposition charge, current and bath pH set the phase and edge-site density.</a:t>
+            </a:r>
+            <a:endParaRPr sz="1400">
+              <a:solidFill>
+                <a:srgbClr val="1F2937"/>
+              </a:solidFill>
+              <a:latin typeface="Arial" panose="020B0604020202020204"/>
+            </a:endParaRPr>
           </a:p>
         </p:txBody>
       </p:sp>
@@ -6928,8 +7360,8 @@
         </p:nvSpPr>
         <p:spPr>
           <a:xfrm>
-            <a:off x="640080" y="5303520"/>
-            <a:ext cx="10908792" cy="326898"/>
+            <a:off x="640080" y="5280660"/>
+            <a:ext cx="10908792" cy="838962"/>
           </a:xfrm>
           <a:prstGeom prst="rect">
             <a:avLst/>
@@ -6948,419 +7380,21 @@
               </a:spcAft>
             </a:pPr>
             <a:r>
-              <a:rPr sz="1700" b="1">
-                <a:solidFill>
-                  <a:srgbClr val="C0392B"/>
-                </a:solidFill>
-                <a:latin typeface="Arial"/>
-              </a:rPr>
-              <a:t>Both descriptions refer to the same surface: the metal redox and the oxygen redox must be controlled together. The proof of stabilisation has to be a dissolution measurement.</a:t>
-            </a:r>
-          </a:p>
-        </p:txBody>
-      </p:sp>
-      <p:sp>
-        <p:nvSpPr>
-          <p:cNvPr id="10" name="TextBox 9"/>
-          <p:cNvSpPr txBox="1"/>
-          <p:nvPr/>
-        </p:nvSpPr>
-        <p:spPr>
-          <a:xfrm>
-            <a:off x="640080" y="6419088"/>
-            <a:ext cx="10241280" cy="274320"/>
-          </a:xfrm>
-          <a:prstGeom prst="rect">
-            <a:avLst/>
-          </a:prstGeom>
-          <a:noFill/>
-        </p:spPr>
-        <p:txBody>
-          <a:bodyPr wrap="none">
-            <a:spAutoFit/>
-          </a:bodyPr>
-          <a:lstStyle/>
-          <a:p>
-            <a:r>
-              <a:rPr sz="1000" i="1">
-                <a:solidFill>
-                  <a:srgbClr val="5B6572"/>
-                </a:solidFill>
-                <a:latin typeface="Arial"/>
-              </a:rPr>
-              <a:t>Adv. Energy Mater. 2023, 13, 2301391, Fig. 1g and §6  ·  Re-doped RuO₂: Nat. Commun. 2023, 14, 354.</a:t>
-            </a:r>
-          </a:p>
-        </p:txBody>
-      </p:sp>
-      <p:sp>
-        <p:nvSpPr>
-          <p:cNvPr id="11" name="TextBox 10"/>
-          <p:cNvSpPr txBox="1"/>
-          <p:nvPr/>
-        </p:nvSpPr>
-        <p:spPr>
-          <a:xfrm>
-            <a:off x="11292840" y="6400800"/>
-            <a:ext cx="621792" cy="274320"/>
-          </a:xfrm>
-          <a:prstGeom prst="rect">
-            <a:avLst/>
-          </a:prstGeom>
-          <a:noFill/>
-        </p:spPr>
-        <p:txBody>
-          <a:bodyPr wrap="none">
-            <a:spAutoFit/>
-          </a:bodyPr>
-          <a:lstStyle/>
-          <a:p>
-            <a:pPr algn="r"/>
-            <a:r>
-              <a:rPr sz="1300">
+              <a:rPr sz="1600" b="0">
                 <a:solidFill>
                   <a:srgbClr val="1F2937"/>
                 </a:solidFill>
-                <a:latin typeface="Arial"/>
-              </a:rPr>
-              <a:t>7</a:t>
-            </a:r>
-          </a:p>
-        </p:txBody>
-      </p:sp>
-    </p:spTree>
-  </p:cSld>
-  <p:clrMapOvr>
-    <a:masterClrMapping/>
-  </p:clrMapOvr>
-</p:sld>
-</file>
-
-<file path=ppt/slides/slide9.xml><?xml version="1.0" encoding="utf-8"?>
-<p:sld xmlns:a="http://schemas.openxmlformats.org/drawingml/2006/main" xmlns:p="http://schemas.openxmlformats.org/presentationml/2006/main" xmlns:r="http://schemas.openxmlformats.org/officeDocument/2006/relationships">
-  <p:cSld>
-    <p:spTree>
-      <p:nvGrpSpPr>
-        <p:cNvPr id="1" name=""/>
-        <p:cNvGrpSpPr/>
-        <p:nvPr/>
-      </p:nvGrpSpPr>
-      <p:grpSpPr/>
-      <p:sp>
-        <p:nvSpPr>
-          <p:cNvPr id="2" name="Rectangle 1"/>
-          <p:cNvSpPr/>
-          <p:nvPr/>
-        </p:nvSpPr>
-        <p:spPr>
-          <a:xfrm>
-            <a:off x="384048" y="274320"/>
-            <a:ext cx="68580" cy="512064"/>
-          </a:xfrm>
-          <a:prstGeom prst="rect">
-            <a:avLst/>
-          </a:prstGeom>
-          <a:solidFill>
-            <a:srgbClr val="003D7C"/>
-          </a:solidFill>
-          <a:ln>
-            <a:noFill/>
-          </a:ln>
-          <a:effectLst/>
-        </p:spPr>
-        <p:style>
-          <a:lnRef idx="1">
-            <a:schemeClr val="accent1"/>
-          </a:lnRef>
-          <a:fillRef idx="3">
-            <a:schemeClr val="accent1"/>
-          </a:fillRef>
-          <a:effectRef idx="2">
-            <a:schemeClr val="accent1"/>
-          </a:effectRef>
-          <a:fontRef idx="minor">
-            <a:schemeClr val="lt1"/>
-          </a:fontRef>
-        </p:style>
-        <p:txBody>
-          <a:bodyPr rtlCol="0" anchor="ctr"/>
-          <a:lstStyle/>
-          <a:p>
-            <a:pPr algn="ctr"/>
-          </a:p>
-        </p:txBody>
-      </p:sp>
-      <p:sp>
-        <p:nvSpPr>
-          <p:cNvPr id="3" name="TextBox 2"/>
-          <p:cNvSpPr txBox="1"/>
-          <p:nvPr/>
-        </p:nvSpPr>
-        <p:spPr>
-          <a:xfrm>
-            <a:off x="548640" y="201168"/>
-            <a:ext cx="10332720" cy="658368"/>
-          </a:xfrm>
-          <a:prstGeom prst="rect">
-            <a:avLst/>
-          </a:prstGeom>
-          <a:noFill/>
-        </p:spPr>
-        <p:txBody>
-          <a:bodyPr wrap="square">
-            <a:spAutoFit/>
-          </a:bodyPr>
-          <a:lstStyle/>
-          <a:p>
-            <a:r>
-              <a:rPr sz="2700" b="1">
-                <a:solidFill>
-                  <a:srgbClr val="1F2937"/>
-                </a:solidFill>
-                <a:latin typeface="Arial"/>
-              </a:rPr>
-              <a:t>Route: target OPM, keep AEM as the fallback, avoid LOM</a:t>
-            </a:r>
-          </a:p>
-        </p:txBody>
-      </p:sp>
-      <p:pic>
-        <p:nvPicPr>
-          <p:cNvPr id="4" name="Picture 3" descr="logo_nus_black.png"/>
-          <p:cNvPicPr>
-            <a:picLocks noChangeAspect="1"/>
-          </p:cNvPicPr>
-          <p:nvPr/>
-        </p:nvPicPr>
-        <p:blipFill>
-          <a:blip r:embed="rId2"/>
-          <a:stretch>
-            <a:fillRect/>
-          </a:stretch>
-        </p:blipFill>
-        <p:spPr>
-          <a:xfrm>
-            <a:off x="11018520" y="237744"/>
-            <a:ext cx="822960" cy="545812"/>
-          </a:xfrm>
-          <a:prstGeom prst="rect">
-            <a:avLst/>
-          </a:prstGeom>
-        </p:spPr>
-      </p:pic>
-      <p:pic>
-        <p:nvPicPr>
-          <p:cNvPr id="5" name="Picture 4" descr="fig_c_volcano1.png"/>
-          <p:cNvPicPr>
-            <a:picLocks noChangeAspect="1"/>
-          </p:cNvPicPr>
-          <p:nvPr/>
-        </p:nvPicPr>
-        <p:blipFill>
-          <a:blip r:embed="rId3"/>
-          <a:stretch>
-            <a:fillRect/>
-          </a:stretch>
-        </p:blipFill>
-        <p:spPr>
-          <a:xfrm>
-            <a:off x="640079" y="1188720"/>
-            <a:ext cx="3669945" cy="3024083"/>
-          </a:xfrm>
-          <a:prstGeom prst="rect">
-            <a:avLst/>
-          </a:prstGeom>
-        </p:spPr>
-      </p:pic>
-      <p:pic>
-        <p:nvPicPr>
-          <p:cNvPr id="6" name="Picture 5" descr="fig_d_volcano2.png"/>
-          <p:cNvPicPr>
-            <a:picLocks noChangeAspect="1"/>
-          </p:cNvPicPr>
-          <p:nvPr/>
-        </p:nvPicPr>
-        <p:blipFill>
-          <a:blip r:embed="rId4"/>
-          <a:stretch>
-            <a:fillRect/>
-          </a:stretch>
-        </p:blipFill>
-        <p:spPr>
-          <a:xfrm>
-            <a:off x="4675785" y="1188720"/>
-            <a:ext cx="3828134" cy="3024084"/>
-          </a:xfrm>
-          <a:prstGeom prst="rect">
-            <a:avLst/>
-          </a:prstGeom>
-        </p:spPr>
-      </p:pic>
-      <p:sp>
-        <p:nvSpPr>
-          <p:cNvPr id="7" name="Rounded Rectangle 6"/>
-          <p:cNvSpPr/>
-          <p:nvPr/>
-        </p:nvSpPr>
-        <p:spPr>
-          <a:xfrm>
-            <a:off x="8732520" y="1188720"/>
-            <a:ext cx="2816352" cy="2057400"/>
-          </a:xfrm>
-          <a:prstGeom prst="roundRect">
-            <a:avLst/>
-          </a:prstGeom>
-          <a:solidFill>
-            <a:srgbClr val="EFF5FB"/>
-          </a:solidFill>
-          <a:ln w="12700">
-            <a:solidFill>
-              <a:srgbClr val="CFE0F2"/>
-            </a:solidFill>
-          </a:ln>
-          <a:effectLst/>
-        </p:spPr>
-        <p:style>
-          <a:lnRef idx="1">
-            <a:schemeClr val="accent1"/>
-          </a:lnRef>
-          <a:fillRef idx="3">
-            <a:schemeClr val="accent1"/>
-          </a:fillRef>
-          <a:effectRef idx="2">
-            <a:schemeClr val="accent1"/>
-          </a:effectRef>
-          <a:fontRef idx="minor">
-            <a:schemeClr val="lt1"/>
-          </a:fontRef>
-        </p:style>
-        <p:txBody>
-          <a:bodyPr rtlCol="0" anchor="t" wrap="square" lIns="146304" rIns="146304" tIns="82296" bIns="82296"/>
-          <a:lstStyle/>
-          <a:p>
-            <a:pPr algn="ctr"/>
-            <a:r>
-              <a:rPr sz="1600" b="1">
-                <a:solidFill>
-                  <a:srgbClr val="003D7C"/>
-                </a:solidFill>
-                <a:latin typeface="Arial"/>
-              </a:rPr>
-              <a:t>Our ranking</a:t>
-            </a:r>
-          </a:p>
-          <a:p>
-            <a:pPr>
-              <a:spcBef>
-                <a:spcPts val="400"/>
-              </a:spcBef>
-            </a:pPr>
-            <a:r>
-              <a:rPr sz="1350">
-                <a:solidFill>
-                  <a:srgbClr val="1F2937"/>
-                </a:solidFill>
-                <a:latin typeface="Arial"/>
-              </a:rPr>
-              <a:t>1. OPM — direct O–O coupling, no vacancy.
-2. AEM — safe, but capped at 0.37 V.
-3. LOM — activity paid for with the surface: avoid.</a:t>
-            </a:r>
-          </a:p>
-        </p:txBody>
-      </p:sp>
-      <p:sp>
-        <p:nvSpPr>
-          <p:cNvPr id="8" name="Rounded Rectangle 7"/>
-          <p:cNvSpPr/>
-          <p:nvPr/>
-        </p:nvSpPr>
-        <p:spPr>
-          <a:xfrm>
-            <a:off x="8732520" y="3401568"/>
-            <a:ext cx="2816352" cy="1645920"/>
-          </a:xfrm>
-          <a:prstGeom prst="roundRect">
-            <a:avLst/>
-          </a:prstGeom>
-          <a:solidFill>
-            <a:srgbClr val="E8F5EE"/>
-          </a:solidFill>
-          <a:ln w="12700">
-            <a:solidFill>
-              <a:srgbClr val="9AD3B8"/>
-            </a:solidFill>
-          </a:ln>
-          <a:effectLst/>
-        </p:spPr>
-        <p:style>
-          <a:lnRef idx="1">
-            <a:schemeClr val="accent1"/>
-          </a:lnRef>
-          <a:fillRef idx="3">
-            <a:schemeClr val="accent1"/>
-          </a:fillRef>
-          <a:effectRef idx="2">
-            <a:schemeClr val="accent1"/>
-          </a:effectRef>
-          <a:fontRef idx="minor">
-            <a:schemeClr val="lt1"/>
-          </a:fontRef>
-        </p:style>
-        <p:txBody>
-          <a:bodyPr rtlCol="0" anchor="t" wrap="square" lIns="146304" rIns="146304" tIns="82296" bIns="82296"/>
-          <a:lstStyle/>
-          <a:p>
-            <a:pPr algn="ctr"/>
-            <a:r>
-              <a:rPr sz="1600" b="1">
-                <a:solidFill>
-                  <a:srgbClr val="003D7C"/>
-                </a:solidFill>
-                <a:latin typeface="Arial"/>
-              </a:rPr>
-              <a:t>Precedent</a:t>
-            </a:r>
-          </a:p>
-          <a:p>
-            <a:pPr>
-              <a:spcBef>
-                <a:spcPts val="400"/>
-              </a:spcBef>
-            </a:pPr>
-            <a:r>
-              <a:rPr sz="1350">
-                <a:solidFill>
-                  <a:srgbClr val="1F2937"/>
-                </a:solidFill>
-                <a:latin typeface="Arial"/>
-              </a:rPr>
-              <a:t>Ru on α-MnO₂ by cation exchange: 161 mV at 10 mA cm⁻², more than 200 h, oxide path, no oxygen vacancy.</a:t>
-            </a:r>
-          </a:p>
-        </p:txBody>
-      </p:sp>
-      <p:sp>
-        <p:nvSpPr>
-          <p:cNvPr id="9" name="TextBox 8"/>
-          <p:cNvSpPr txBox="1"/>
-          <p:nvPr/>
-        </p:nvSpPr>
-        <p:spPr>
-          <a:xfrm>
-            <a:off x="640080" y="5138928"/>
-            <a:ext cx="10908792" cy="582930"/>
-          </a:xfrm>
-          <a:prstGeom prst="rect">
-            <a:avLst/>
-          </a:prstGeom>
-          <a:noFill/>
-        </p:spPr>
-        <p:txBody>
-          <a:bodyPr wrap="square">
-            <a:spAutoFit/>
-          </a:bodyPr>
-          <a:lstStyle/>
+                <a:latin typeface="Arial" panose="020B0604020202020204"/>
+              </a:rPr>
+              <a:t>Figure: (a) synthesis route; (b) XRD of the Ru₀.₀₃Mn₀.₉₇O₂ series; (c) atomic-resolution STEM;</a:t>
+            </a:r>
+            <a:endParaRPr sz="1600" b="0">
+              <a:solidFill>
+                <a:srgbClr val="1F2937"/>
+              </a:solidFill>
+              <a:latin typeface="Arial" panose="020B0604020202020204"/>
+            </a:endParaRPr>
+          </a:p>
           <a:p>
             <a:pPr algn="l">
               <a:spcAft>
@@ -7372,10 +7406,16 @@
                 <a:solidFill>
                   <a:srgbClr val="1F2937"/>
                 </a:solidFill>
-                <a:latin typeface="Arial"/>
-              </a:rPr>
-              <a:t>Both volcano plots show the same ceiling: activity is set by the adsorption energies of the intermediates, and the scaling relation fixes the height of the volcano.</a:t>
-            </a:r>
+                <a:latin typeface="Arial" panose="020B0604020202020204"/>
+              </a:rPr>
+              <a:t>(d) EDS mapping; (e) intensity profiles; (f) Ru K-edge FT-EXAFS; (g) XANES; (h) Mn 3s XPS.</a:t>
+            </a:r>
+            <a:endParaRPr sz="1600" b="0">
+              <a:solidFill>
+                <a:srgbClr val="1F2937"/>
+              </a:solidFill>
+              <a:latin typeface="Arial" panose="020B0604020202020204"/>
+            </a:endParaRPr>
           </a:p>
           <a:p>
             <a:pPr algn="l">
@@ -7388,10 +7428,16 @@
                 <a:solidFill>
                   <a:srgbClr val="C0392B"/>
                 </a:solidFill>
-                <a:latin typeface="Arial"/>
-              </a:rPr>
-              <a:t>Breaking that ceiling requires a different route — for us, OPM on a MnO₂-stabilised Ru site.</a:t>
-            </a:r>
+                <a:latin typeface="Arial" panose="020B0604020202020204"/>
+              </a:rPr>
+              <a:t>Our contribution: build it by electrodeposition and prove Ru sits inside the lattice, not on the surface.</a:t>
+            </a:r>
+            <a:endParaRPr sz="1700" b="1">
+              <a:solidFill>
+                <a:srgbClr val="C0392B"/>
+              </a:solidFill>
+              <a:latin typeface="Arial" panose="020B0604020202020204"/>
+            </a:endParaRPr>
           </a:p>
         </p:txBody>
       </p:sp>
@@ -7422,10 +7468,16 @@
                 <a:solidFill>
                   <a:srgbClr val="5B6572"/>
                 </a:solidFill>
-                <a:latin typeface="Arial"/>
-              </a:rPr>
-              <a:t>Adv. Energy Mater. 2023, 13, 2301391, Fig. 1c and Fig. 1d; precedent as reviewed there, §6.</a:t>
-            </a:r>
+                <a:latin typeface="Arial" panose="020B0604020202020204"/>
+              </a:rPr>
+              <a:t>Nat. Commun. 2026, 17, 7657, Fig. 2  ·  Science 2024, 384, 666, Fig. 1A (precedent with Ir).</a:t>
+            </a:r>
+            <a:endParaRPr sz="1000" i="1">
+              <a:solidFill>
+                <a:srgbClr val="5B6572"/>
+              </a:solidFill>
+              <a:latin typeface="Arial" panose="020B0604020202020204"/>
+            </a:endParaRPr>
           </a:p>
         </p:txBody>
       </p:sp>
@@ -7437,8 +7489,8 @@
         </p:nvSpPr>
         <p:spPr>
           <a:xfrm>
-            <a:off x="11292840" y="6400800"/>
-            <a:ext cx="621792" cy="274320"/>
+            <a:off x="11639677" y="6400800"/>
+            <a:ext cx="274955" cy="291465"/>
           </a:xfrm>
           <a:prstGeom prst="rect">
             <a:avLst/>
@@ -7453,14 +7505,20 @@
           <a:p>
             <a:pPr algn="r"/>
             <a:r>
-              <a:rPr sz="1300">
+              <a:rPr lang="en-US" sz="1300">
                 <a:solidFill>
                   <a:srgbClr val="1F2937"/>
                 </a:solidFill>
-                <a:latin typeface="Arial"/>
+                <a:latin typeface="Arial" panose="020B0604020202020204"/>
               </a:rPr>
               <a:t>8</a:t>
             </a:r>
+            <a:endParaRPr lang="en-US" sz="1300">
+              <a:solidFill>
+                <a:srgbClr val="1F2937"/>
+              </a:solidFill>
+              <a:latin typeface="Arial" panose="020B0604020202020204"/>
+            </a:endParaRPr>
           </a:p>
         </p:txBody>
       </p:sp>
@@ -7788,6 +7846,10 @@
       </a:style>
     </a:lnDef>
   </a:objectDefaults>
-  <a:extraClrSchemeLst/>
+  <a:extLst>
+    <a:ext uri="{05A4C25C-085E-4340-85A3-A5531E510DB2}">
+      <thm15:themeFamily xmlns:thm15="http://schemas.microsoft.com/office/thememl/2012/main" name="Office Theme" id="{62F939B6-93AF-4DB8-9C6B-D6C7DFDC589F}" vid="{4A3C46E8-61CC-4603-A589-7422A47A8E4A}"/>
+    </a:ext>
+  </a:extLst>
 </a:theme>
 </file>
--- a/FYP/组会/2026.9.24/9.24-v4.pptx
+++ b/FYP/组会/2026.9.24/9.24-v4.pptx
@@ -4933,7 +4933,7 @@
                 </a:solidFill>
                 <a:latin typeface="Arial" panose="020B0604020202020204"/>
               </a:rPr>
-              <a:t> and AEM has an restriction</a:t>
+              <a:t> and AEM has a restriction</a:t>
             </a:r>
             <a:r>
               <a:rPr sz="1700" b="1">
@@ -5043,7 +5043,7 @@
           <p:nvPr/>
         </p:nvPicPr>
         <p:blipFill>
-          <a:blip r:embed="rId4"/>
+          <a:blip r:embed="rId5"/>
           <a:stretch>
             <a:fillRect/>
           </a:stretch>
